--- a/labs/lab01/slides/slides.pptx
+++ b/labs/lab01/slides/slides.pptx
@@ -4,6 +4,9 @@
   <p:sldMasterIdLst>
     <p:sldMasterId id="2147483696" r:id="rId1"/>
   </p:sldMasterIdLst>
+  <p:notesMasterIdLst>
+    <p:notesMasterId r:id="rId17"/>
+  </p:notesMasterIdLst>
   <p:sldIdLst>
     <p:sldId id="256" r:id="rId2"/>
     <p:sldId id="257" r:id="rId3"/>
@@ -20,16 +23,6 @@
     <p:sldId id="268" r:id="rId14"/>
     <p:sldId id="269" r:id="rId15"/>
     <p:sldId id="270" r:id="rId16"/>
-    <p:sldId id="271" r:id="rId17"/>
-    <p:sldId id="272" r:id="rId18"/>
-    <p:sldId id="273" r:id="rId19"/>
-    <p:sldId id="274" r:id="rId20"/>
-    <p:sldId id="275" r:id="rId21"/>
-    <p:sldId id="276" r:id="rId22"/>
-    <p:sldId id="277" r:id="rId23"/>
-    <p:sldId id="278" r:id="rId24"/>
-    <p:sldId id="279" r:id="rId25"/>
-    <p:sldId id="280" r:id="rId26"/>
   </p:sldIdLst>
   <p:sldSz cx="12192000" cy="6858000"/>
   <p:notesSz cx="6858000" cy="9144000"/>
@@ -136,6 +129,1513 @@
 </p:presentation>
 </file>
 
+<file path=ppt/notesMasters/notesMaster1.xml><?xml version="1.0" encoding="utf-8"?>
+<p:notesMaster xmlns:a="http://schemas.openxmlformats.org/drawingml/2006/main" xmlns:r="http://schemas.openxmlformats.org/officeDocument/2006/relationships" xmlns:p="http://schemas.openxmlformats.org/presentationml/2006/main">
+  <p:cSld>
+    <p:bg>
+      <p:bgRef idx="1001">
+        <a:schemeClr val="bg1"/>
+      </p:bgRef>
+    </p:bg>
+    <p:spTree>
+      <p:nvGrpSpPr>
+        <p:cNvPr id="1" name=""/>
+        <p:cNvGrpSpPr/>
+        <p:nvPr/>
+      </p:nvGrpSpPr>
+      <p:grpSpPr>
+        <a:xfrm>
+          <a:off x="0" y="0"/>
+          <a:ext cx="0" cy="0"/>
+          <a:chOff x="0" y="0"/>
+          <a:chExt cx="0" cy="0"/>
+        </a:xfrm>
+      </p:grpSpPr>
+      <p:sp>
+        <p:nvSpPr>
+          <p:cNvPr id="2" name="Header Placeholder 1"/>
+          <p:cNvSpPr>
+            <a:spLocks noGrp="1"/>
+          </p:cNvSpPr>
+          <p:nvPr>
+            <p:ph type="hdr" sz="quarter"/>
+          </p:nvPr>
+        </p:nvSpPr>
+        <p:spPr>
+          <a:xfrm>
+            <a:off x="0" y="0"/>
+            <a:ext cx="2971800" cy="458788"/>
+          </a:xfrm>
+          <a:prstGeom prst="rect">
+            <a:avLst/>
+          </a:prstGeom>
+        </p:spPr>
+        <p:txBody>
+          <a:bodyPr vert="horz" lIns="91440" tIns="45720" rIns="91440" bIns="45720" rtlCol="0"/>
+          <a:lstStyle>
+            <a:lvl1pPr algn="l">
+              <a:defRPr sz="1200"/>
+            </a:lvl1pPr>
+          </a:lstStyle>
+          <a:p>
+            <a:endParaRPr lang="en-US"/>
+          </a:p>
+        </p:txBody>
+      </p:sp>
+      <p:sp>
+        <p:nvSpPr>
+          <p:cNvPr id="3" name="Date Placeholder 2"/>
+          <p:cNvSpPr>
+            <a:spLocks noGrp="1"/>
+          </p:cNvSpPr>
+          <p:nvPr>
+            <p:ph type="dt" idx="1"/>
+          </p:nvPr>
+        </p:nvSpPr>
+        <p:spPr>
+          <a:xfrm>
+            <a:off x="3884613" y="0"/>
+            <a:ext cx="2971800" cy="458788"/>
+          </a:xfrm>
+          <a:prstGeom prst="rect">
+            <a:avLst/>
+          </a:prstGeom>
+        </p:spPr>
+        <p:txBody>
+          <a:bodyPr vert="horz" lIns="91440" tIns="45720" rIns="91440" bIns="45720" rtlCol="0"/>
+          <a:lstStyle>
+            <a:lvl1pPr algn="r">
+              <a:defRPr sz="1200"/>
+            </a:lvl1pPr>
+          </a:lstStyle>
+          <a:p>
+            <a:fld id="{0F9C1CCF-B725-44A7-AA57-5E433BD85C9F}" type="datetimeFigureOut">
+              <a:rPr lang="en-US" smtClean="0"/>
+              <a:t>1/2/22</a:t>
+            </a:fld>
+            <a:endParaRPr lang="en-US"/>
+          </a:p>
+        </p:txBody>
+      </p:sp>
+      <p:sp>
+        <p:nvSpPr>
+          <p:cNvPr id="4" name="Slide Image Placeholder 3"/>
+          <p:cNvSpPr>
+            <a:spLocks noGrp="1" noRot="1" noChangeAspect="1"/>
+          </p:cNvSpPr>
+          <p:nvPr>
+            <p:ph type="sldImg" idx="2"/>
+          </p:nvPr>
+        </p:nvSpPr>
+        <p:spPr>
+          <a:xfrm>
+            <a:off x="685800" y="1143000"/>
+            <a:ext cx="5486400" cy="3086100"/>
+          </a:xfrm>
+          <a:prstGeom prst="rect">
+            <a:avLst/>
+          </a:prstGeom>
+          <a:noFill/>
+          <a:ln w="12700">
+            <a:solidFill>
+              <a:prstClr val="black"/>
+            </a:solidFill>
+          </a:ln>
+        </p:spPr>
+        <p:txBody>
+          <a:bodyPr vert="horz" lIns="91440" tIns="45720" rIns="91440" bIns="45720" rtlCol="0" anchor="ctr"/>
+          <a:lstStyle/>
+          <a:p>
+            <a:endParaRPr lang="en-US"/>
+          </a:p>
+        </p:txBody>
+      </p:sp>
+      <p:sp>
+        <p:nvSpPr>
+          <p:cNvPr id="5" name="Notes Placeholder 4"/>
+          <p:cNvSpPr>
+            <a:spLocks noGrp="1"/>
+          </p:cNvSpPr>
+          <p:nvPr>
+            <p:ph type="body" sz="quarter" idx="3"/>
+          </p:nvPr>
+        </p:nvSpPr>
+        <p:spPr>
+          <a:xfrm>
+            <a:off x="685800" y="4400550"/>
+            <a:ext cx="5486400" cy="3600450"/>
+          </a:xfrm>
+          <a:prstGeom prst="rect">
+            <a:avLst/>
+          </a:prstGeom>
+        </p:spPr>
+        <p:txBody>
+          <a:bodyPr vert="horz" lIns="91440" tIns="45720" rIns="91440" bIns="45720" rtlCol="0"/>
+          <a:lstStyle/>
+          <a:p>
+            <a:pPr lvl="0"/>
+            <a:r>
+              <a:rPr lang="en-US"/>
+              <a:t>Click to edit Master text styles</a:t>
+            </a:r>
+          </a:p>
+          <a:p>
+            <a:pPr lvl="1"/>
+            <a:r>
+              <a:rPr lang="en-US"/>
+              <a:t>Second level</a:t>
+            </a:r>
+          </a:p>
+          <a:p>
+            <a:pPr lvl="2"/>
+            <a:r>
+              <a:rPr lang="en-US"/>
+              <a:t>Third level</a:t>
+            </a:r>
+          </a:p>
+          <a:p>
+            <a:pPr lvl="3"/>
+            <a:r>
+              <a:rPr lang="en-US"/>
+              <a:t>Fourth level</a:t>
+            </a:r>
+          </a:p>
+          <a:p>
+            <a:pPr lvl="4"/>
+            <a:r>
+              <a:rPr lang="en-US"/>
+              <a:t>Fifth level</a:t>
+            </a:r>
+          </a:p>
+        </p:txBody>
+      </p:sp>
+      <p:sp>
+        <p:nvSpPr>
+          <p:cNvPr id="6" name="Footer Placeholder 5"/>
+          <p:cNvSpPr>
+            <a:spLocks noGrp="1"/>
+          </p:cNvSpPr>
+          <p:nvPr>
+            <p:ph type="ftr" sz="quarter" idx="4"/>
+          </p:nvPr>
+        </p:nvSpPr>
+        <p:spPr>
+          <a:xfrm>
+            <a:off x="0" y="8685213"/>
+            <a:ext cx="2971800" cy="458787"/>
+          </a:xfrm>
+          <a:prstGeom prst="rect">
+            <a:avLst/>
+          </a:prstGeom>
+        </p:spPr>
+        <p:txBody>
+          <a:bodyPr vert="horz" lIns="91440" tIns="45720" rIns="91440" bIns="45720" rtlCol="0" anchor="b"/>
+          <a:lstStyle>
+            <a:lvl1pPr algn="l">
+              <a:defRPr sz="1200"/>
+            </a:lvl1pPr>
+          </a:lstStyle>
+          <a:p>
+            <a:endParaRPr lang="en-US"/>
+          </a:p>
+        </p:txBody>
+      </p:sp>
+      <p:sp>
+        <p:nvSpPr>
+          <p:cNvPr id="7" name="Slide Number Placeholder 6"/>
+          <p:cNvSpPr>
+            <a:spLocks noGrp="1"/>
+          </p:cNvSpPr>
+          <p:nvPr>
+            <p:ph type="sldNum" sz="quarter" idx="5"/>
+          </p:nvPr>
+        </p:nvSpPr>
+        <p:spPr>
+          <a:xfrm>
+            <a:off x="3884613" y="8685213"/>
+            <a:ext cx="2971800" cy="458787"/>
+          </a:xfrm>
+          <a:prstGeom prst="rect">
+            <a:avLst/>
+          </a:prstGeom>
+        </p:spPr>
+        <p:txBody>
+          <a:bodyPr vert="horz" lIns="91440" tIns="45720" rIns="91440" bIns="45720" rtlCol="0" anchor="b"/>
+          <a:lstStyle>
+            <a:lvl1pPr algn="r">
+              <a:defRPr sz="1200"/>
+            </a:lvl1pPr>
+          </a:lstStyle>
+          <a:p>
+            <a:fld id="{18BDFEC3-8487-43E8-A154-7C12CBC1FFF2}" type="slidenum">
+              <a:rPr lang="en-US" smtClean="0"/>
+              <a:t>‹#›</a:t>
+            </a:fld>
+            <a:endParaRPr lang="en-US"/>
+          </a:p>
+        </p:txBody>
+      </p:sp>
+    </p:spTree>
+    <p:extLst>
+      <p:ext uri="{BB962C8B-B14F-4D97-AF65-F5344CB8AC3E}">
+        <p14:creationId xmlns:p14="http://schemas.microsoft.com/office/powerpoint/2010/main" val="3782709779"/>
+      </p:ext>
+    </p:extLst>
+  </p:cSld>
+  <p:clrMap bg1="lt1" tx1="dk1" bg2="lt2" tx2="dk2" accent1="accent1" accent2="accent2" accent3="accent3" accent4="accent4" accent5="accent5" accent6="accent6" hlink="hlink" folHlink="folHlink"/>
+  <p:notesStyle>
+    <a:lvl1pPr marL="0" algn="l" defTabSz="914400" rtl="0" eaLnBrk="1" latinLnBrk="0" hangingPunct="1">
+      <a:defRPr sz="1200" kern="1200">
+        <a:solidFill>
+          <a:schemeClr val="tx1"/>
+        </a:solidFill>
+        <a:latin typeface="+mn-lt"/>
+        <a:ea typeface="+mn-ea"/>
+        <a:cs typeface="+mn-cs"/>
+      </a:defRPr>
+    </a:lvl1pPr>
+    <a:lvl2pPr marL="457200" algn="l" defTabSz="914400" rtl="0" eaLnBrk="1" latinLnBrk="0" hangingPunct="1">
+      <a:defRPr sz="1200" kern="1200">
+        <a:solidFill>
+          <a:schemeClr val="tx1"/>
+        </a:solidFill>
+        <a:latin typeface="+mn-lt"/>
+        <a:ea typeface="+mn-ea"/>
+        <a:cs typeface="+mn-cs"/>
+      </a:defRPr>
+    </a:lvl2pPr>
+    <a:lvl3pPr marL="914400" algn="l" defTabSz="914400" rtl="0" eaLnBrk="1" latinLnBrk="0" hangingPunct="1">
+      <a:defRPr sz="1200" kern="1200">
+        <a:solidFill>
+          <a:schemeClr val="tx1"/>
+        </a:solidFill>
+        <a:latin typeface="+mn-lt"/>
+        <a:ea typeface="+mn-ea"/>
+        <a:cs typeface="+mn-cs"/>
+      </a:defRPr>
+    </a:lvl3pPr>
+    <a:lvl4pPr marL="1371600" algn="l" defTabSz="914400" rtl="0" eaLnBrk="1" latinLnBrk="0" hangingPunct="1">
+      <a:defRPr sz="1200" kern="1200">
+        <a:solidFill>
+          <a:schemeClr val="tx1"/>
+        </a:solidFill>
+        <a:latin typeface="+mn-lt"/>
+        <a:ea typeface="+mn-ea"/>
+        <a:cs typeface="+mn-cs"/>
+      </a:defRPr>
+    </a:lvl4pPr>
+    <a:lvl5pPr marL="1828800" algn="l" defTabSz="914400" rtl="0" eaLnBrk="1" latinLnBrk="0" hangingPunct="1">
+      <a:defRPr sz="1200" kern="1200">
+        <a:solidFill>
+          <a:schemeClr val="tx1"/>
+        </a:solidFill>
+        <a:latin typeface="+mn-lt"/>
+        <a:ea typeface="+mn-ea"/>
+        <a:cs typeface="+mn-cs"/>
+      </a:defRPr>
+    </a:lvl5pPr>
+    <a:lvl6pPr marL="2286000" algn="l" defTabSz="914400" rtl="0" eaLnBrk="1" latinLnBrk="0" hangingPunct="1">
+      <a:defRPr sz="1200" kern="1200">
+        <a:solidFill>
+          <a:schemeClr val="tx1"/>
+        </a:solidFill>
+        <a:latin typeface="+mn-lt"/>
+        <a:ea typeface="+mn-ea"/>
+        <a:cs typeface="+mn-cs"/>
+      </a:defRPr>
+    </a:lvl6pPr>
+    <a:lvl7pPr marL="2743200" algn="l" defTabSz="914400" rtl="0" eaLnBrk="1" latinLnBrk="0" hangingPunct="1">
+      <a:defRPr sz="1200" kern="1200">
+        <a:solidFill>
+          <a:schemeClr val="tx1"/>
+        </a:solidFill>
+        <a:latin typeface="+mn-lt"/>
+        <a:ea typeface="+mn-ea"/>
+        <a:cs typeface="+mn-cs"/>
+      </a:defRPr>
+    </a:lvl7pPr>
+    <a:lvl8pPr marL="3200400" algn="l" defTabSz="914400" rtl="0" eaLnBrk="1" latinLnBrk="0" hangingPunct="1">
+      <a:defRPr sz="1200" kern="1200">
+        <a:solidFill>
+          <a:schemeClr val="tx1"/>
+        </a:solidFill>
+        <a:latin typeface="+mn-lt"/>
+        <a:ea typeface="+mn-ea"/>
+        <a:cs typeface="+mn-cs"/>
+      </a:defRPr>
+    </a:lvl8pPr>
+    <a:lvl9pPr marL="3657600" algn="l" defTabSz="914400" rtl="0" eaLnBrk="1" latinLnBrk="0" hangingPunct="1">
+      <a:defRPr sz="1200" kern="1200">
+        <a:solidFill>
+          <a:schemeClr val="tx1"/>
+        </a:solidFill>
+        <a:latin typeface="+mn-lt"/>
+        <a:ea typeface="+mn-ea"/>
+        <a:cs typeface="+mn-cs"/>
+      </a:defRPr>
+    </a:lvl9pPr>
+  </p:notesStyle>
+</p:notesMaster>
+</file>
+
+<file path=ppt/notesSlides/notesSlide1.xml><?xml version="1.0" encoding="utf-8"?>
+<p:notes xmlns:a="http://schemas.openxmlformats.org/drawingml/2006/main" xmlns:r="http://schemas.openxmlformats.org/officeDocument/2006/relationships" xmlns:p="http://schemas.openxmlformats.org/presentationml/2006/main">
+  <p:cSld>
+    <p:spTree>
+      <p:nvGrpSpPr>
+        <p:cNvPr id="1" name=""/>
+        <p:cNvGrpSpPr/>
+        <p:nvPr/>
+      </p:nvGrpSpPr>
+      <p:grpSpPr>
+        <a:xfrm>
+          <a:off x="0" y="0"/>
+          <a:ext cx="0" cy="0"/>
+          <a:chOff x="0" y="0"/>
+          <a:chExt cx="0" cy="0"/>
+        </a:xfrm>
+      </p:grpSpPr>
+      <p:sp>
+        <p:nvSpPr>
+          <p:cNvPr id="2" name="Slide Image Placeholder 1"/>
+          <p:cNvSpPr>
+            <a:spLocks noGrp="1" noRot="1" noChangeAspect="1"/>
+          </p:cNvSpPr>
+          <p:nvPr>
+            <p:ph type="sldImg"/>
+          </p:nvPr>
+        </p:nvSpPr>
+        <p:spPr/>
+      </p:sp>
+      <p:sp>
+        <p:nvSpPr>
+          <p:cNvPr id="3" name="Notes Placeholder 2"/>
+          <p:cNvSpPr>
+            <a:spLocks noGrp="1"/>
+          </p:cNvSpPr>
+          <p:nvPr>
+            <p:ph type="body" idx="1"/>
+          </p:nvPr>
+        </p:nvSpPr>
+        <p:spPr/>
+        <p:txBody>
+          <a:bodyPr/>
+          <a:lstStyle/>
+          <a:p>
+            <a:pPr lvl="0" indent="0" marL="0">
+              <a:buNone/>
+            </a:pPr>
+            <a:r>
+              <a:rPr/>
+              <a:t>Preview the workflow as organize, verify, and export. The sequence matters: a polished reference generated from incorrect metadata is still incorrect.</a:t>
+            </a:r>
+          </a:p>
+        </p:txBody>
+      </p:sp>
+      <p:sp>
+        <p:nvSpPr>
+          <p:cNvPr id="4" name="Slide Number Placeholder 3"/>
+          <p:cNvSpPr>
+            <a:spLocks noGrp="1"/>
+          </p:cNvSpPr>
+          <p:nvPr>
+            <p:ph type="sldNum" sz="quarter" idx="10"/>
+          </p:nvPr>
+        </p:nvSpPr>
+        <p:spPr/>
+        <p:txBody>
+          <a:bodyPr/>
+          <a:lstStyle/>
+          <a:p>
+            <a:fld id="{18BDFEC3-8487-43E8-A154-7C12CBC1FFF2}" type="slidenum">
+              <a:rPr lang="en-US"/>
+              <a:t>2</a:t>
+            </a:fld>
+            <a:endParaRPr lang="en-US"/>
+          </a:p>
+        </p:txBody>
+      </p:sp>
+    </p:spTree>
+  </p:cSld>
+</p:notes>
+</file>
+
+<file path=ppt/notesSlides/notesSlide10.xml><?xml version="1.0" encoding="utf-8"?>
+<p:notes xmlns:a="http://schemas.openxmlformats.org/drawingml/2006/main" xmlns:r="http://schemas.openxmlformats.org/officeDocument/2006/relationships" xmlns:p="http://schemas.openxmlformats.org/presentationml/2006/main">
+  <p:cSld>
+    <p:spTree>
+      <p:nvGrpSpPr>
+        <p:cNvPr id="1" name=""/>
+        <p:cNvGrpSpPr/>
+        <p:nvPr/>
+      </p:nvGrpSpPr>
+      <p:grpSpPr>
+        <a:xfrm>
+          <a:off x="0" y="0"/>
+          <a:ext cx="0" cy="0"/>
+          <a:chOff x="0" y="0"/>
+          <a:chExt cx="0" cy="0"/>
+        </a:xfrm>
+      </p:grpSpPr>
+      <p:sp>
+        <p:nvSpPr>
+          <p:cNvPr id="2" name="Slide Image Placeholder 1"/>
+          <p:cNvSpPr>
+            <a:spLocks noGrp="1" noRot="1" noChangeAspect="1"/>
+          </p:cNvSpPr>
+          <p:nvPr>
+            <p:ph type="sldImg"/>
+          </p:nvPr>
+        </p:nvSpPr>
+        <p:spPr/>
+      </p:sp>
+      <p:sp>
+        <p:nvSpPr>
+          <p:cNvPr id="3" name="Notes Placeholder 2"/>
+          <p:cNvSpPr>
+            <a:spLocks noGrp="1"/>
+          </p:cNvSpPr>
+          <p:nvPr>
+            <p:ph type="body" idx="1"/>
+          </p:nvPr>
+        </p:nvSpPr>
+        <p:spPr/>
+        <p:txBody>
+          <a:bodyPr/>
+          <a:lstStyle/>
+          <a:p>
+            <a:pPr lvl="0" indent="0" marL="0">
+              <a:buNone/>
+            </a:pPr>
+            <a:r>
+              <a:rPr/>
+              <a:t>Have students repair the symbol in the title and complete every missing journal field. This example shows why incomplete indexing must be corrected manually.</a:t>
+            </a:r>
+          </a:p>
+        </p:txBody>
+      </p:sp>
+      <p:sp>
+        <p:nvSpPr>
+          <p:cNvPr id="4" name="Slide Number Placeholder 3"/>
+          <p:cNvSpPr>
+            <a:spLocks noGrp="1"/>
+          </p:cNvSpPr>
+          <p:nvPr>
+            <p:ph type="sldNum" sz="quarter" idx="10"/>
+          </p:nvPr>
+        </p:nvSpPr>
+        <p:spPr/>
+        <p:txBody>
+          <a:bodyPr/>
+          <a:lstStyle/>
+          <a:p>
+            <a:fld id="{18BDFEC3-8487-43E8-A154-7C12CBC1FFF2}" type="slidenum">
+              <a:rPr lang="en-US"/>
+              <a:t>11</a:t>
+            </a:fld>
+            <a:endParaRPr lang="en-US"/>
+          </a:p>
+        </p:txBody>
+      </p:sp>
+    </p:spTree>
+  </p:cSld>
+</p:notes>
+</file>
+
+<file path=ppt/notesSlides/notesSlide11.xml><?xml version="1.0" encoding="utf-8"?>
+<p:notes xmlns:a="http://schemas.openxmlformats.org/drawingml/2006/main" xmlns:r="http://schemas.openxmlformats.org/officeDocument/2006/relationships" xmlns:p="http://schemas.openxmlformats.org/presentationml/2006/main">
+  <p:cSld>
+    <p:spTree>
+      <p:nvGrpSpPr>
+        <p:cNvPr id="1" name=""/>
+        <p:cNvGrpSpPr/>
+        <p:nvPr/>
+      </p:nvGrpSpPr>
+      <p:grpSpPr>
+        <a:xfrm>
+          <a:off x="0" y="0"/>
+          <a:ext cx="0" cy="0"/>
+          <a:chOff x="0" y="0"/>
+          <a:chExt cx="0" cy="0"/>
+        </a:xfrm>
+      </p:grpSpPr>
+      <p:sp>
+        <p:nvSpPr>
+          <p:cNvPr id="2" name="Slide Image Placeholder 1"/>
+          <p:cNvSpPr>
+            <a:spLocks noGrp="1" noRot="1" noChangeAspect="1"/>
+          </p:cNvSpPr>
+          <p:nvPr>
+            <p:ph type="sldImg"/>
+          </p:nvPr>
+        </p:nvSpPr>
+        <p:spPr/>
+      </p:sp>
+      <p:sp>
+        <p:nvSpPr>
+          <p:cNvPr id="3" name="Notes Placeholder 2"/>
+          <p:cNvSpPr>
+            <a:spLocks noGrp="1"/>
+          </p:cNvSpPr>
+          <p:nvPr>
+            <p:ph type="body" idx="1"/>
+          </p:nvPr>
+        </p:nvSpPr>
+        <p:spPr/>
+        <p:txBody>
+          <a:bodyPr/>
+          <a:lstStyle/>
+          <a:p>
+            <a:pPr lvl="0" indent="0" marL="0">
+              <a:buNone/>
+            </a:pPr>
+            <a:r>
+              <a:rPr/>
+              <a:t>For a standalone PDF, create a parent item before entering the bibliographic fields. The parent-child structure keeps the file attached to the citation record.</a:t>
+            </a:r>
+          </a:p>
+        </p:txBody>
+      </p:sp>
+      <p:sp>
+        <p:nvSpPr>
+          <p:cNvPr id="4" name="Slide Number Placeholder 3"/>
+          <p:cNvSpPr>
+            <a:spLocks noGrp="1"/>
+          </p:cNvSpPr>
+          <p:nvPr>
+            <p:ph type="sldNum" sz="quarter" idx="10"/>
+          </p:nvPr>
+        </p:nvSpPr>
+        <p:spPr/>
+        <p:txBody>
+          <a:bodyPr/>
+          <a:lstStyle/>
+          <a:p>
+            <a:fld id="{18BDFEC3-8487-43E8-A154-7C12CBC1FFF2}" type="slidenum">
+              <a:rPr lang="en-US"/>
+              <a:t>12</a:t>
+            </a:fld>
+            <a:endParaRPr lang="en-US"/>
+          </a:p>
+        </p:txBody>
+      </p:sp>
+    </p:spTree>
+  </p:cSld>
+</p:notes>
+</file>
+
+<file path=ppt/notesSlides/notesSlide12.xml><?xml version="1.0" encoding="utf-8"?>
+<p:notes xmlns:a="http://schemas.openxmlformats.org/drawingml/2006/main" xmlns:r="http://schemas.openxmlformats.org/officeDocument/2006/relationships" xmlns:p="http://schemas.openxmlformats.org/presentationml/2006/main">
+  <p:cSld>
+    <p:spTree>
+      <p:nvGrpSpPr>
+        <p:cNvPr id="1" name=""/>
+        <p:cNvGrpSpPr/>
+        <p:nvPr/>
+      </p:nvGrpSpPr>
+      <p:grpSpPr>
+        <a:xfrm>
+          <a:off x="0" y="0"/>
+          <a:ext cx="0" cy="0"/>
+          <a:chOff x="0" y="0"/>
+          <a:chExt cx="0" cy="0"/>
+        </a:xfrm>
+      </p:grpSpPr>
+      <p:sp>
+        <p:nvSpPr>
+          <p:cNvPr id="2" name="Slide Image Placeholder 1"/>
+          <p:cNvSpPr>
+            <a:spLocks noGrp="1" noRot="1" noChangeAspect="1"/>
+          </p:cNvSpPr>
+          <p:nvPr>
+            <p:ph type="sldImg"/>
+          </p:nvPr>
+        </p:nvSpPr>
+        <p:spPr/>
+      </p:sp>
+      <p:sp>
+        <p:nvSpPr>
+          <p:cNvPr id="3" name="Notes Placeholder 2"/>
+          <p:cNvSpPr>
+            <a:spLocks noGrp="1"/>
+          </p:cNvSpPr>
+          <p:nvPr>
+            <p:ph type="body" idx="1"/>
+          </p:nvPr>
+        </p:nvSpPr>
+        <p:spPr/>
+        <p:txBody>
+          <a:bodyPr/>
+          <a:lstStyle/>
+          <a:p>
+            <a:pPr lvl="0" indent="0" marL="0">
+              <a:buNone/>
+            </a:pPr>
+            <a:r>
+              <a:rPr/>
+              <a:t>The identifier tool is efficient but not complete. Students should verify the returned metadata and attach or locate the PDF separately when Zotero does not do so.</a:t>
+            </a:r>
+          </a:p>
+        </p:txBody>
+      </p:sp>
+      <p:sp>
+        <p:nvSpPr>
+          <p:cNvPr id="4" name="Slide Number Placeholder 3"/>
+          <p:cNvSpPr>
+            <a:spLocks noGrp="1"/>
+          </p:cNvSpPr>
+          <p:nvPr>
+            <p:ph type="sldNum" sz="quarter" idx="10"/>
+          </p:nvPr>
+        </p:nvSpPr>
+        <p:spPr/>
+        <p:txBody>
+          <a:bodyPr/>
+          <a:lstStyle/>
+          <a:p>
+            <a:fld id="{18BDFEC3-8487-43E8-A154-7C12CBC1FFF2}" type="slidenum">
+              <a:rPr lang="en-US"/>
+              <a:t>13</a:t>
+            </a:fld>
+            <a:endParaRPr lang="en-US"/>
+          </a:p>
+        </p:txBody>
+      </p:sp>
+    </p:spTree>
+  </p:cSld>
+</p:notes>
+</file>
+
+<file path=ppt/notesSlides/notesSlide13.xml><?xml version="1.0" encoding="utf-8"?>
+<p:notes xmlns:a="http://schemas.openxmlformats.org/drawingml/2006/main" xmlns:r="http://schemas.openxmlformats.org/officeDocument/2006/relationships" xmlns:p="http://schemas.openxmlformats.org/presentationml/2006/main">
+  <p:cSld>
+    <p:spTree>
+      <p:nvGrpSpPr>
+        <p:cNvPr id="1" name=""/>
+        <p:cNvGrpSpPr/>
+        <p:nvPr/>
+      </p:nvGrpSpPr>
+      <p:grpSpPr>
+        <a:xfrm>
+          <a:off x="0" y="0"/>
+          <a:ext cx="0" cy="0"/>
+          <a:chOff x="0" y="0"/>
+          <a:chExt cx="0" cy="0"/>
+        </a:xfrm>
+      </p:grpSpPr>
+      <p:sp>
+        <p:nvSpPr>
+          <p:cNvPr id="2" name="Slide Image Placeholder 1"/>
+          <p:cNvSpPr>
+            <a:spLocks noGrp="1" noRot="1" noChangeAspect="1"/>
+          </p:cNvSpPr>
+          <p:nvPr>
+            <p:ph type="sldImg"/>
+          </p:nvPr>
+        </p:nvSpPr>
+        <p:spPr/>
+      </p:sp>
+      <p:sp>
+        <p:nvSpPr>
+          <p:cNvPr id="3" name="Notes Placeholder 2"/>
+          <p:cNvSpPr>
+            <a:spLocks noGrp="1"/>
+          </p:cNvSpPr>
+          <p:nvPr>
+            <p:ph type="body" idx="1"/>
+          </p:nvPr>
+        </p:nvSpPr>
+        <p:spPr/>
+        <p:txBody>
+          <a:bodyPr/>
+          <a:lstStyle/>
+          <a:p>
+            <a:pPr lvl="0" indent="0" marL="0">
+              <a:buNone/>
+            </a:pPr>
+            <a:r>
+              <a:rPr/>
+              <a:t>Emphasize that item type is a structural choice, not a cosmetic label. Choosing the correct type reveals the editors, publisher, publication date, and other fields needed for APA 7.</a:t>
+            </a:r>
+          </a:p>
+        </p:txBody>
+      </p:sp>
+      <p:sp>
+        <p:nvSpPr>
+          <p:cNvPr id="4" name="Slide Number Placeholder 3"/>
+          <p:cNvSpPr>
+            <a:spLocks noGrp="1"/>
+          </p:cNvSpPr>
+          <p:nvPr>
+            <p:ph type="sldNum" sz="quarter" idx="10"/>
+          </p:nvPr>
+        </p:nvSpPr>
+        <p:spPr/>
+        <p:txBody>
+          <a:bodyPr/>
+          <a:lstStyle/>
+          <a:p>
+            <a:fld id="{18BDFEC3-8487-43E8-A154-7C12CBC1FFF2}" type="slidenum">
+              <a:rPr lang="en-US"/>
+              <a:t>14</a:t>
+            </a:fld>
+            <a:endParaRPr lang="en-US"/>
+          </a:p>
+        </p:txBody>
+      </p:sp>
+    </p:spTree>
+  </p:cSld>
+</p:notes>
+</file>
+
+<file path=ppt/notesSlides/notesSlide14.xml><?xml version="1.0" encoding="utf-8"?>
+<p:notes xmlns:a="http://schemas.openxmlformats.org/drawingml/2006/main" xmlns:r="http://schemas.openxmlformats.org/officeDocument/2006/relationships" xmlns:p="http://schemas.openxmlformats.org/presentationml/2006/main">
+  <p:cSld>
+    <p:spTree>
+      <p:nvGrpSpPr>
+        <p:cNvPr id="1" name=""/>
+        <p:cNvGrpSpPr/>
+        <p:nvPr/>
+      </p:nvGrpSpPr>
+      <p:grpSpPr>
+        <a:xfrm>
+          <a:off x="0" y="0"/>
+          <a:ext cx="0" cy="0"/>
+          <a:chOff x="0" y="0"/>
+          <a:chExt cx="0" cy="0"/>
+        </a:xfrm>
+      </p:grpSpPr>
+      <p:sp>
+        <p:nvSpPr>
+          <p:cNvPr id="2" name="Slide Image Placeholder 1"/>
+          <p:cNvSpPr>
+            <a:spLocks noGrp="1" noRot="1" noChangeAspect="1"/>
+          </p:cNvSpPr>
+          <p:nvPr>
+            <p:ph type="sldImg"/>
+          </p:nvPr>
+        </p:nvSpPr>
+        <p:spPr/>
+      </p:sp>
+      <p:sp>
+        <p:nvSpPr>
+          <p:cNvPr id="3" name="Notes Placeholder 2"/>
+          <p:cNvSpPr>
+            <a:spLocks noGrp="1"/>
+          </p:cNvSpPr>
+          <p:nvPr>
+            <p:ph type="body" idx="1"/>
+          </p:nvPr>
+        </p:nvSpPr>
+        <p:spPr/>
+        <p:txBody>
+          <a:bodyPr/>
+          <a:lstStyle/>
+          <a:p>
+            <a:pPr lvl="0" indent="0" marL="0">
+              <a:buNone/>
+            </a:pPr>
+            <a:r>
+              <a:rPr/>
+              <a:t>Close by distinguishing the two exports. A bibliography is the formatted APA reference list; a collection report is the fuller item record requested for checking the collection.</a:t>
+            </a:r>
+          </a:p>
+        </p:txBody>
+      </p:sp>
+      <p:sp>
+        <p:nvSpPr>
+          <p:cNvPr id="4" name="Slide Number Placeholder 3"/>
+          <p:cNvSpPr>
+            <a:spLocks noGrp="1"/>
+          </p:cNvSpPr>
+          <p:nvPr>
+            <p:ph type="sldNum" sz="quarter" idx="10"/>
+          </p:nvPr>
+        </p:nvSpPr>
+        <p:spPr/>
+        <p:txBody>
+          <a:bodyPr/>
+          <a:lstStyle/>
+          <a:p>
+            <a:fld id="{18BDFEC3-8487-43E8-A154-7C12CBC1FFF2}" type="slidenum">
+              <a:rPr lang="en-US"/>
+              <a:t>15</a:t>
+            </a:fld>
+            <a:endParaRPr lang="en-US"/>
+          </a:p>
+        </p:txBody>
+      </p:sp>
+    </p:spTree>
+  </p:cSld>
+</p:notes>
+</file>
+
+<file path=ppt/notesSlides/notesSlide2.xml><?xml version="1.0" encoding="utf-8"?>
+<p:notes xmlns:a="http://schemas.openxmlformats.org/drawingml/2006/main" xmlns:r="http://schemas.openxmlformats.org/officeDocument/2006/relationships" xmlns:p="http://schemas.openxmlformats.org/presentationml/2006/main">
+  <p:cSld>
+    <p:spTree>
+      <p:nvGrpSpPr>
+        <p:cNvPr id="1" name=""/>
+        <p:cNvGrpSpPr/>
+        <p:nvPr/>
+      </p:nvGrpSpPr>
+      <p:grpSpPr>
+        <a:xfrm>
+          <a:off x="0" y="0"/>
+          <a:ext cx="0" cy="0"/>
+          <a:chOff x="0" y="0"/>
+          <a:chExt cx="0" cy="0"/>
+        </a:xfrm>
+      </p:grpSpPr>
+      <p:sp>
+        <p:nvSpPr>
+          <p:cNvPr id="2" name="Slide Image Placeholder 1"/>
+          <p:cNvSpPr>
+            <a:spLocks noGrp="1" noRot="1" noChangeAspect="1"/>
+          </p:cNvSpPr>
+          <p:nvPr>
+            <p:ph type="sldImg"/>
+          </p:nvPr>
+        </p:nvSpPr>
+        <p:spPr/>
+      </p:sp>
+      <p:sp>
+        <p:nvSpPr>
+          <p:cNvPr id="3" name="Notes Placeholder 2"/>
+          <p:cNvSpPr>
+            <a:spLocks noGrp="1"/>
+          </p:cNvSpPr>
+          <p:nvPr>
+            <p:ph type="body" idx="1"/>
+          </p:nvPr>
+        </p:nvSpPr>
+        <p:spPr/>
+        <p:txBody>
+          <a:bodyPr/>
+          <a:lstStyle/>
+          <a:p>
+            <a:pPr lvl="0" indent="0" marL="0">
+              <a:buNone/>
+            </a:pPr>
+            <a:r>
+              <a:rPr/>
+              <a:t>Ask students to open the desktop application, the worksheet they will submit, and the online workbook. Interface locations may vary by Zotero version, but the underlying actions are the same.</a:t>
+            </a:r>
+          </a:p>
+        </p:txBody>
+      </p:sp>
+      <p:sp>
+        <p:nvSpPr>
+          <p:cNvPr id="4" name="Slide Number Placeholder 3"/>
+          <p:cNvSpPr>
+            <a:spLocks noGrp="1"/>
+          </p:cNvSpPr>
+          <p:nvPr>
+            <p:ph type="sldNum" sz="quarter" idx="10"/>
+          </p:nvPr>
+        </p:nvSpPr>
+        <p:spPr/>
+        <p:txBody>
+          <a:bodyPr/>
+          <a:lstStyle/>
+          <a:p>
+            <a:fld id="{18BDFEC3-8487-43E8-A154-7C12CBC1FFF2}" type="slidenum">
+              <a:rPr lang="en-US"/>
+              <a:t>3</a:t>
+            </a:fld>
+            <a:endParaRPr lang="en-US"/>
+          </a:p>
+        </p:txBody>
+      </p:sp>
+    </p:spTree>
+  </p:cSld>
+</p:notes>
+</file>
+
+<file path=ppt/notesSlides/notesSlide3.xml><?xml version="1.0" encoding="utf-8"?>
+<p:notes xmlns:a="http://schemas.openxmlformats.org/drawingml/2006/main" xmlns:r="http://schemas.openxmlformats.org/officeDocument/2006/relationships" xmlns:p="http://schemas.openxmlformats.org/presentationml/2006/main">
+  <p:cSld>
+    <p:spTree>
+      <p:nvGrpSpPr>
+        <p:cNvPr id="1" name=""/>
+        <p:cNvGrpSpPr/>
+        <p:nvPr/>
+      </p:nvGrpSpPr>
+      <p:grpSpPr>
+        <a:xfrm>
+          <a:off x="0" y="0"/>
+          <a:ext cx="0" cy="0"/>
+          <a:chOff x="0" y="0"/>
+          <a:chExt cx="0" cy="0"/>
+        </a:xfrm>
+      </p:grpSpPr>
+      <p:sp>
+        <p:nvSpPr>
+          <p:cNvPr id="2" name="Slide Image Placeholder 1"/>
+          <p:cNvSpPr>
+            <a:spLocks noGrp="1" noRot="1" noChangeAspect="1"/>
+          </p:cNvSpPr>
+          <p:nvPr>
+            <p:ph type="sldImg"/>
+          </p:nvPr>
+        </p:nvSpPr>
+        <p:spPr/>
+      </p:sp>
+      <p:sp>
+        <p:nvSpPr>
+          <p:cNvPr id="3" name="Notes Placeholder 2"/>
+          <p:cNvSpPr>
+            <a:spLocks noGrp="1"/>
+          </p:cNvSpPr>
+          <p:nvPr>
+            <p:ph type="body" idx="1"/>
+          </p:nvPr>
+        </p:nvSpPr>
+        <p:spPr/>
+        <p:txBody>
+          <a:bodyPr/>
+          <a:lstStyle/>
+          <a:p>
+            <a:pPr lvl="0" indent="0" marL="0">
+              <a:buNone/>
+            </a:pPr>
+            <a:r>
+              <a:rPr/>
+              <a:t>Orient students to the three-panel model. Collections organize the lab, the middle panel lists items, and the right panel holds the metadata that becomes the APA reference.</a:t>
+            </a:r>
+          </a:p>
+        </p:txBody>
+      </p:sp>
+      <p:sp>
+        <p:nvSpPr>
+          <p:cNvPr id="4" name="Slide Number Placeholder 3"/>
+          <p:cNvSpPr>
+            <a:spLocks noGrp="1"/>
+          </p:cNvSpPr>
+          <p:nvPr>
+            <p:ph type="sldNum" sz="quarter" idx="10"/>
+          </p:nvPr>
+        </p:nvSpPr>
+        <p:spPr/>
+        <p:txBody>
+          <a:bodyPr/>
+          <a:lstStyle/>
+          <a:p>
+            <a:fld id="{18BDFEC3-8487-43E8-A154-7C12CBC1FFF2}" type="slidenum">
+              <a:rPr lang="en-US"/>
+              <a:t>4</a:t>
+            </a:fld>
+            <a:endParaRPr lang="en-US"/>
+          </a:p>
+        </p:txBody>
+      </p:sp>
+    </p:spTree>
+  </p:cSld>
+</p:notes>
+</file>
+
+<file path=ppt/notesSlides/notesSlide4.xml><?xml version="1.0" encoding="utf-8"?>
+<p:notes xmlns:a="http://schemas.openxmlformats.org/drawingml/2006/main" xmlns:r="http://schemas.openxmlformats.org/officeDocument/2006/relationships" xmlns:p="http://schemas.openxmlformats.org/presentationml/2006/main">
+  <p:cSld>
+    <p:spTree>
+      <p:nvGrpSpPr>
+        <p:cNvPr id="1" name=""/>
+        <p:cNvGrpSpPr/>
+        <p:nvPr/>
+      </p:nvGrpSpPr>
+      <p:grpSpPr>
+        <a:xfrm>
+          <a:off x="0" y="0"/>
+          <a:ext cx="0" cy="0"/>
+          <a:chOff x="0" y="0"/>
+          <a:chExt cx="0" cy="0"/>
+        </a:xfrm>
+      </p:grpSpPr>
+      <p:sp>
+        <p:nvSpPr>
+          <p:cNvPr id="2" name="Slide Image Placeholder 1"/>
+          <p:cNvSpPr>
+            <a:spLocks noGrp="1" noRot="1" noChangeAspect="1"/>
+          </p:cNvSpPr>
+          <p:nvPr>
+            <p:ph type="sldImg"/>
+          </p:nvPr>
+        </p:nvSpPr>
+        <p:spPr/>
+      </p:sp>
+      <p:sp>
+        <p:nvSpPr>
+          <p:cNvPr id="3" name="Notes Placeholder 2"/>
+          <p:cNvSpPr>
+            <a:spLocks noGrp="1"/>
+          </p:cNvSpPr>
+          <p:nvPr>
+            <p:ph type="body" idx="1"/>
+          </p:nvPr>
+        </p:nvSpPr>
+        <p:spPr/>
+        <p:txBody>
+          <a:bodyPr/>
+          <a:lstStyle/>
+          <a:p>
+            <a:pPr lvl="0" indent="0" marL="0">
+              <a:buNone/>
+            </a:pPr>
+            <a:r>
+              <a:rPr/>
+              <a:t>Have students use the exact collection name from the worksheet. Confirm that the new collection appears under My Library before any files are added.</a:t>
+            </a:r>
+          </a:p>
+        </p:txBody>
+      </p:sp>
+      <p:sp>
+        <p:nvSpPr>
+          <p:cNvPr id="4" name="Slide Number Placeholder 3"/>
+          <p:cNvSpPr>
+            <a:spLocks noGrp="1"/>
+          </p:cNvSpPr>
+          <p:nvPr>
+            <p:ph type="sldNum" sz="quarter" idx="10"/>
+          </p:nvPr>
+        </p:nvSpPr>
+        <p:spPr/>
+        <p:txBody>
+          <a:bodyPr/>
+          <a:lstStyle/>
+          <a:p>
+            <a:fld id="{18BDFEC3-8487-43E8-A154-7C12CBC1FFF2}" type="slidenum">
+              <a:rPr lang="en-US"/>
+              <a:t>5</a:t>
+            </a:fld>
+            <a:endParaRPr lang="en-US"/>
+          </a:p>
+        </p:txBody>
+      </p:sp>
+    </p:spTree>
+  </p:cSld>
+</p:notes>
+</file>
+
+<file path=ppt/notesSlides/notesSlide5.xml><?xml version="1.0" encoding="utf-8"?>
+<p:notes xmlns:a="http://schemas.openxmlformats.org/drawingml/2006/main" xmlns:r="http://schemas.openxmlformats.org/officeDocument/2006/relationships" xmlns:p="http://schemas.openxmlformats.org/presentationml/2006/main">
+  <p:cSld>
+    <p:spTree>
+      <p:nvGrpSpPr>
+        <p:cNvPr id="1" name=""/>
+        <p:cNvGrpSpPr/>
+        <p:nvPr/>
+      </p:nvGrpSpPr>
+      <p:grpSpPr>
+        <a:xfrm>
+          <a:off x="0" y="0"/>
+          <a:ext cx="0" cy="0"/>
+          <a:chOff x="0" y="0"/>
+          <a:chExt cx="0" cy="0"/>
+        </a:xfrm>
+      </p:grpSpPr>
+      <p:sp>
+        <p:nvSpPr>
+          <p:cNvPr id="2" name="Slide Image Placeholder 1"/>
+          <p:cNvSpPr>
+            <a:spLocks noGrp="1" noRot="1" noChangeAspect="1"/>
+          </p:cNvSpPr>
+          <p:nvPr>
+            <p:ph type="sldImg"/>
+          </p:nvPr>
+        </p:nvSpPr>
+        <p:spPr/>
+      </p:sp>
+      <p:sp>
+        <p:nvSpPr>
+          <p:cNvPr id="3" name="Notes Placeholder 2"/>
+          <p:cNvSpPr>
+            <a:spLocks noGrp="1"/>
+          </p:cNvSpPr>
+          <p:nvPr>
+            <p:ph type="body" idx="1"/>
+          </p:nvPr>
+        </p:nvSpPr>
+        <p:spPr/>
+        <p:txBody>
+          <a:bodyPr/>
+          <a:lstStyle/>
+          <a:p>
+            <a:pPr lvl="0" indent="0" marL="0">
+              <a:buNone/>
+            </a:pPr>
+            <a:r>
+              <a:rPr/>
+              <a:t>Demonstrate dragging the PDF into the named collection. If the file lands only in My Library, move it before continuing so the submitted collection remains complete.</a:t>
+            </a:r>
+          </a:p>
+        </p:txBody>
+      </p:sp>
+      <p:sp>
+        <p:nvSpPr>
+          <p:cNvPr id="4" name="Slide Number Placeholder 3"/>
+          <p:cNvSpPr>
+            <a:spLocks noGrp="1"/>
+          </p:cNvSpPr>
+          <p:nvPr>
+            <p:ph type="sldNum" sz="quarter" idx="10"/>
+          </p:nvPr>
+        </p:nvSpPr>
+        <p:spPr/>
+        <p:txBody>
+          <a:bodyPr/>
+          <a:lstStyle/>
+          <a:p>
+            <a:fld id="{18BDFEC3-8487-43E8-A154-7C12CBC1FFF2}" type="slidenum">
+              <a:rPr lang="en-US"/>
+              <a:t>6</a:t>
+            </a:fld>
+            <a:endParaRPr lang="en-US"/>
+          </a:p>
+        </p:txBody>
+      </p:sp>
+    </p:spTree>
+  </p:cSld>
+</p:notes>
+</file>
+
+<file path=ppt/notesSlides/notesSlide6.xml><?xml version="1.0" encoding="utf-8"?>
+<p:notes xmlns:a="http://schemas.openxmlformats.org/drawingml/2006/main" xmlns:r="http://schemas.openxmlformats.org/officeDocument/2006/relationships" xmlns:p="http://schemas.openxmlformats.org/presentationml/2006/main">
+  <p:cSld>
+    <p:spTree>
+      <p:nvGrpSpPr>
+        <p:cNvPr id="1" name=""/>
+        <p:cNvGrpSpPr/>
+        <p:nvPr/>
+      </p:nvGrpSpPr>
+      <p:grpSpPr>
+        <a:xfrm>
+          <a:off x="0" y="0"/>
+          <a:ext cx="0" cy="0"/>
+          <a:chOff x="0" y="0"/>
+          <a:chExt cx="0" cy="0"/>
+        </a:xfrm>
+      </p:grpSpPr>
+      <p:sp>
+        <p:nvSpPr>
+          <p:cNvPr id="2" name="Slide Image Placeholder 1"/>
+          <p:cNvSpPr>
+            <a:spLocks noGrp="1" noRot="1" noChangeAspect="1"/>
+          </p:cNvSpPr>
+          <p:nvPr>
+            <p:ph type="sldImg"/>
+          </p:nvPr>
+        </p:nvSpPr>
+        <p:spPr/>
+      </p:sp>
+      <p:sp>
+        <p:nvSpPr>
+          <p:cNvPr id="3" name="Notes Placeholder 2"/>
+          <p:cNvSpPr>
+            <a:spLocks noGrp="1"/>
+          </p:cNvSpPr>
+          <p:nvPr>
+            <p:ph type="body" idx="1"/>
+          </p:nvPr>
+        </p:nvSpPr>
+        <p:spPr/>
+        <p:txBody>
+          <a:bodyPr/>
+          <a:lstStyle/>
+          <a:p>
+            <a:pPr lvl="0" indent="0" marL="0">
+              <a:buNone/>
+            </a:pPr>
+            <a:r>
+              <a:rPr/>
+              <a:t>Point to the disclosure arrow and distinguish the parent bibliographic record from its attached child PDF. Students should edit the parent item when correcting a citation.</a:t>
+            </a:r>
+          </a:p>
+        </p:txBody>
+      </p:sp>
+      <p:sp>
+        <p:nvSpPr>
+          <p:cNvPr id="4" name="Slide Number Placeholder 3"/>
+          <p:cNvSpPr>
+            <a:spLocks noGrp="1"/>
+          </p:cNvSpPr>
+          <p:nvPr>
+            <p:ph type="sldNum" sz="quarter" idx="10"/>
+          </p:nvPr>
+        </p:nvSpPr>
+        <p:spPr/>
+        <p:txBody>
+          <a:bodyPr/>
+          <a:lstStyle/>
+          <a:p>
+            <a:fld id="{18BDFEC3-8487-43E8-A154-7C12CBC1FFF2}" type="slidenum">
+              <a:rPr lang="en-US"/>
+              <a:t>7</a:t>
+            </a:fld>
+            <a:endParaRPr lang="en-US"/>
+          </a:p>
+        </p:txBody>
+      </p:sp>
+    </p:spTree>
+  </p:cSld>
+</p:notes>
+</file>
+
+<file path=ppt/notesSlides/notesSlide7.xml><?xml version="1.0" encoding="utf-8"?>
+<p:notes xmlns:a="http://schemas.openxmlformats.org/drawingml/2006/main" xmlns:r="http://schemas.openxmlformats.org/officeDocument/2006/relationships" xmlns:p="http://schemas.openxmlformats.org/presentationml/2006/main">
+  <p:cSld>
+    <p:spTree>
+      <p:nvGrpSpPr>
+        <p:cNvPr id="1" name=""/>
+        <p:cNvGrpSpPr/>
+        <p:nvPr/>
+      </p:nvGrpSpPr>
+      <p:grpSpPr>
+        <a:xfrm>
+          <a:off x="0" y="0"/>
+          <a:ext cx="0" cy="0"/>
+          <a:chOff x="0" y="0"/>
+          <a:chExt cx="0" cy="0"/>
+        </a:xfrm>
+      </p:grpSpPr>
+      <p:sp>
+        <p:nvSpPr>
+          <p:cNvPr id="2" name="Slide Image Placeholder 1"/>
+          <p:cNvSpPr>
+            <a:spLocks noGrp="1" noRot="1" noChangeAspect="1"/>
+          </p:cNvSpPr>
+          <p:nvPr>
+            <p:ph type="sldImg"/>
+          </p:nvPr>
+        </p:nvSpPr>
+        <p:spPr/>
+      </p:sp>
+      <p:sp>
+        <p:nvSpPr>
+          <p:cNvPr id="3" name="Notes Placeholder 2"/>
+          <p:cNvSpPr>
+            <a:spLocks noGrp="1"/>
+          </p:cNvSpPr>
+          <p:nvPr>
+            <p:ph type="body" idx="1"/>
+          </p:nvPr>
+        </p:nvSpPr>
+        <p:spPr/>
+        <p:txBody>
+          <a:bodyPr/>
+          <a:lstStyle/>
+          <a:p>
+            <a:pPr lvl="0" indent="0" marL="0">
+              <a:buNone/>
+            </a:pPr>
+            <a:r>
+              <a:rPr/>
+              <a:t>Use the annotated record as a field-by-field checklist. Automatic retrieval is a starting point; students remain responsible for item type, authors, title, source, date, pages, and DOI.</a:t>
+            </a:r>
+          </a:p>
+        </p:txBody>
+      </p:sp>
+      <p:sp>
+        <p:nvSpPr>
+          <p:cNvPr id="4" name="Slide Number Placeholder 3"/>
+          <p:cNvSpPr>
+            <a:spLocks noGrp="1"/>
+          </p:cNvSpPr>
+          <p:nvPr>
+            <p:ph type="sldNum" sz="quarter" idx="10"/>
+          </p:nvPr>
+        </p:nvSpPr>
+        <p:spPr/>
+        <p:txBody>
+          <a:bodyPr/>
+          <a:lstStyle/>
+          <a:p>
+            <a:fld id="{18BDFEC3-8487-43E8-A154-7C12CBC1FFF2}" type="slidenum">
+              <a:rPr lang="en-US"/>
+              <a:t>8</a:t>
+            </a:fld>
+            <a:endParaRPr lang="en-US"/>
+          </a:p>
+        </p:txBody>
+      </p:sp>
+    </p:spTree>
+  </p:cSld>
+</p:notes>
+</file>
+
+<file path=ppt/notesSlides/notesSlide8.xml><?xml version="1.0" encoding="utf-8"?>
+<p:notes xmlns:a="http://schemas.openxmlformats.org/drawingml/2006/main" xmlns:r="http://schemas.openxmlformats.org/officeDocument/2006/relationships" xmlns:p="http://schemas.openxmlformats.org/presentationml/2006/main">
+  <p:cSld>
+    <p:spTree>
+      <p:nvGrpSpPr>
+        <p:cNvPr id="1" name=""/>
+        <p:cNvGrpSpPr/>
+        <p:nvPr/>
+      </p:nvGrpSpPr>
+      <p:grpSpPr>
+        <a:xfrm>
+          <a:off x="0" y="0"/>
+          <a:ext cx="0" cy="0"/>
+          <a:chOff x="0" y="0"/>
+          <a:chExt cx="0" cy="0"/>
+        </a:xfrm>
+      </p:grpSpPr>
+      <p:sp>
+        <p:nvSpPr>
+          <p:cNvPr id="2" name="Slide Image Placeholder 1"/>
+          <p:cNvSpPr>
+            <a:spLocks noGrp="1" noRot="1" noChangeAspect="1"/>
+          </p:cNvSpPr>
+          <p:nvPr>
+            <p:ph type="sldImg"/>
+          </p:nvPr>
+        </p:nvSpPr>
+        <p:spPr/>
+      </p:sp>
+      <p:sp>
+        <p:nvSpPr>
+          <p:cNvPr id="3" name="Notes Placeholder 2"/>
+          <p:cNvSpPr>
+            <a:spLocks noGrp="1"/>
+          </p:cNvSpPr>
+          <p:nvPr>
+            <p:ph type="body" idx="1"/>
+          </p:nvPr>
+        </p:nvSpPr>
+        <p:spPr/>
+        <p:txBody>
+          <a:bodyPr/>
+          <a:lstStyle/>
+          <a:p>
+            <a:pPr lvl="0" indent="0" marL="0">
+              <a:buNone/>
+            </a:pPr>
+            <a:r>
+              <a:rPr/>
+              <a:t>Model sentence case and show why an article number belongs in the Pages field as </a:t>
+            </a:r>
+            <a:r>
+              <a:rPr>
+                <a:latin typeface="Courier"/>
+              </a:rPr>
+              <a:t>Article 38</a:t>
+            </a:r>
+            <a:r>
+              <a:rPr/>
+              <a:t>. These two details commonly survive unnoticed into an otherwise correct reference.</a:t>
+            </a:r>
+          </a:p>
+        </p:txBody>
+      </p:sp>
+      <p:sp>
+        <p:nvSpPr>
+          <p:cNvPr id="4" name="Slide Number Placeholder 3"/>
+          <p:cNvSpPr>
+            <a:spLocks noGrp="1"/>
+          </p:cNvSpPr>
+          <p:nvPr>
+            <p:ph type="sldNum" sz="quarter" idx="10"/>
+          </p:nvPr>
+        </p:nvSpPr>
+        <p:spPr/>
+        <p:txBody>
+          <a:bodyPr/>
+          <a:lstStyle/>
+          <a:p>
+            <a:fld id="{18BDFEC3-8487-43E8-A154-7C12CBC1FFF2}" type="slidenum">
+              <a:rPr lang="en-US"/>
+              <a:t>9</a:t>
+            </a:fld>
+            <a:endParaRPr lang="en-US"/>
+          </a:p>
+        </p:txBody>
+      </p:sp>
+    </p:spTree>
+  </p:cSld>
+</p:notes>
+</file>
+
+<file path=ppt/notesSlides/notesSlide9.xml><?xml version="1.0" encoding="utf-8"?>
+<p:notes xmlns:a="http://schemas.openxmlformats.org/drawingml/2006/main" xmlns:r="http://schemas.openxmlformats.org/officeDocument/2006/relationships" xmlns:p="http://schemas.openxmlformats.org/presentationml/2006/main">
+  <p:cSld>
+    <p:spTree>
+      <p:nvGrpSpPr>
+        <p:cNvPr id="1" name=""/>
+        <p:cNvGrpSpPr/>
+        <p:nvPr/>
+      </p:nvGrpSpPr>
+      <p:grpSpPr>
+        <a:xfrm>
+          <a:off x="0" y="0"/>
+          <a:ext cx="0" cy="0"/>
+          <a:chOff x="0" y="0"/>
+          <a:chExt cx="0" cy="0"/>
+        </a:xfrm>
+      </p:grpSpPr>
+      <p:sp>
+        <p:nvSpPr>
+          <p:cNvPr id="2" name="Slide Image Placeholder 1"/>
+          <p:cNvSpPr>
+            <a:spLocks noGrp="1" noRot="1" noChangeAspect="1"/>
+          </p:cNvSpPr>
+          <p:nvPr>
+            <p:ph type="sldImg"/>
+          </p:nvPr>
+        </p:nvSpPr>
+        <p:spPr/>
+      </p:sp>
+      <p:sp>
+        <p:nvSpPr>
+          <p:cNvPr id="3" name="Notes Placeholder 2"/>
+          <p:cNvSpPr>
+            <a:spLocks noGrp="1"/>
+          </p:cNvSpPr>
+          <p:nvPr>
+            <p:ph type="body" idx="1"/>
+          </p:nvPr>
+        </p:nvSpPr>
+        <p:spPr/>
+        <p:txBody>
+          <a:bodyPr/>
+          <a:lstStyle/>
+          <a:p>
+            <a:pPr lvl="0" indent="0" marL="0">
+              <a:buNone/>
+            </a:pPr>
+            <a:r>
+              <a:rPr/>
+              <a:t>Generate the reference only after the parent record has been checked. Paste the APA 7 output into the workbook and compare it with the source article rather than trusting it automatically.</a:t>
+            </a:r>
+          </a:p>
+        </p:txBody>
+      </p:sp>
+      <p:sp>
+        <p:nvSpPr>
+          <p:cNvPr id="4" name="Slide Number Placeholder 3"/>
+          <p:cNvSpPr>
+            <a:spLocks noGrp="1"/>
+          </p:cNvSpPr>
+          <p:nvPr>
+            <p:ph type="sldNum" sz="quarter" idx="10"/>
+          </p:nvPr>
+        </p:nvSpPr>
+        <p:spPr/>
+        <p:txBody>
+          <a:bodyPr/>
+          <a:lstStyle/>
+          <a:p>
+            <a:fld id="{18BDFEC3-8487-43E8-A154-7C12CBC1FFF2}" type="slidenum">
+              <a:rPr lang="en-US"/>
+              <a:t>10</a:t>
+            </a:fld>
+            <a:endParaRPr lang="en-US"/>
+          </a:p>
+        </p:txBody>
+      </p:sp>
+    </p:spTree>
+  </p:cSld>
+</p:notes>
+</file>
+
 <file path=ppt/slideLayouts/slideLayout1.xml><?xml version="1.0" encoding="utf-8"?>
 <p:sldLayout xmlns:a="http://schemas.openxmlformats.org/drawingml/2006/main" xmlns:r="http://schemas.openxmlformats.org/officeDocument/2006/relationships" xmlns:p="http://schemas.openxmlformats.org/presentationml/2006/main" type="title" preserve="1">
   <p:cSld name="Title Slide">
@@ -233,10 +1733,7 @@
               <a:buNone/>
               <a:defRPr sz="2000">
                 <a:solidFill>
-                  <a:schemeClr val="tx1">
-                    <a:lumMod val="75000"/>
-                    <a:lumOff val="25000"/>
-                  </a:schemeClr>
+                  <a:srgbClr val="FFFFFF"/>
                 </a:solidFill>
               </a:defRPr>
             </a:lvl1pPr>
@@ -2978,7 +4475,7 @@
         </a:buClr>
         <a:buFont charset="0" panose="020B0604020202020204" pitchFamily="34" typeface="Arial"/>
         <a:buChar char="•"/>
-        <a:defRPr kern="1200" sz="1800">
+        <a:defRPr kern="1200" sz="2000">
           <a:solidFill>
             <a:schemeClr val="tx1">
               <a:lumMod val="85000"/>
@@ -3002,7 +4499,7 @@
         </a:buClr>
         <a:buFont charset="0" panose="020B0604020202020204" pitchFamily="34" typeface="Arial"/>
         <a:buChar char="•"/>
-        <a:defRPr kern="1200" sz="1600">
+        <a:defRPr kern="1200" sz="2000">
           <a:solidFill>
             <a:schemeClr val="tx1">
               <a:lumMod val="85000"/>
@@ -3026,7 +4523,7 @@
         </a:buClr>
         <a:buFont charset="0" panose="020B0604020202020204" pitchFamily="34" typeface="Arial"/>
         <a:buChar char="•"/>
-        <a:defRPr kern="1200" sz="1600">
+        <a:defRPr kern="1200" sz="2000">
           <a:solidFill>
             <a:schemeClr val="tx1">
               <a:lumMod val="85000"/>
@@ -3050,7 +4547,7 @@
         </a:buClr>
         <a:buFont charset="0" panose="020B0604020202020204" pitchFamily="34" typeface="Arial"/>
         <a:buChar char="•"/>
-        <a:defRPr kern="1200" sz="1600">
+        <a:defRPr kern="1200" sz="2000">
           <a:solidFill>
             <a:schemeClr val="tx1">
               <a:lumMod val="85000"/>
@@ -3074,7 +4571,7 @@
         </a:buClr>
         <a:buFont charset="0" panose="020B0604020202020204" pitchFamily="34" typeface="Arial"/>
         <a:buChar char="•"/>
-        <a:defRPr kern="1200" sz="1600">
+        <a:defRPr kern="1200" sz="2000">
           <a:solidFill>
             <a:schemeClr val="tx1">
               <a:lumMod val="85000"/>
@@ -3098,7 +4595,7 @@
         </a:buClr>
         <a:buFont charset="0" panose="020B0604020202020204" pitchFamily="34" typeface="Arial"/>
         <a:buChar char="•"/>
-        <a:defRPr kern="1200" sz="1600">
+        <a:defRPr kern="1200" sz="2000">
           <a:solidFill>
             <a:schemeClr val="tx1"/>
           </a:solidFill>
@@ -3119,7 +4616,7 @@
         </a:buClr>
         <a:buFont charset="0" panose="020B0604020202020204" pitchFamily="34" typeface="Arial"/>
         <a:buChar char="•"/>
-        <a:defRPr kern="1200" sz="1600">
+        <a:defRPr kern="1200" sz="2000">
           <a:solidFill>
             <a:schemeClr val="tx1"/>
           </a:solidFill>
@@ -3140,7 +4637,7 @@
         </a:buClr>
         <a:buFont charset="0" panose="020B0604020202020204" pitchFamily="34" typeface="Arial"/>
         <a:buChar char="•"/>
-        <a:defRPr baseline="0" kern="1200" sz="1600">
+        <a:defRPr baseline="0" kern="1200" sz="2000">
           <a:solidFill>
             <a:schemeClr val="tx1"/>
           </a:solidFill>
@@ -3161,7 +4658,7 @@
         </a:buClr>
         <a:buFont charset="0" panose="020B0604020202020204" pitchFamily="34" typeface="Arial"/>
         <a:buChar char="•"/>
-        <a:defRPr baseline="0" kern="1200" sz="1600">
+        <a:defRPr baseline="0" kern="1200" sz="2000">
           <a:solidFill>
             <a:schemeClr val="tx1"/>
           </a:solidFill>
@@ -3176,7 +4673,7 @@
         <a:defRPr lang="en-US"/>
       </a:defPPr>
       <a:lvl1pPr algn="l" defTabSz="914400" eaLnBrk="1" hangingPunct="1" latinLnBrk="0" marL="0" rtl="0">
-        <a:defRPr kern="1200" sz="1800">
+        <a:defRPr kern="1200" sz="2000">
           <a:solidFill>
             <a:schemeClr val="tx1"/>
           </a:solidFill>
@@ -3186,7 +4683,7 @@
         </a:defRPr>
       </a:lvl1pPr>
       <a:lvl2pPr algn="l" defTabSz="914400" eaLnBrk="1" hangingPunct="1" latinLnBrk="0" marL="457200" rtl="0">
-        <a:defRPr kern="1200" sz="1800">
+        <a:defRPr kern="1200" sz="2000">
           <a:solidFill>
             <a:schemeClr val="tx1"/>
           </a:solidFill>
@@ -3196,7 +4693,7 @@
         </a:defRPr>
       </a:lvl2pPr>
       <a:lvl3pPr algn="l" defTabSz="914400" eaLnBrk="1" hangingPunct="1" latinLnBrk="0" marL="914400" rtl="0">
-        <a:defRPr kern="1200" sz="1800">
+        <a:defRPr kern="1200" sz="2000">
           <a:solidFill>
             <a:schemeClr val="tx1"/>
           </a:solidFill>
@@ -3206,7 +4703,7 @@
         </a:defRPr>
       </a:lvl3pPr>
       <a:lvl4pPr algn="l" defTabSz="914400" eaLnBrk="1" hangingPunct="1" latinLnBrk="0" marL="1371600" rtl="0">
-        <a:defRPr kern="1200" sz="1800">
+        <a:defRPr kern="1200" sz="2000">
           <a:solidFill>
             <a:schemeClr val="tx1"/>
           </a:solidFill>
@@ -3216,7 +4713,7 @@
         </a:defRPr>
       </a:lvl4pPr>
       <a:lvl5pPr algn="l" defTabSz="914400" eaLnBrk="1" hangingPunct="1" latinLnBrk="0" marL="1828800" rtl="0">
-        <a:defRPr kern="1200" sz="1800">
+        <a:defRPr kern="1200" sz="2000">
           <a:solidFill>
             <a:schemeClr val="tx1"/>
           </a:solidFill>
@@ -3226,7 +4723,7 @@
         </a:defRPr>
       </a:lvl5pPr>
       <a:lvl6pPr algn="l" defTabSz="914400" eaLnBrk="1" hangingPunct="1" latinLnBrk="0" marL="2286000" rtl="0">
-        <a:defRPr kern="1200" sz="1800">
+        <a:defRPr kern="1200" sz="2000">
           <a:solidFill>
             <a:schemeClr val="tx1"/>
           </a:solidFill>
@@ -3236,7 +4733,7 @@
         </a:defRPr>
       </a:lvl6pPr>
       <a:lvl7pPr algn="l" defTabSz="914400" eaLnBrk="1" hangingPunct="1" latinLnBrk="0" marL="2743200" rtl="0">
-        <a:defRPr kern="1200" sz="1800">
+        <a:defRPr kern="1200" sz="2000">
           <a:solidFill>
             <a:schemeClr val="tx1"/>
           </a:solidFill>
@@ -3246,7 +4743,7 @@
         </a:defRPr>
       </a:lvl7pPr>
       <a:lvl8pPr algn="l" defTabSz="914400" eaLnBrk="1" hangingPunct="1" latinLnBrk="0" marL="3200400" rtl="0">
-        <a:defRPr kern="1200" sz="1800">
+        <a:defRPr kern="1200" sz="2000">
           <a:solidFill>
             <a:schemeClr val="tx1"/>
           </a:solidFill>
@@ -3256,7 +4753,7 @@
         </a:defRPr>
       </a:lvl8pPr>
       <a:lvl9pPr algn="l" defTabSz="914400" eaLnBrk="1" hangingPunct="1" latinLnBrk="0" marL="3657600" rtl="0">
-        <a:defRPr kern="1200" sz="1800">
+        <a:defRPr kern="1200" sz="2000">
           <a:solidFill>
             <a:schemeClr val="tx1"/>
           </a:solidFill>
@@ -3320,7 +4817,7 @@
             </a:pPr>
             <a:r>
               <a:rPr/>
-              <a:t>References &amp; APA style</a:t>
+              <a:t>Accurate metadata produces accurate APA 7 references</a:t>
             </a:r>
           </a:p>
         </p:txBody>
@@ -3351,7 +4848,13 @@
             </a:pPr>
             <a:r>
               <a:rPr/>
-              <a:t>Lab 1</a:t>
+              <a:t>Lab 01 · Zotero workflow</a:t>
+            </a:r>
+            <a:br/>
+            <a:br/>
+            <a:r>
+              <a:rPr/>
+              <a:t>PSYC 350 Laboratory</a:t>
             </a:r>
           </a:p>
         </p:txBody>
@@ -3403,29 +4906,29 @@
             </a:pPr>
             <a:r>
               <a:rPr/>
-              <a:t>APA Style &amp; References (continued)</a:t>
+              <a:t>9 Generate the APA reference after verification</a:t>
             </a:r>
           </a:p>
         </p:txBody>
       </p:sp>
       <p:pic>
         <p:nvPicPr>
-          <p:cNvPr descr="Comic grid titled Types of Psych Paper showing twelve parody psychology paper layouts with titles like Children Are So Weird and Freud Was Very Wrong" id="0" name="Picture 1"/>
+          <p:cNvPr descr="Zotero item context menu with Create Bibliography from Item highlighted" id="0" name="Picture 1"/>
           <p:cNvPicPr>
             <a:picLocks noGrp="1" noChangeAspect="1"/>
           </p:cNvPicPr>
           <p:nvPr/>
         </p:nvPicPr>
         <p:blipFill>
-          <a:blip r:embed="rId2"/>
+          <a:blip r:embed="rId3"/>
           <a:stretch>
             <a:fillRect/>
           </a:stretch>
         </p:blipFill>
         <p:spPr bwMode="auto">
           <a:xfrm>
-            <a:off x="2641600" y="2628900"/>
-            <a:ext cx="1816100" cy="3098800"/>
+            <a:off x="2336800" y="2628900"/>
+            <a:ext cx="2413000" cy="3098800"/>
           </a:xfrm>
           <a:prstGeom prst="rect">
             <a:avLst/>
@@ -3453,78 +4956,72 @@
           <a:bodyPr/>
           <a:lstStyle/>
           <a:p>
-            <a:pPr lvl="0"/>
+            <a:pPr lvl="0" indent="0" marL="0">
+              <a:buNone/>
+            </a:pPr>
             <a:r>
               <a:rPr/>
-              <a:t>Function of </a:t>
+              <a:t>[Workbook step 5]</a:t>
+            </a:r>
+          </a:p>
+          <a:p>
+            <a:pPr lvl="0" indent="-457200" marL="457200">
+              <a:buAutoNum type="arabicPeriod"/>
+            </a:pPr>
+            <a:r>
+              <a:rPr/>
+              <a:t>Select the parent item.</a:t>
+            </a:r>
+          </a:p>
+          <a:p>
+            <a:pPr lvl="0" indent="-457200" marL="457200">
+              <a:buAutoNum type="arabicPeriod"/>
+            </a:pPr>
+            <a:r>
+              <a:rPr/>
+              <a:t>Choose </a:t>
             </a:r>
             <a:r>
               <a:rPr b="1"/>
-              <a:t>References</a:t>
+              <a:t>Create Bibliography from Item</a:t>
             </a:r>
             <a:r>
               <a:rPr/>
-              <a:t> is to:</a:t>
-            </a:r>
-          </a:p>
-          <a:p>
-            <a:pPr lvl="1"/>
+              <a:t>.</a:t>
+            </a:r>
+          </a:p>
+          <a:p>
+            <a:pPr lvl="0" indent="-457200" marL="457200">
+              <a:buAutoNum type="arabicPeriod"/>
+            </a:pPr>
             <a:r>
               <a:rPr/>
-              <a:t>🎉 </a:t>
+              <a:t>Select </a:t>
             </a:r>
             <a:r>
               <a:rPr b="1"/>
-              <a:t>give</a:t>
+              <a:t>APA 7</a:t>
             </a:r>
             <a:r>
               <a:rPr/>
-              <a:t> credit to others work</a:t>
-            </a:r>
-          </a:p>
-          <a:p>
-            <a:pPr lvl="1"/>
+              <a:t> and </a:t>
+            </a:r>
+            <a:r>
+              <a:rPr b="1"/>
+              <a:t>Copy to Clipboard</a:t>
+            </a:r>
             <a:r>
               <a:rPr/>
-              <a:t>💡 </a:t>
-            </a:r>
-            <a:r>
-              <a:rPr b="1"/>
-              <a:t>add credibility</a:t>
-            </a:r>
+              <a:t>.</a:t>
+            </a:r>
+          </a:p>
+          <a:p>
+            <a:pPr lvl="0" indent="-457200" marL="457200">
+              <a:buAutoNum type="arabicPeriod"/>
+            </a:pPr>
             <a:r>
               <a:rPr/>
-              <a:t> to your work</a:t>
-            </a:r>
-          </a:p>
-          <a:p>
-            <a:pPr lvl="1"/>
-            <a:r>
-              <a:rPr/>
-              <a:t>🚧 </a:t>
-            </a:r>
-            <a:r>
-              <a:rPr b="1"/>
-              <a:t>provide</a:t>
-            </a:r>
-            <a:r>
-              <a:rPr/>
-              <a:t> context for your work</a:t>
-            </a:r>
-          </a:p>
-          <a:p>
-            <a:pPr lvl="1"/>
-            <a:r>
-              <a:rPr/>
-              <a:t>🎤 </a:t>
-            </a:r>
-            <a:r>
-              <a:rPr b="1"/>
-              <a:t>direct</a:t>
-            </a:r>
-            <a:r>
-              <a:rPr/>
-              <a:t> audience to other work</a:t>
+              <a:t>Paste it into the workbook.</a:t>
             </a:r>
           </a:p>
         </p:txBody>
@@ -3576,69 +5073,303 @@
             </a:pPr>
             <a:r>
               <a:rPr/>
-              <a:t>Why use Zotero?</a:t>
-            </a:r>
-          </a:p>
-        </p:txBody>
-      </p:sp>
-      <p:pic>
-        <p:nvPicPr>
-          <p:cNvPr descr="Zotero logo" id="0" name="Picture 1"/>
-          <p:cNvPicPr>
-            <a:picLocks noGrp="1" noChangeAspect="1"/>
-          </p:cNvPicPr>
+              <a:t>10 Repair the partially indexed article</a:t>
+            </a:r>
+          </a:p>
+        </p:txBody>
+      </p:sp>
+      <p:sp>
+        <p:nvSpPr>
+          <p:cNvPr id="1023" name="card-steel" descr="card: Enter exactly. Hindsight ≠ foresight The symbol may not copy correctly from the older PDF."/>
+          <p:cNvSpPr/>
           <p:nvPr/>
-        </p:nvPicPr>
-        <p:blipFill>
-          <a:blip r:embed="rId2"/>
-          <a:stretch>
-            <a:fillRect/>
-          </a:stretch>
-        </p:blipFill>
-        <p:spPr bwMode="auto">
-          <a:xfrm>
-            <a:off x="4800600" y="2628900"/>
-            <a:ext cx="2590800" cy="2590800"/>
-          </a:xfrm>
-          <a:prstGeom prst="rect">
-            <a:avLst/>
+        </p:nvSpPr>
+        <p:spPr>
+          <a:xfrm>
+            <a:off x="1097280" y="2633472"/>
+            <a:ext cx="4924044" cy="1615440"/>
+          </a:xfrm>
+          <a:prstGeom prst="roundRect">
+            <a:avLst>
+              <a:gd name="adj" fmla="val 6000"/>
+            </a:avLst>
           </a:prstGeom>
-          <a:noFill/>
-          <a:ln w="9525">
+          <a:solidFill>
+            <a:srgbClr val="FEFDFA"/>
+          </a:solidFill>
+          <a:ln w="19050">
+            <a:solidFill>
+              <a:srgbClr val="CCCCCC"/>
+            </a:solidFill>
+          </a:ln>
+        </p:spPr>
+        <p:txBody>
+          <a:bodyPr lIns="182880" tIns="182880" rIns="182880" bIns="182880" anchor="t" wrap="square">
+            <a:normAutofit/>
+          </a:bodyPr>
+          <a:lstStyle/>
+          <a:p>
+            <a:pPr algn="l"/>
+            <a:r>
+              <a:rPr lang="en-US" sz="2200" b="1" dirty="0">
+                <a:solidFill>
+                  <a:srgbClr val="010B13"/>
+                </a:solidFill>
+              </a:rPr>
+              <a:t>Enter exactly</a:t>
+            </a:r>
+          </a:p>
+          <a:p>
+            <a:pPr algn="l"/>
+            <a:r>
+              <a:rPr lang="en-US" sz="2000" b="0" dirty="0">
+                <a:solidFill>
+                  <a:srgbClr val="010B13"/>
+                </a:solidFill>
+              </a:rPr>
+              <a:t>Hindsight ≠ foresight</a:t>
+            </a:r>
+          </a:p>
+          <a:p>
+            <a:pPr algn="l"/>
+            <a:r>
+              <a:rPr lang="en-US" sz="2000" b="0" dirty="0">
+                <a:solidFill>
+                  <a:srgbClr val="010B13"/>
+                </a:solidFill>
+              </a:rPr>
+              <a:t>The symbol may not copy correctly from the older PDF.</a:t>
+            </a:r>
+          </a:p>
+        </p:txBody>
+      </p:sp>
+      <p:sp>
+        <p:nvSpPr>
+          <p:cNvPr id="1024" name="card-rail" descr=""/>
+          <p:cNvSpPr/>
+          <p:nvPr/>
+        </p:nvSpPr>
+        <p:spPr>
+          <a:xfrm>
+            <a:off x="1097280" y="2633472"/>
+            <a:ext cx="54864" cy="1615440"/>
+          </a:xfrm>
+          <a:prstGeom prst="roundRect">
+            <a:avLst>
+              <a:gd name="adj" fmla="val 20000"/>
+            </a:avLst>
+          </a:prstGeom>
+          <a:solidFill>
+            <a:srgbClr val="010B13"/>
+          </a:solidFill>
+          <a:ln>
             <a:noFill/>
-            <a:headEnd/>
-            <a:tailEnd/>
           </a:ln>
         </p:spPr>
-      </p:pic>
-      <p:sp>
-        <p:nvSpPr>
-          <p:cNvPr id="1" name="TextBox 3"/>
-          <p:cNvSpPr txBox="1"/>
-          <p:nvPr>
-            <p:ph idx="1"/>
-          </p:nvPr>
+        <p:txBody>
+          <a:bodyPr lIns="182880" tIns="182880" rIns="182880" bIns="182880" anchor="t" wrap="square">
+            <a:normAutofit/>
+          </a:bodyPr>
+          <a:lstStyle/>
+          <a:p/>
+        </p:txBody>
+      </p:sp>
+      <p:sp>
+        <p:nvSpPr>
+          <p:cNvPr id="1025" name="card-red" descr="card: Add these fields. Authors · year · journal · volume · issue · pages · DOI"/>
+          <p:cNvSpPr/>
+          <p:nvPr/>
         </p:nvSpPr>
         <p:spPr>
           <a:xfrm>
-            <a:off x="1092200" y="5219700"/>
-            <a:ext cx="9994900" cy="508000"/>
-          </a:xfrm>
-          <a:prstGeom prst="rect">
-            <a:avLst/>
+            <a:off x="6167628" y="2633472"/>
+            <a:ext cx="4924044" cy="1310640"/>
+          </a:xfrm>
+          <a:prstGeom prst="roundRect">
+            <a:avLst>
+              <a:gd name="adj" fmla="val 6000"/>
+            </a:avLst>
           </a:prstGeom>
-          <a:noFill/>
-        </p:spPr>
-        <p:txBody>
-          <a:bodyPr/>
-          <a:lstStyle/>
-          <a:p>
-            <a:pPr lvl="0" indent="0" marL="0" algn="ctr">
-              <a:buNone/>
-            </a:pPr>
-            <a:r>
-              <a:rPr/>
-              <a:t>Zotero logo</a:t>
+          <a:solidFill>
+            <a:srgbClr val="FEFDFA"/>
+          </a:solidFill>
+          <a:ln w="19050">
+            <a:solidFill>
+              <a:srgbClr val="CCCCCC"/>
+            </a:solidFill>
+          </a:ln>
+        </p:spPr>
+        <p:txBody>
+          <a:bodyPr lIns="182880" tIns="182880" rIns="182880" bIns="182880" anchor="t" wrap="square">
+            <a:normAutofit/>
+          </a:bodyPr>
+          <a:lstStyle/>
+          <a:p>
+            <a:pPr algn="l"/>
+            <a:r>
+              <a:rPr lang="en-US" sz="2200" b="1" dirty="0">
+                <a:solidFill>
+                  <a:srgbClr val="D00000"/>
+                </a:solidFill>
+              </a:rPr>
+              <a:t>Add these fields</a:t>
+            </a:r>
+          </a:p>
+          <a:p>
+            <a:pPr algn="l"/>
+            <a:r>
+              <a:rPr lang="en-US" sz="2000" b="0" dirty="0">
+                <a:solidFill>
+                  <a:srgbClr val="010B13"/>
+                </a:solidFill>
+              </a:rPr>
+              <a:t>Authors · year · journal · volume · issue · pages · DOI</a:t>
+            </a:r>
+          </a:p>
+        </p:txBody>
+      </p:sp>
+      <p:sp>
+        <p:nvSpPr>
+          <p:cNvPr id="1026" name="card-rail" descr=""/>
+          <p:cNvSpPr/>
+          <p:nvPr/>
+        </p:nvSpPr>
+        <p:spPr>
+          <a:xfrm>
+            <a:off x="6167628" y="2633472"/>
+            <a:ext cx="54864" cy="1310640"/>
+          </a:xfrm>
+          <a:prstGeom prst="roundRect">
+            <a:avLst>
+              <a:gd name="adj" fmla="val 20000"/>
+            </a:avLst>
+          </a:prstGeom>
+          <a:solidFill>
+            <a:srgbClr val="D00000"/>
+          </a:solidFill>
+          <a:ln>
+            <a:noFill/>
+          </a:ln>
+        </p:spPr>
+        <p:txBody>
+          <a:bodyPr lIns="182880" tIns="182880" rIns="182880" bIns="182880" anchor="t" wrap="square">
+            <a:normAutofit/>
+          </a:bodyPr>
+          <a:lstStyle/>
+          <a:p/>
+        </p:txBody>
+      </p:sp>
+      <p:sp>
+        <p:nvSpPr>
+          <p:cNvPr id="1027" name="callout-warning" descr="warning callout: Warning. Add the missing fields before generating the reference."/>
+          <p:cNvSpPr/>
+          <p:nvPr/>
+        </p:nvSpPr>
+        <p:spPr>
+          <a:xfrm>
+            <a:off x="1097280" y="4395216"/>
+            <a:ext cx="9994392" cy="1432560"/>
+          </a:xfrm>
+          <a:prstGeom prst="roundRect">
+            <a:avLst>
+              <a:gd name="adj" fmla="val 6000"/>
+            </a:avLst>
+          </a:prstGeom>
+          <a:solidFill>
+            <a:srgbClr val="FEFDFA"/>
+          </a:solidFill>
+          <a:ln w="19050">
+            <a:solidFill>
+              <a:srgbClr val="B65B00"/>
+            </a:solidFill>
+          </a:ln>
+        </p:spPr>
+        <p:txBody>
+          <a:bodyPr lIns="182880" tIns="182880" rIns="182880" bIns="182880" anchor="t" wrap="square">
+            <a:normAutofit/>
+          </a:bodyPr>
+          <a:lstStyle/>
+          <a:p/>
+        </p:txBody>
+      </p:sp>
+      <p:sp>
+        <p:nvSpPr>
+          <p:cNvPr id="1028" name="callout-title" descr=""/>
+          <p:cNvSpPr/>
+          <p:nvPr/>
+        </p:nvSpPr>
+        <p:spPr>
+          <a:xfrm>
+            <a:off x="1097280" y="4395216"/>
+            <a:ext cx="9994392" cy="426720"/>
+          </a:xfrm>
+          <a:prstGeom prst="roundRect">
+            <a:avLst>
+              <a:gd name="adj" fmla="val 6000"/>
+            </a:avLst>
+          </a:prstGeom>
+          <a:solidFill>
+            <a:srgbClr val="B65B00"/>
+          </a:solidFill>
+          <a:ln>
+            <a:noFill/>
+          </a:ln>
+        </p:spPr>
+        <p:txBody>
+          <a:bodyPr lIns="182880" tIns="0" rIns="182880" bIns="0" anchor="ctr" wrap="square">
+            <a:normAutofit/>
+          </a:bodyPr>
+          <a:lstStyle/>
+          <a:p>
+            <a:pPr algn="l"/>
+            <a:r>
+              <a:rPr lang="en-US" sz="2200" b="1" dirty="0">
+                <a:solidFill>
+                  <a:srgbClr val="FEFDFA"/>
+                </a:solidFill>
+              </a:rPr>
+              <a:t>Warning</a:t>
+            </a:r>
+          </a:p>
+        </p:txBody>
+      </p:sp>
+      <p:sp>
+        <p:nvSpPr>
+          <p:cNvPr id="1029" name="callout-body" descr=""/>
+          <p:cNvSpPr/>
+          <p:nvPr/>
+        </p:nvSpPr>
+        <p:spPr>
+          <a:xfrm>
+            <a:off x="1097280" y="4821936"/>
+            <a:ext cx="9994392" cy="1005840"/>
+          </a:xfrm>
+          <a:prstGeom prst="roundRect">
+            <a:avLst>
+              <a:gd name="adj" fmla="val 6000"/>
+            </a:avLst>
+          </a:prstGeom>
+          <a:solidFill>
+            <a:srgbClr val="FEFDFA"/>
+          </a:solidFill>
+          <a:ln>
+            <a:noFill/>
+          </a:ln>
+        </p:spPr>
+        <p:txBody>
+          <a:bodyPr lIns="182880" tIns="182880" rIns="182880" bIns="182880" anchor="t" wrap="square">
+            <a:normAutofit/>
+          </a:bodyPr>
+          <a:lstStyle/>
+          <a:p>
+            <a:pPr algn="l"/>
+            <a:r>
+              <a:rPr lang="en-US" sz="2000" b="0" dirty="0">
+                <a:solidFill>
+                  <a:srgbClr val="010B13"/>
+                </a:solidFill>
+              </a:rPr>
+              <a:t>Add the missing fields before generating the reference.</a:t>
             </a:r>
           </a:p>
         </p:txBody>
@@ -3690,44 +5421,14 @@
             </a:pPr>
             <a:r>
               <a:rPr/>
-              <a:t>Why use Zotero? (continued)</a:t>
+              <a:t>11 Create a parent item for a standalone PDF</a:t>
             </a:r>
           </a:p>
         </p:txBody>
       </p:sp>
       <p:pic>
         <p:nvPicPr>
-          <p:cNvPr descr="Meme of an elderly woman with a walker saying I used to do all my citations by hand, with a younger woman replying sure thing professor, let us get you that emeritus" id="0" name="Picture 1"/>
-          <p:cNvPicPr>
-            <a:picLocks noGrp="1" noChangeAspect="1"/>
-          </p:cNvPicPr>
-          <p:nvPr/>
-        </p:nvPicPr>
-        <p:blipFill>
-          <a:blip r:embed="rId2"/>
-          <a:stretch>
-            <a:fillRect/>
-          </a:stretch>
-        </p:blipFill>
-        <p:spPr bwMode="auto">
-          <a:xfrm>
-            <a:off x="1816100" y="2628900"/>
-            <a:ext cx="3454400" cy="3098800"/>
-          </a:xfrm>
-          <a:prstGeom prst="rect">
-            <a:avLst/>
-          </a:prstGeom>
-          <a:noFill/>
-          <a:ln w="9525">
-            <a:noFill/>
-            <a:headEnd/>
-            <a:tailEnd/>
-          </a:ln>
-        </p:spPr>
-      </p:pic>
-      <p:pic>
-        <p:nvPicPr>
-          <p:cNvPr descr="Example of an APA-style References page" id="0" name="Picture 1"/>
+          <p:cNvPr descr="Zotero PDF context menu showing the Create Parent Item command" id="0" name="Picture 1"/>
           <p:cNvPicPr>
             <a:picLocks noGrp="1" noChangeAspect="1"/>
           </p:cNvPicPr>
@@ -3741,8 +5442,8 @@
         </p:blipFill>
         <p:spPr bwMode="auto">
           <a:xfrm>
-            <a:off x="7442200" y="2628900"/>
-            <a:ext cx="2400300" cy="3098800"/>
+            <a:off x="1511300" y="2628900"/>
+            <a:ext cx="4076700" cy="3098800"/>
           </a:xfrm>
           <a:prstGeom prst="rect">
             <a:avLst/>
@@ -3755,6 +5456,74 @@
           </a:ln>
         </p:spPr>
       </p:pic>
+      <p:sp>
+        <p:nvSpPr>
+          <p:cNvPr id="4" name="Content Placeholder 3"/>
+          <p:cNvSpPr>
+            <a:spLocks noGrp="1"/>
+          </p:cNvSpPr>
+          <p:nvPr>
+            <p:ph idx="2" sz="half"/>
+          </p:nvPr>
+        </p:nvSpPr>
+        <p:spPr/>
+        <p:txBody>
+          <a:bodyPr/>
+          <a:lstStyle/>
+          <a:p>
+            <a:pPr lvl="0" indent="0" marL="0">
+              <a:buNone/>
+            </a:pPr>
+            <a:r>
+              <a:rPr/>
+              <a:t>[Workbook step 7]</a:t>
+            </a:r>
+          </a:p>
+          <a:p>
+            <a:pPr lvl="0" indent="-457200" marL="457200">
+              <a:buAutoNum type="arabicPeriod"/>
+            </a:pPr>
+            <a:r>
+              <a:rPr/>
+              <a:t>Right-click the standalone PDF.</a:t>
+            </a:r>
+          </a:p>
+          <a:p>
+            <a:pPr lvl="0" indent="-457200" marL="457200">
+              <a:buAutoNum type="arabicPeriod"/>
+            </a:pPr>
+            <a:r>
+              <a:rPr/>
+              <a:t>Choose </a:t>
+            </a:r>
+            <a:r>
+              <a:rPr b="1"/>
+              <a:t>Create Parent Item</a:t>
+            </a:r>
+            <a:r>
+              <a:rPr/>
+              <a:t>.</a:t>
+            </a:r>
+          </a:p>
+          <a:p>
+            <a:pPr lvl="0" indent="-457200" marL="457200">
+              <a:buAutoNum type="arabicPeriod"/>
+            </a:pPr>
+            <a:r>
+              <a:rPr/>
+              <a:t>Choose </a:t>
+            </a:r>
+            <a:r>
+              <a:rPr b="1"/>
+              <a:t>Manual Entry</a:t>
+            </a:r>
+            <a:r>
+              <a:rPr/>
+              <a:t>; complete the fields.</a:t>
+            </a:r>
+          </a:p>
+        </p:txBody>
+      </p:sp>
     </p:spTree>
   </p:cSld>
 </p:sld>
@@ -3802,20 +5571,14 @@
             </a:pPr>
             <a:r>
               <a:rPr/>
-              <a:t>Downloading </a:t>
-            </a:r>
-            <a:r>
-              <a:rPr>
-                <a:hlinkClick r:id="rId2"/>
-              </a:rPr>
-              <a:t>Zotero</a:t>
+              <a:t>12 The DOI tool creates an item record but may not attach the PDF</a:t>
             </a:r>
           </a:p>
         </p:txBody>
       </p:sp>
       <p:pic>
         <p:nvPicPr>
-          <p:cNvPr descr="Zotero logo" id="0" name="Picture 1"/>
+          <p:cNvPr descr="Annotated Zotero identifier entry box showing that a DOI begins with the number 10" id="0" name="Picture 1"/>
           <p:cNvPicPr>
             <a:picLocks noGrp="1" noChangeAspect="1"/>
           </p:cNvPicPr>
@@ -3829,8 +5592,8 @@
         </p:blipFill>
         <p:spPr bwMode="auto">
           <a:xfrm>
-            <a:off x="4800600" y="2628900"/>
-            <a:ext cx="2590800" cy="2590800"/>
+            <a:off x="1092200" y="3327400"/>
+            <a:ext cx="4902200" cy="1701800"/>
           </a:xfrm>
           <a:prstGeom prst="rect">
             <a:avLst/>
@@ -3845,32 +5608,66 @@
       </p:pic>
       <p:sp>
         <p:nvSpPr>
-          <p:cNvPr id="1" name="TextBox 3"/>
-          <p:cNvSpPr txBox="1"/>
-          <p:nvPr>
-            <p:ph idx="1"/>
-          </p:nvPr>
-        </p:nvSpPr>
-        <p:spPr>
-          <a:xfrm>
-            <a:off x="1092200" y="5219700"/>
-            <a:ext cx="9994900" cy="508000"/>
-          </a:xfrm>
-          <a:prstGeom prst="rect">
-            <a:avLst/>
-          </a:prstGeom>
-          <a:noFill/>
-        </p:spPr>
-        <p:txBody>
-          <a:bodyPr/>
-          <a:lstStyle/>
-          <a:p>
-            <a:pPr lvl="0" indent="0" marL="0" algn="ctr">
+          <p:cNvPr id="4" name="Content Placeholder 3"/>
+          <p:cNvSpPr>
+            <a:spLocks noGrp="1"/>
+          </p:cNvSpPr>
+          <p:nvPr>
+            <p:ph idx="2" sz="half"/>
+          </p:nvPr>
+        </p:nvSpPr>
+        <p:spPr/>
+        <p:txBody>
+          <a:bodyPr/>
+          <a:lstStyle/>
+          <a:p>
+            <a:pPr lvl="0" indent="0" marL="0">
               <a:buNone/>
             </a:pPr>
             <a:r>
               <a:rPr/>
-              <a:t>Zotero logo</a:t>
+              <a:t>[Workbook step 8]</a:t>
+            </a:r>
+          </a:p>
+          <a:p>
+            <a:pPr lvl="0" indent="-457200" marL="457200">
+              <a:buAutoNum type="arabicPeriod"/>
+            </a:pPr>
+            <a:r>
+              <a:rPr/>
+              <a:t>Choose </a:t>
+            </a:r>
+            <a:r>
+              <a:rPr b="1"/>
+              <a:t>Add Item by Identifier</a:t>
+            </a:r>
+            <a:r>
+              <a:rPr/>
+              <a:t>.</a:t>
+            </a:r>
+          </a:p>
+          <a:p>
+            <a:pPr lvl="0" indent="-457200" marL="457200">
+              <a:buAutoNum type="arabicPeriod"/>
+            </a:pPr>
+            <a:r>
+              <a:rPr/>
+              <a:t>Paste the DOI beginning with </a:t>
+            </a:r>
+            <a:r>
+              <a:rPr>
+                <a:latin typeface="Courier"/>
+              </a:rPr>
+              <a:t>10.</a:t>
+            </a:r>
+          </a:p>
+          <a:p>
+            <a:pPr lvl="0" indent="-457200" marL="457200">
+              <a:buAutoNum type="arabicPeriod"/>
+            </a:pPr>
+            <a:r>
+              <a:rPr/>
+              <a:t>Review the new item’s metadata.</a:t>
             </a:r>
           </a:p>
         </p:txBody>
@@ -3922,79 +5719,377 @@
             </a:pPr>
             <a:r>
               <a:rPr/>
-              <a:t>Downloading </a:t>
-            </a:r>
-            <a:r>
-              <a:rPr>
-                <a:hlinkClick r:id="rId2"/>
+              <a:t>13 Choose the item type before entering books, chapters, and news</a:t>
+            </a:r>
+          </a:p>
+        </p:txBody>
+      </p:sp>
+      <p:sp>
+        <p:nvSpPr>
+          <p:cNvPr id="1030" name="card-steel" descr="card: Book chapter. Choose Book Section and record authors, editors, pages, and publisher."/>
+          <p:cNvSpPr/>
+          <p:nvPr/>
+        </p:nvSpPr>
+        <p:spPr>
+          <a:xfrm>
+            <a:off x="1097280" y="2633472"/>
+            <a:ext cx="3233928" cy="1754887"/>
+          </a:xfrm>
+          <a:prstGeom prst="roundRect">
+            <a:avLst>
+              <a:gd name="adj" fmla="val 6000"/>
+            </a:avLst>
+          </a:prstGeom>
+          <a:solidFill>
+            <a:srgbClr val="FEFDFA"/>
+          </a:solidFill>
+          <a:ln w="19050">
+            <a:solidFill>
+              <a:srgbClr val="CCCCCC"/>
+            </a:solidFill>
+          </a:ln>
+        </p:spPr>
+        <p:txBody>
+          <a:bodyPr lIns="182880" tIns="182880" rIns="182880" bIns="182880" anchor="t" wrap="square">
+            <a:normAutofit/>
+          </a:bodyPr>
+          <a:lstStyle/>
+          <a:p>
+            <a:pPr algn="l"/>
+            <a:r>
+              <a:rPr lang="en-US" sz="1965" b="1" dirty="0">
+                <a:solidFill>
+                  <a:srgbClr val="010B13"/>
+                </a:solidFill>
               </a:rPr>
-              <a:t>Zotero</a:t>
-            </a:r>
-            <a:r>
-              <a:rPr/>
-              <a:t> (continued)</a:t>
-            </a:r>
-          </a:p>
-        </p:txBody>
-      </p:sp>
-      <p:pic>
-        <p:nvPicPr>
-          <p:cNvPr descr="Screenshot of the Zotero download page showing Zotero 7 for Mac and the Zotero Connector browser extension" id="0" name="Picture 1"/>
-          <p:cNvPicPr>
-            <a:picLocks noGrp="1" noChangeAspect="1"/>
-          </p:cNvPicPr>
+              <a:t>Book chapter</a:t>
+            </a:r>
+          </a:p>
+          <a:p>
+            <a:pPr algn="l"/>
+            <a:r>
+              <a:rPr lang="en-US" sz="1787" b="0" dirty="0">
+                <a:solidFill>
+                  <a:srgbClr val="010B13"/>
+                </a:solidFill>
+              </a:rPr>
+              <a:t>Choose Book Section and record authors, editors, pages, and publisher.</a:t>
+            </a:r>
+          </a:p>
+        </p:txBody>
+      </p:sp>
+      <p:sp>
+        <p:nvSpPr>
+          <p:cNvPr id="1031" name="card-rail" descr=""/>
+          <p:cNvSpPr/>
           <p:nvPr/>
-        </p:nvPicPr>
-        <p:blipFill>
-          <a:blip r:embed="rId3"/>
-          <a:stretch>
-            <a:fillRect/>
-          </a:stretch>
-        </p:blipFill>
-        <p:spPr bwMode="auto">
-          <a:xfrm>
-            <a:off x="4229100" y="2628900"/>
-            <a:ext cx="3733800" cy="2590800"/>
-          </a:xfrm>
-          <a:prstGeom prst="rect">
-            <a:avLst/>
+        </p:nvSpPr>
+        <p:spPr>
+          <a:xfrm>
+            <a:off x="1097280" y="2633472"/>
+            <a:ext cx="54864" cy="1754887"/>
+          </a:xfrm>
+          <a:prstGeom prst="roundRect">
+            <a:avLst>
+              <a:gd name="adj" fmla="val 20000"/>
+            </a:avLst>
           </a:prstGeom>
-          <a:noFill/>
-          <a:ln w="9525">
+          <a:solidFill>
+            <a:srgbClr val="010B13"/>
+          </a:solidFill>
+          <a:ln>
             <a:noFill/>
-            <a:headEnd/>
-            <a:tailEnd/>
           </a:ln>
         </p:spPr>
-      </p:pic>
-      <p:sp>
-        <p:nvSpPr>
-          <p:cNvPr id="1" name="TextBox 3"/>
-          <p:cNvSpPr txBox="1"/>
-          <p:nvPr>
-            <p:ph idx="1"/>
-          </p:nvPr>
+        <p:txBody>
+          <a:bodyPr lIns="182880" tIns="182880" rIns="182880" bIns="182880" anchor="t" wrap="square">
+            <a:normAutofit/>
+          </a:bodyPr>
+          <a:lstStyle/>
+          <a:p/>
+        </p:txBody>
+      </p:sp>
+      <p:sp>
+        <p:nvSpPr>
+          <p:cNvPr id="1032" name="card-steel" descr="card: News article. Choose Newspaper Article and record the full publication date."/>
+          <p:cNvSpPr/>
+          <p:nvPr/>
         </p:nvSpPr>
         <p:spPr>
           <a:xfrm>
-            <a:off x="1092200" y="5219700"/>
-            <a:ext cx="9994900" cy="508000"/>
-          </a:xfrm>
-          <a:prstGeom prst="rect">
-            <a:avLst/>
+            <a:off x="4477512" y="2633472"/>
+            <a:ext cx="3233928" cy="1482509"/>
+          </a:xfrm>
+          <a:prstGeom prst="roundRect">
+            <a:avLst>
+              <a:gd name="adj" fmla="val 6000"/>
+            </a:avLst>
           </a:prstGeom>
-          <a:noFill/>
-        </p:spPr>
-        <p:txBody>
-          <a:bodyPr/>
-          <a:lstStyle/>
-          <a:p>
-            <a:pPr lvl="0" indent="0" marL="0" algn="ctr">
-              <a:buNone/>
-            </a:pPr>
-            <a:r>
-              <a:rPr/>
-              <a:t>Screenshot of the Zotero download page showing Zotero 7 for Mac and the Zotero Connector browser extension</a:t>
+          <a:solidFill>
+            <a:srgbClr val="FEFDFA"/>
+          </a:solidFill>
+          <a:ln w="19050">
+            <a:solidFill>
+              <a:srgbClr val="CCCCCC"/>
+            </a:solidFill>
+          </a:ln>
+        </p:spPr>
+        <p:txBody>
+          <a:bodyPr lIns="182880" tIns="182880" rIns="182880" bIns="182880" anchor="t" wrap="square">
+            <a:normAutofit/>
+          </a:bodyPr>
+          <a:lstStyle/>
+          <a:p>
+            <a:pPr algn="l"/>
+            <a:r>
+              <a:rPr lang="en-US" sz="1965" b="1" dirty="0">
+                <a:solidFill>
+                  <a:srgbClr val="010B13"/>
+                </a:solidFill>
+              </a:rPr>
+              <a:t>News article</a:t>
+            </a:r>
+          </a:p>
+          <a:p>
+            <a:pPr algn="l"/>
+            <a:r>
+              <a:rPr lang="en-US" sz="1787" b="0" dirty="0">
+                <a:solidFill>
+                  <a:srgbClr val="010B13"/>
+                </a:solidFill>
+              </a:rPr>
+              <a:t>Choose Newspaper Article and record the full publication date.</a:t>
+            </a:r>
+          </a:p>
+        </p:txBody>
+      </p:sp>
+      <p:sp>
+        <p:nvSpPr>
+          <p:cNvPr id="1033" name="card-rail" descr=""/>
+          <p:cNvSpPr/>
+          <p:nvPr/>
+        </p:nvSpPr>
+        <p:spPr>
+          <a:xfrm>
+            <a:off x="4477512" y="2633472"/>
+            <a:ext cx="54864" cy="1482509"/>
+          </a:xfrm>
+          <a:prstGeom prst="roundRect">
+            <a:avLst>
+              <a:gd name="adj" fmla="val 20000"/>
+            </a:avLst>
+          </a:prstGeom>
+          <a:solidFill>
+            <a:srgbClr val="010B13"/>
+          </a:solidFill>
+          <a:ln>
+            <a:noFill/>
+          </a:ln>
+        </p:spPr>
+        <p:txBody>
+          <a:bodyPr lIns="182880" tIns="182880" rIns="182880" bIns="182880" anchor="t" wrap="square">
+            <a:normAutofit/>
+          </a:bodyPr>
+          <a:lstStyle/>
+          <a:p/>
+        </p:txBody>
+      </p:sp>
+      <p:sp>
+        <p:nvSpPr>
+          <p:cNvPr id="1034" name="card-red" descr="card: Magazine. Choose Magazine Article and verify the author and date."/>
+          <p:cNvSpPr/>
+          <p:nvPr/>
+        </p:nvSpPr>
+        <p:spPr>
+          <a:xfrm>
+            <a:off x="7857744" y="2633472"/>
+            <a:ext cx="3233928" cy="1482509"/>
+          </a:xfrm>
+          <a:prstGeom prst="roundRect">
+            <a:avLst>
+              <a:gd name="adj" fmla="val 6000"/>
+            </a:avLst>
+          </a:prstGeom>
+          <a:solidFill>
+            <a:srgbClr val="FEFDFA"/>
+          </a:solidFill>
+          <a:ln w="19050">
+            <a:solidFill>
+              <a:srgbClr val="CCCCCC"/>
+            </a:solidFill>
+          </a:ln>
+        </p:spPr>
+        <p:txBody>
+          <a:bodyPr lIns="182880" tIns="182880" rIns="182880" bIns="182880" anchor="t" wrap="square">
+            <a:normAutofit/>
+          </a:bodyPr>
+          <a:lstStyle/>
+          <a:p>
+            <a:pPr algn="l"/>
+            <a:r>
+              <a:rPr lang="en-US" sz="1965" b="1" dirty="0">
+                <a:solidFill>
+                  <a:srgbClr val="D00000"/>
+                </a:solidFill>
+              </a:rPr>
+              <a:t>Magazine</a:t>
+            </a:r>
+          </a:p>
+          <a:p>
+            <a:pPr algn="l"/>
+            <a:r>
+              <a:rPr lang="en-US" sz="1787" b="0" dirty="0">
+                <a:solidFill>
+                  <a:srgbClr val="010B13"/>
+                </a:solidFill>
+              </a:rPr>
+              <a:t>Choose Magazine Article and verify the author and date.</a:t>
+            </a:r>
+          </a:p>
+        </p:txBody>
+      </p:sp>
+      <p:sp>
+        <p:nvSpPr>
+          <p:cNvPr id="1035" name="card-rail" descr=""/>
+          <p:cNvSpPr/>
+          <p:nvPr/>
+        </p:nvSpPr>
+        <p:spPr>
+          <a:xfrm>
+            <a:off x="7857744" y="2633472"/>
+            <a:ext cx="54864" cy="1482509"/>
+          </a:xfrm>
+          <a:prstGeom prst="roundRect">
+            <a:avLst>
+              <a:gd name="adj" fmla="val 20000"/>
+            </a:avLst>
+          </a:prstGeom>
+          <a:solidFill>
+            <a:srgbClr val="D00000"/>
+          </a:solidFill>
+          <a:ln>
+            <a:noFill/>
+          </a:ln>
+        </p:spPr>
+        <p:txBody>
+          <a:bodyPr lIns="182880" tIns="182880" rIns="182880" bIns="182880" anchor="t" wrap="square">
+            <a:normAutofit/>
+          </a:bodyPr>
+          <a:lstStyle/>
+          <a:p/>
+        </p:txBody>
+      </p:sp>
+      <p:sp>
+        <p:nvSpPr>
+          <p:cNvPr id="1036" name="callout-important" descr="important callout: Important. Item type controls which metadata fields Zotero displays."/>
+          <p:cNvSpPr/>
+          <p:nvPr/>
+        </p:nvSpPr>
+        <p:spPr>
+          <a:xfrm>
+            <a:off x="1097280" y="4534663"/>
+            <a:ext cx="9994392" cy="1319081"/>
+          </a:xfrm>
+          <a:prstGeom prst="roundRect">
+            <a:avLst>
+              <a:gd name="adj" fmla="val 6000"/>
+            </a:avLst>
+          </a:prstGeom>
+          <a:solidFill>
+            <a:srgbClr val="FEFDFA"/>
+          </a:solidFill>
+          <a:ln w="19050">
+            <a:solidFill>
+              <a:srgbClr val="CC0000"/>
+            </a:solidFill>
+          </a:ln>
+        </p:spPr>
+        <p:txBody>
+          <a:bodyPr lIns="182880" tIns="182880" rIns="182880" bIns="182880" anchor="t" wrap="square">
+            <a:normAutofit/>
+          </a:bodyPr>
+          <a:lstStyle/>
+          <a:p/>
+        </p:txBody>
+      </p:sp>
+      <p:sp>
+        <p:nvSpPr>
+          <p:cNvPr id="1037" name="callout-title" descr=""/>
+          <p:cNvSpPr/>
+          <p:nvPr/>
+        </p:nvSpPr>
+        <p:spPr>
+          <a:xfrm>
+            <a:off x="1097280" y="4534663"/>
+            <a:ext cx="9994392" cy="381328"/>
+          </a:xfrm>
+          <a:prstGeom prst="roundRect">
+            <a:avLst>
+              <a:gd name="adj" fmla="val 6000"/>
+            </a:avLst>
+          </a:prstGeom>
+          <a:solidFill>
+            <a:srgbClr val="CC0000"/>
+          </a:solidFill>
+          <a:ln>
+            <a:noFill/>
+          </a:ln>
+        </p:spPr>
+        <p:txBody>
+          <a:bodyPr lIns="182880" tIns="0" rIns="182880" bIns="0" anchor="ctr" wrap="square">
+            <a:normAutofit/>
+          </a:bodyPr>
+          <a:lstStyle/>
+          <a:p>
+            <a:pPr algn="l"/>
+            <a:r>
+              <a:rPr lang="en-US" sz="1965" b="1" dirty="0">
+                <a:solidFill>
+                  <a:srgbClr val="FEFDFA"/>
+                </a:solidFill>
+              </a:rPr>
+              <a:t>Important</a:t>
+            </a:r>
+          </a:p>
+        </p:txBody>
+      </p:sp>
+      <p:sp>
+        <p:nvSpPr>
+          <p:cNvPr id="1038" name="callout-body" descr=""/>
+          <p:cNvSpPr/>
+          <p:nvPr/>
+        </p:nvSpPr>
+        <p:spPr>
+          <a:xfrm>
+            <a:off x="1097280" y="4915991"/>
+            <a:ext cx="9994392" cy="937753"/>
+          </a:xfrm>
+          <a:prstGeom prst="roundRect">
+            <a:avLst>
+              <a:gd name="adj" fmla="val 6000"/>
+            </a:avLst>
+          </a:prstGeom>
+          <a:solidFill>
+            <a:srgbClr val="FEFDFA"/>
+          </a:solidFill>
+          <a:ln>
+            <a:noFill/>
+          </a:ln>
+        </p:spPr>
+        <p:txBody>
+          <a:bodyPr lIns="182880" tIns="182880" rIns="182880" bIns="182880" anchor="t" wrap="square">
+            <a:normAutofit/>
+          </a:bodyPr>
+          <a:lstStyle/>
+          <a:p>
+            <a:pPr algn="l"/>
+            <a:r>
+              <a:rPr lang="en-US" sz="1787" b="0" dirty="0">
+                <a:solidFill>
+                  <a:srgbClr val="010B13"/>
+                </a:solidFill>
+              </a:rPr>
+              <a:t>Item type controls which metadata fields Zotero displays.</a:t>
             </a:r>
           </a:p>
         </p:txBody>
@@ -4046,525 +6141,58 @@
             </a:pPr>
             <a:r>
               <a:rPr/>
-              <a:t>Zotero Basics</a:t>
-            </a:r>
-          </a:p>
-        </p:txBody>
-      </p:sp>
-      <p:pic>
-        <p:nvPicPr>
-          <p:cNvPr descr="Zotero logo" id="0" name="Picture 1"/>
-          <p:cNvPicPr>
-            <a:picLocks noGrp="1" noChangeAspect="1"/>
-          </p:cNvPicPr>
-          <p:nvPr/>
-        </p:nvPicPr>
-        <p:blipFill>
-          <a:blip r:embed="rId2"/>
-          <a:stretch>
-            <a:fillRect/>
-          </a:stretch>
-        </p:blipFill>
-        <p:spPr bwMode="auto">
-          <a:xfrm>
-            <a:off x="4800600" y="2628900"/>
-            <a:ext cx="2590800" cy="2590800"/>
-          </a:xfrm>
-          <a:prstGeom prst="rect">
-            <a:avLst/>
-          </a:prstGeom>
-          <a:noFill/>
-          <a:ln w="9525">
-            <a:noFill/>
-            <a:headEnd/>
-            <a:tailEnd/>
-          </a:ln>
-        </p:spPr>
-      </p:pic>
-      <p:sp>
-        <p:nvSpPr>
-          <p:cNvPr id="1" name="TextBox 3"/>
-          <p:cNvSpPr txBox="1"/>
+              <a:t>14 Choose bibliography or collection report</a:t>
+            </a:r>
+          </a:p>
+        </p:txBody>
+      </p:sp>
+      <p:sp>
+        <p:nvSpPr>
+          <p:cNvPr id="3" name="Content Placeholder 2"/>
+          <p:cNvSpPr>
+            <a:spLocks noGrp="1"/>
+          </p:cNvSpPr>
           <p:nvPr>
             <p:ph idx="1"/>
           </p:nvPr>
         </p:nvSpPr>
-        <p:spPr>
-          <a:xfrm>
-            <a:off x="1092200" y="5219700"/>
-            <a:ext cx="9994900" cy="508000"/>
-          </a:xfrm>
-          <a:prstGeom prst="rect">
-            <a:avLst/>
-          </a:prstGeom>
-          <a:noFill/>
-        </p:spPr>
-        <p:txBody>
-          <a:bodyPr/>
-          <a:lstStyle/>
-          <a:p>
-            <a:pPr lvl="0" indent="0" marL="0" algn="ctr">
+        <p:spPr/>
+        <p:txBody>
+          <a:bodyPr/>
+          <a:lstStyle/>
+          <a:p>
+            <a:pPr lvl="0" indent="0" marL="0">
               <a:buNone/>
             </a:pPr>
             <a:r>
+              <a:rPr b="1"/>
+              <a:t>Create Bibliography from Collection</a:t>
+            </a:r>
+            <a:r>
               <a:rPr/>
-              <a:t>Zotero logo</a:t>
-            </a:r>
-          </a:p>
-        </p:txBody>
-      </p:sp>
-    </p:spTree>
-  </p:cSld>
-</p:sld>
-</file>
-
-<file path=ppt/slides/slide16.xml><?xml version="1.0" encoding="utf-8"?>
-<p:sld xmlns:a="http://schemas.openxmlformats.org/drawingml/2006/main" xmlns:r="http://schemas.openxmlformats.org/officeDocument/2006/relationships" xmlns:p="http://schemas.openxmlformats.org/presentationml/2006/main">
-  <p:cSld>
-    <p:spTree>
-      <p:nvGrpSpPr>
-        <p:cNvPr id="1" name=""/>
-        <p:cNvGrpSpPr/>
-        <p:nvPr/>
-      </p:nvGrpSpPr>
-      <p:grpSpPr>
-        <a:xfrm>
-          <a:off x="0" y="0"/>
-          <a:ext cx="0" cy="0"/>
-          <a:chOff x="0" y="0"/>
-          <a:chExt cx="0" cy="0"/>
-        </a:xfrm>
-      </p:grpSpPr>
-      <p:sp>
-        <p:nvSpPr>
-          <p:cNvPr id="2" name="Title 1"/>
-          <p:cNvSpPr>
-            <a:spLocks noGrp="1"/>
-          </p:cNvSpPr>
-          <p:nvPr>
-            <p:ph type="title"/>
-          </p:nvPr>
-        </p:nvSpPr>
-        <p:spPr>
-          <a:xfrm>
-            <a:off x="1097280" y="964692"/>
-            <a:ext cx="9997440" cy="1188720"/>
-          </a:xfrm>
-        </p:spPr>
-        <p:txBody>
-          <a:bodyPr/>
-          <a:lstStyle/>
+              <a:t> creates the APA reference list.</a:t>
+            </a:r>
+          </a:p>
           <a:p>
             <a:pPr lvl="0" indent="0" marL="0">
               <a:buNone/>
             </a:pPr>
             <a:r>
+              <a:rPr b="1"/>
+              <a:t>Generate Report from Collection</a:t>
+            </a:r>
+            <a:r>
               <a:rPr/>
-              <a:t>Zotero Basics (continued)</a:t>
-            </a:r>
-          </a:p>
-        </p:txBody>
-      </p:sp>
-      <p:pic>
-        <p:nvPicPr>
-          <p:cNvPr descr="Screenshot of an empty Zotero library window showing My Library with no items" id="0" name="Picture 1"/>
-          <p:cNvPicPr>
-            <a:picLocks noGrp="1" noChangeAspect="1"/>
-          </p:cNvPicPr>
-          <p:nvPr/>
-        </p:nvPicPr>
-        <p:blipFill>
-          <a:blip r:embed="rId2"/>
-          <a:stretch>
-            <a:fillRect/>
-          </a:stretch>
-        </p:blipFill>
-        <p:spPr bwMode="auto">
-          <a:xfrm>
-            <a:off x="4076700" y="2628900"/>
-            <a:ext cx="4038600" cy="2590800"/>
-          </a:xfrm>
-          <a:prstGeom prst="rect">
-            <a:avLst/>
-          </a:prstGeom>
-          <a:noFill/>
-          <a:ln w="9525">
-            <a:noFill/>
-            <a:headEnd/>
-            <a:tailEnd/>
-          </a:ln>
-        </p:spPr>
-      </p:pic>
-      <p:sp>
-        <p:nvSpPr>
-          <p:cNvPr id="1" name="TextBox 3"/>
-          <p:cNvSpPr txBox="1"/>
-          <p:nvPr>
-            <p:ph idx="1"/>
-          </p:nvPr>
-        </p:nvSpPr>
-        <p:spPr>
-          <a:xfrm>
-            <a:off x="1092200" y="5219700"/>
-            <a:ext cx="9994900" cy="508000"/>
-          </a:xfrm>
-          <a:prstGeom prst="rect">
-            <a:avLst/>
-          </a:prstGeom>
-          <a:noFill/>
-        </p:spPr>
-        <p:txBody>
-          <a:bodyPr/>
-          <a:lstStyle/>
-          <a:p>
-            <a:pPr lvl="0" indent="0" marL="0" algn="ctr">
+              <a:t> creates the collection report.</a:t>
+            </a:r>
+          </a:p>
+          <a:p>
+            <a:pPr lvl="0" indent="0" marL="0">
               <a:buNone/>
             </a:pPr>
             <a:r>
               <a:rPr/>
-              <a:t>Screenshot of an empty Zotero library window showing My Library with no items</a:t>
-            </a:r>
-          </a:p>
-        </p:txBody>
-      </p:sp>
-    </p:spTree>
-  </p:cSld>
-</p:sld>
-</file>
-
-<file path=ppt/slides/slide17.xml><?xml version="1.0" encoding="utf-8"?>
-<p:sld xmlns:a="http://schemas.openxmlformats.org/drawingml/2006/main" xmlns:r="http://schemas.openxmlformats.org/officeDocument/2006/relationships" xmlns:p="http://schemas.openxmlformats.org/presentationml/2006/main">
-  <p:cSld>
-    <p:spTree>
-      <p:nvGrpSpPr>
-        <p:cNvPr id="1" name=""/>
-        <p:cNvGrpSpPr/>
-        <p:nvPr/>
-      </p:nvGrpSpPr>
-      <p:grpSpPr>
-        <a:xfrm>
-          <a:off x="0" y="0"/>
-          <a:ext cx="0" cy="0"/>
-          <a:chOff x="0" y="0"/>
-          <a:chExt cx="0" cy="0"/>
-        </a:xfrm>
-      </p:grpSpPr>
-      <p:sp>
-        <p:nvSpPr>
-          <p:cNvPr id="2" name="Title 1"/>
-          <p:cNvSpPr>
-            <a:spLocks noGrp="1"/>
-          </p:cNvSpPr>
-          <p:nvPr>
-            <p:ph type="title"/>
-          </p:nvPr>
-        </p:nvSpPr>
-        <p:spPr>
-          <a:xfrm>
-            <a:off x="1097280" y="964692"/>
-            <a:ext cx="9997440" cy="1188720"/>
-          </a:xfrm>
-        </p:spPr>
-        <p:txBody>
-          <a:bodyPr/>
-          <a:lstStyle/>
-          <a:p>
-            <a:pPr lvl="0" indent="0" marL="0">
-              <a:buNone/>
-            </a:pPr>
-            <a:r>
-              <a:rPr/>
-              <a:t>Zotero Basics (continued)</a:t>
-            </a:r>
-          </a:p>
-        </p:txBody>
-      </p:sp>
-      <p:pic>
-        <p:nvPicPr>
-          <p:cNvPr descr="Annotated screenshot of the Zotero window divided into three panes: Collections folders on the left, Items in the center, and Metadata on the right" id="0" name="Picture 1"/>
-          <p:cNvPicPr>
-            <a:picLocks noGrp="1" noChangeAspect="1"/>
-          </p:cNvPicPr>
-          <p:nvPr/>
-        </p:nvPicPr>
-        <p:blipFill>
-          <a:blip r:embed="rId2"/>
-          <a:stretch>
-            <a:fillRect/>
-          </a:stretch>
-        </p:blipFill>
-        <p:spPr bwMode="auto">
-          <a:xfrm>
-            <a:off x="4076700" y="2628900"/>
-            <a:ext cx="4038600" cy="2590800"/>
-          </a:xfrm>
-          <a:prstGeom prst="rect">
-            <a:avLst/>
-          </a:prstGeom>
-          <a:noFill/>
-          <a:ln w="9525">
-            <a:noFill/>
-            <a:headEnd/>
-            <a:tailEnd/>
-          </a:ln>
-        </p:spPr>
-      </p:pic>
-      <p:sp>
-        <p:nvSpPr>
-          <p:cNvPr id="1" name="TextBox 3"/>
-          <p:cNvSpPr txBox="1"/>
-          <p:nvPr>
-            <p:ph idx="1"/>
-          </p:nvPr>
-        </p:nvSpPr>
-        <p:spPr>
-          <a:xfrm>
-            <a:off x="1092200" y="5219700"/>
-            <a:ext cx="9994900" cy="508000"/>
-          </a:xfrm>
-          <a:prstGeom prst="rect">
-            <a:avLst/>
-          </a:prstGeom>
-          <a:noFill/>
-        </p:spPr>
-        <p:txBody>
-          <a:bodyPr/>
-          <a:lstStyle/>
-          <a:p>
-            <a:pPr lvl="0" indent="0" marL="0" algn="ctr">
-              <a:buNone/>
-            </a:pPr>
-            <a:r>
-              <a:rPr/>
-              <a:t>Annotated screenshot of the Zotero window divided into three panes: Collections folders on the left, Items in the center, and Metadata on the right</a:t>
-            </a:r>
-          </a:p>
-        </p:txBody>
-      </p:sp>
-    </p:spTree>
-  </p:cSld>
-</p:sld>
-</file>
-
-<file path=ppt/slides/slide18.xml><?xml version="1.0" encoding="utf-8"?>
-<p:sld xmlns:a="http://schemas.openxmlformats.org/drawingml/2006/main" xmlns:r="http://schemas.openxmlformats.org/officeDocument/2006/relationships" xmlns:p="http://schemas.openxmlformats.org/presentationml/2006/main">
-  <p:cSld>
-    <p:spTree>
-      <p:nvGrpSpPr>
-        <p:cNvPr id="1" name=""/>
-        <p:cNvGrpSpPr/>
-        <p:nvPr/>
-      </p:nvGrpSpPr>
-      <p:grpSpPr>
-        <a:xfrm>
-          <a:off x="0" y="0"/>
-          <a:ext cx="0" cy="0"/>
-          <a:chOff x="0" y="0"/>
-          <a:chExt cx="0" cy="0"/>
-        </a:xfrm>
-      </p:grpSpPr>
-      <p:sp>
-        <p:nvSpPr>
-          <p:cNvPr id="2" name="Title 1"/>
-          <p:cNvSpPr>
-            <a:spLocks noGrp="1"/>
-          </p:cNvSpPr>
-          <p:nvPr>
-            <p:ph type="title"/>
-          </p:nvPr>
-        </p:nvSpPr>
-        <p:spPr>
-          <a:xfrm>
-            <a:off x="1097280" y="964692"/>
-            <a:ext cx="9997440" cy="1188720"/>
-          </a:xfrm>
-        </p:spPr>
-        <p:txBody>
-          <a:bodyPr/>
-          <a:lstStyle/>
-          <a:p>
-            <a:pPr lvl="0" indent="0" marL="0">
-              <a:buNone/>
-            </a:pPr>
-            <a:r>
-              <a:rPr/>
-              <a:t>Zotero Basics (continued)</a:t>
-            </a:r>
-          </a:p>
-        </p:txBody>
-      </p:sp>
-      <p:pic>
-        <p:nvPicPr>
-          <p:cNvPr descr="Annotated screenshot of the Zotero toolbar highlighting the Add New Collection, Add New Item, and Add Item by Identifier magic wand buttons" id="0" name="Picture 1"/>
-          <p:cNvPicPr>
-            <a:picLocks noGrp="1" noChangeAspect="1"/>
-          </p:cNvPicPr>
-          <p:nvPr/>
-        </p:nvPicPr>
-        <p:blipFill>
-          <a:blip r:embed="rId2"/>
-          <a:stretch>
-            <a:fillRect/>
-          </a:stretch>
-        </p:blipFill>
-        <p:spPr bwMode="auto">
-          <a:xfrm>
-            <a:off x="4076700" y="2628900"/>
-            <a:ext cx="4038600" cy="2590800"/>
-          </a:xfrm>
-          <a:prstGeom prst="rect">
-            <a:avLst/>
-          </a:prstGeom>
-          <a:noFill/>
-          <a:ln w="9525">
-            <a:noFill/>
-            <a:headEnd/>
-            <a:tailEnd/>
-          </a:ln>
-        </p:spPr>
-      </p:pic>
-      <p:sp>
-        <p:nvSpPr>
-          <p:cNvPr id="1" name="TextBox 3"/>
-          <p:cNvSpPr txBox="1"/>
-          <p:nvPr>
-            <p:ph idx="1"/>
-          </p:nvPr>
-        </p:nvSpPr>
-        <p:spPr>
-          <a:xfrm>
-            <a:off x="1092200" y="5219700"/>
-            <a:ext cx="9994900" cy="508000"/>
-          </a:xfrm>
-          <a:prstGeom prst="rect">
-            <a:avLst/>
-          </a:prstGeom>
-          <a:noFill/>
-        </p:spPr>
-        <p:txBody>
-          <a:bodyPr/>
-          <a:lstStyle/>
-          <a:p>
-            <a:pPr lvl="0" indent="0" marL="0" algn="ctr">
-              <a:buNone/>
-            </a:pPr>
-            <a:r>
-              <a:rPr/>
-              <a:t>Annotated screenshot of the Zotero toolbar highlighting the Add New Collection, Add New Item, and Add Item by Identifier magic wand buttons</a:t>
-            </a:r>
-          </a:p>
-        </p:txBody>
-      </p:sp>
-    </p:spTree>
-  </p:cSld>
-</p:sld>
-</file>
-
-<file path=ppt/slides/slide19.xml><?xml version="1.0" encoding="utf-8"?>
-<p:sld xmlns:a="http://schemas.openxmlformats.org/drawingml/2006/main" xmlns:r="http://schemas.openxmlformats.org/officeDocument/2006/relationships" xmlns:p="http://schemas.openxmlformats.org/presentationml/2006/main">
-  <p:cSld>
-    <p:spTree>
-      <p:nvGrpSpPr>
-        <p:cNvPr id="1" name=""/>
-        <p:cNvGrpSpPr/>
-        <p:nvPr/>
-      </p:nvGrpSpPr>
-      <p:grpSpPr>
-        <a:xfrm>
-          <a:off x="0" y="0"/>
-          <a:ext cx="0" cy="0"/>
-          <a:chOff x="0" y="0"/>
-          <a:chExt cx="0" cy="0"/>
-        </a:xfrm>
-      </p:grpSpPr>
-      <p:sp>
-        <p:nvSpPr>
-          <p:cNvPr id="2" name="Title 1"/>
-          <p:cNvSpPr>
-            <a:spLocks noGrp="1"/>
-          </p:cNvSpPr>
-          <p:nvPr>
-            <p:ph type="title"/>
-          </p:nvPr>
-        </p:nvSpPr>
-        <p:spPr>
-          <a:xfrm>
-            <a:off x="1097280" y="964692"/>
-            <a:ext cx="9997440" cy="1188720"/>
-          </a:xfrm>
-        </p:spPr>
-        <p:txBody>
-          <a:bodyPr/>
-          <a:lstStyle/>
-          <a:p>
-            <a:pPr lvl="0" indent="0" marL="0">
-              <a:buNone/>
-            </a:pPr>
-            <a:r>
-              <a:rPr/>
-              <a:t>Zotero Basics (continued)</a:t>
-            </a:r>
-          </a:p>
-        </p:txBody>
-      </p:sp>
-      <p:pic>
-        <p:nvPicPr>
-          <p:cNvPr descr="Screenshot of a Zotero metadata pane with the Item Type field highlighted as Journal Article" id="0" name="Picture 1"/>
-          <p:cNvPicPr>
-            <a:picLocks noGrp="1" noChangeAspect="1"/>
-          </p:cNvPicPr>
-          <p:nvPr/>
-        </p:nvPicPr>
-        <p:blipFill>
-          <a:blip r:embed="rId2"/>
-          <a:stretch>
-            <a:fillRect/>
-          </a:stretch>
-        </p:blipFill>
-        <p:spPr bwMode="auto">
-          <a:xfrm>
-            <a:off x="4025900" y="2628900"/>
-            <a:ext cx="4114800" cy="2590800"/>
-          </a:xfrm>
-          <a:prstGeom prst="rect">
-            <a:avLst/>
-          </a:prstGeom>
-          <a:noFill/>
-          <a:ln w="9525">
-            <a:noFill/>
-            <a:headEnd/>
-            <a:tailEnd/>
-          </a:ln>
-        </p:spPr>
-      </p:pic>
-      <p:sp>
-        <p:nvSpPr>
-          <p:cNvPr id="1" name="TextBox 3"/>
-          <p:cNvSpPr txBox="1"/>
-          <p:nvPr>
-            <p:ph idx="1"/>
-          </p:nvPr>
-        </p:nvSpPr>
-        <p:spPr>
-          <a:xfrm>
-            <a:off x="1092200" y="5219700"/>
-            <a:ext cx="9994900" cy="508000"/>
-          </a:xfrm>
-          <a:prstGeom prst="rect">
-            <a:avLst/>
-          </a:prstGeom>
-          <a:noFill/>
-        </p:spPr>
-        <p:txBody>
-          <a:bodyPr/>
-          <a:lstStyle/>
-          <a:p>
-            <a:pPr lvl="0" indent="0" marL="0" algn="ctr">
-              <a:buNone/>
-            </a:pPr>
-            <a:r>
-              <a:rPr/>
-              <a:t>Screenshot of a Zotero metadata pane with the Item Type field highlighted as Journal Article</a:t>
+              <a:t>Complete both output boxes in the Lab 1 worksheet.</a:t>
             </a:r>
           </a:p>
         </p:txBody>
@@ -4616,497 +6244,21 @@
             </a:pPr>
             <a:r>
               <a:rPr/>
-              <a:t>Today’s Tasks</a:t>
-            </a:r>
-          </a:p>
-        </p:txBody>
-      </p:sp>
-      <p:sp>
-        <p:nvSpPr>
-          <p:cNvPr id="1001" name="box-post-it" descr="box: . Lab 1:Overview of APA formatIntro to Zotero"/>
+              <a:t>1 Today you will organize, verify, and export two Zotero collections</a:t>
+            </a:r>
+          </a:p>
+        </p:txBody>
+      </p:sp>
+      <p:sp>
+        <p:nvSpPr>
+          <p:cNvPr id="1001" name="card-red" descr="card: Organize. Build separate walk-through and take-home collections."/>
           <p:cNvSpPr/>
           <p:nvPr/>
         </p:nvSpPr>
         <p:spPr>
           <a:xfrm>
             <a:off x="1097280" y="2633472"/>
-            <a:ext cx="9994392" cy="365760"/>
-          </a:xfrm>
-          <a:prstGeom prst="roundRect">
-            <a:avLst>
-              <a:gd name="adj" fmla="val 6000"/>
-            </a:avLst>
-          </a:prstGeom>
-          <a:solidFill>
-            <a:srgbClr val="FFF9C4"/>
-          </a:solidFill>
-          <a:ln w="19050">
-            <a:solidFill>
-              <a:srgbClr val="CCCCCC"/>
-            </a:solidFill>
-          </a:ln>
-        </p:spPr>
-        <p:txBody>
-          <a:bodyPr lIns="91440" tIns="68580" rIns="91440" bIns="68580" anchor="t" wrap="square">
-            <a:normAutofit/>
-          </a:bodyPr>
-          <a:lstStyle/>
-          <a:p>
-            <a:pPr algn="l"/>
-            <a:r>
-              <a:rPr lang="en-US" sz="1200" b="0" dirty="0">
-                <a:solidFill>
-                  <a:srgbClr val="010B13"/>
-                </a:solidFill>
-              </a:rPr>
-              <a:t>Lab 1:Overview of APA formatIntro to Zotero</a:t>
-            </a:r>
-          </a:p>
-        </p:txBody>
-      </p:sp>
-    </p:spTree>
-  </p:cSld>
-</p:sld>
-</file>
-
-<file path=ppt/slides/slide20.xml><?xml version="1.0" encoding="utf-8"?>
-<p:sld xmlns:a="http://schemas.openxmlformats.org/drawingml/2006/main" xmlns:r="http://schemas.openxmlformats.org/officeDocument/2006/relationships" xmlns:p="http://schemas.openxmlformats.org/presentationml/2006/main">
-  <p:cSld>
-    <p:spTree>
-      <p:nvGrpSpPr>
-        <p:cNvPr id="1" name=""/>
-        <p:cNvGrpSpPr/>
-        <p:nvPr/>
-      </p:nvGrpSpPr>
-      <p:grpSpPr>
-        <a:xfrm>
-          <a:off x="0" y="0"/>
-          <a:ext cx="0" cy="0"/>
-          <a:chOff x="0" y="0"/>
-          <a:chExt cx="0" cy="0"/>
-        </a:xfrm>
-      </p:grpSpPr>
-      <p:sp>
-        <p:nvSpPr>
-          <p:cNvPr id="2" name="Title 1"/>
-          <p:cNvSpPr>
-            <a:spLocks noGrp="1"/>
-          </p:cNvSpPr>
-          <p:nvPr>
-            <p:ph type="title"/>
-          </p:nvPr>
-        </p:nvSpPr>
-        <p:spPr>
-          <a:xfrm>
-            <a:off x="1097280" y="964692"/>
-            <a:ext cx="9997440" cy="1188720"/>
-          </a:xfrm>
-        </p:spPr>
-        <p:txBody>
-          <a:bodyPr/>
-          <a:lstStyle/>
-          <a:p>
-            <a:pPr lvl="0" indent="0" marL="0">
-              <a:buNone/>
-            </a:pPr>
-            <a:r>
-              <a:rPr/>
-              <a:t>Zotero Basics (continued)</a:t>
-            </a:r>
-          </a:p>
-        </p:txBody>
-      </p:sp>
-      <p:pic>
-        <p:nvPicPr>
-          <p:cNvPr descr="Screenshot of the Zotero item type dropdown menu listing source types with Journal Article highlighted" id="0" name="Picture 1"/>
-          <p:cNvPicPr>
-            <a:picLocks noGrp="1" noChangeAspect="1"/>
-          </p:cNvPicPr>
-          <p:nvPr/>
-        </p:nvPicPr>
-        <p:blipFill>
-          <a:blip r:embed="rId2"/>
-          <a:stretch>
-            <a:fillRect/>
-          </a:stretch>
-        </p:blipFill>
-        <p:spPr bwMode="auto">
-          <a:xfrm>
-            <a:off x="5524500" y="2628900"/>
-            <a:ext cx="1143000" cy="2590800"/>
-          </a:xfrm>
-          <a:prstGeom prst="rect">
-            <a:avLst/>
-          </a:prstGeom>
-          <a:noFill/>
-          <a:ln w="9525">
-            <a:noFill/>
-            <a:headEnd/>
-            <a:tailEnd/>
-          </a:ln>
-        </p:spPr>
-      </p:pic>
-      <p:sp>
-        <p:nvSpPr>
-          <p:cNvPr id="1" name="TextBox 3"/>
-          <p:cNvSpPr txBox="1"/>
-          <p:nvPr>
-            <p:ph idx="1"/>
-          </p:nvPr>
-        </p:nvSpPr>
-        <p:spPr>
-          <a:xfrm>
-            <a:off x="1092200" y="5219700"/>
-            <a:ext cx="9994900" cy="508000"/>
-          </a:xfrm>
-          <a:prstGeom prst="rect">
-            <a:avLst/>
-          </a:prstGeom>
-          <a:noFill/>
-        </p:spPr>
-        <p:txBody>
-          <a:bodyPr/>
-          <a:lstStyle/>
-          <a:p>
-            <a:pPr lvl="0" indent="0" marL="0" algn="ctr">
-              <a:buNone/>
-            </a:pPr>
-            <a:r>
-              <a:rPr/>
-              <a:t>Screenshot of the Zotero item type dropdown menu listing source types with Journal Article highlighted</a:t>
-            </a:r>
-          </a:p>
-        </p:txBody>
-      </p:sp>
-    </p:spTree>
-  </p:cSld>
-</p:sld>
-</file>
-
-<file path=ppt/slides/slide21.xml><?xml version="1.0" encoding="utf-8"?>
-<p:sld xmlns:a="http://schemas.openxmlformats.org/drawingml/2006/main" xmlns:r="http://schemas.openxmlformats.org/officeDocument/2006/relationships" xmlns:p="http://schemas.openxmlformats.org/presentationml/2006/main">
-  <p:cSld>
-    <p:spTree>
-      <p:nvGrpSpPr>
-        <p:cNvPr id="1" name=""/>
-        <p:cNvGrpSpPr/>
-        <p:nvPr/>
-      </p:nvGrpSpPr>
-      <p:grpSpPr>
-        <a:xfrm>
-          <a:off x="0" y="0"/>
-          <a:ext cx="0" cy="0"/>
-          <a:chOff x="0" y="0"/>
-          <a:chExt cx="0" cy="0"/>
-        </a:xfrm>
-      </p:grpSpPr>
-      <p:sp>
-        <p:nvSpPr>
-          <p:cNvPr id="2" name="Title 1"/>
-          <p:cNvSpPr>
-            <a:spLocks noGrp="1"/>
-          </p:cNvSpPr>
-          <p:nvPr>
-            <p:ph type="title"/>
-          </p:nvPr>
-        </p:nvSpPr>
-        <p:spPr>
-          <a:xfrm>
-            <a:off x="1097280" y="964692"/>
-            <a:ext cx="9997440" cy="1188720"/>
-          </a:xfrm>
-        </p:spPr>
-        <p:txBody>
-          <a:bodyPr/>
-          <a:lstStyle/>
-          <a:p>
-            <a:pPr lvl="0" indent="0" marL="0">
-              <a:buNone/>
-            </a:pPr>
-            <a:r>
-              <a:rPr/>
-              <a:t>Zotero Basics (continued)</a:t>
-            </a:r>
-          </a:p>
-        </p:txBody>
-      </p:sp>
-      <p:pic>
-        <p:nvPicPr>
-          <p:cNvPr descr="Screenshot of the Zotero item type dropdown menu listing source types with Journal Article highlighted" id="0" name="Picture 1"/>
-          <p:cNvPicPr>
-            <a:picLocks noGrp="1" noChangeAspect="1"/>
-          </p:cNvPicPr>
-          <p:nvPr/>
-        </p:nvPicPr>
-        <p:blipFill>
-          <a:blip r:embed="rId2"/>
-          <a:stretch>
-            <a:fillRect/>
-          </a:stretch>
-        </p:blipFill>
-        <p:spPr bwMode="auto">
-          <a:xfrm>
-            <a:off x="5524500" y="2628900"/>
-            <a:ext cx="1143000" cy="2590800"/>
-          </a:xfrm>
-          <a:prstGeom prst="rect">
-            <a:avLst/>
-          </a:prstGeom>
-          <a:noFill/>
-          <a:ln w="9525">
-            <a:noFill/>
-            <a:headEnd/>
-            <a:tailEnd/>
-          </a:ln>
-        </p:spPr>
-      </p:pic>
-      <p:sp>
-        <p:nvSpPr>
-          <p:cNvPr id="1" name="TextBox 3"/>
-          <p:cNvSpPr txBox="1"/>
-          <p:nvPr>
-            <p:ph idx="1"/>
-          </p:nvPr>
-        </p:nvSpPr>
-        <p:spPr>
-          <a:xfrm>
-            <a:off x="1092200" y="5219700"/>
-            <a:ext cx="9994900" cy="508000"/>
-          </a:xfrm>
-          <a:prstGeom prst="rect">
-            <a:avLst/>
-          </a:prstGeom>
-          <a:noFill/>
-        </p:spPr>
-        <p:txBody>
-          <a:bodyPr/>
-          <a:lstStyle/>
-          <a:p>
-            <a:pPr lvl="0" indent="0" marL="0" algn="ctr">
-              <a:buNone/>
-            </a:pPr>
-            <a:r>
-              <a:rPr/>
-              <a:t>Screenshot of the Zotero item type dropdown menu listing source types with Journal Article highlighted</a:t>
-            </a:r>
-          </a:p>
-        </p:txBody>
-      </p:sp>
-    </p:spTree>
-  </p:cSld>
-</p:sld>
-</file>
-
-<file path=ppt/slides/slide22.xml><?xml version="1.0" encoding="utf-8"?>
-<p:sld xmlns:a="http://schemas.openxmlformats.org/drawingml/2006/main" xmlns:r="http://schemas.openxmlformats.org/officeDocument/2006/relationships" xmlns:p="http://schemas.openxmlformats.org/presentationml/2006/main">
-  <p:cSld>
-    <p:spTree>
-      <p:nvGrpSpPr>
-        <p:cNvPr id="1" name=""/>
-        <p:cNvGrpSpPr/>
-        <p:nvPr/>
-      </p:nvGrpSpPr>
-      <p:grpSpPr>
-        <a:xfrm>
-          <a:off x="0" y="0"/>
-          <a:ext cx="0" cy="0"/>
-          <a:chOff x="0" y="0"/>
-          <a:chExt cx="0" cy="0"/>
-        </a:xfrm>
-      </p:grpSpPr>
-      <p:sp>
-        <p:nvSpPr>
-          <p:cNvPr id="2" name="Title 1"/>
-          <p:cNvSpPr>
-            <a:spLocks noGrp="1"/>
-          </p:cNvSpPr>
-          <p:nvPr>
-            <p:ph type="title"/>
-          </p:nvPr>
-        </p:nvSpPr>
-        <p:spPr>
-          <a:xfrm>
-            <a:off x="1097280" y="964692"/>
-            <a:ext cx="9997440" cy="1188720"/>
-          </a:xfrm>
-        </p:spPr>
-        <p:txBody>
-          <a:bodyPr/>
-          <a:lstStyle/>
-          <a:p>
-            <a:pPr lvl="0" indent="0" marL="0">
-              <a:buNone/>
-            </a:pPr>
-            <a:r>
-              <a:rPr/>
-              <a:t>APA 7: Journal Articles</a:t>
-            </a:r>
-          </a:p>
-        </p:txBody>
-      </p:sp>
-      <p:pic>
-        <p:nvPicPr>
-          <p:cNvPr descr="Example of an APA-style References page" id="0" name="Picture 1"/>
-          <p:cNvPicPr>
-            <a:picLocks noGrp="1" noChangeAspect="1"/>
-          </p:cNvPicPr>
-          <p:nvPr/>
-        </p:nvPicPr>
-        <p:blipFill>
-          <a:blip r:embed="rId2"/>
-          <a:stretch>
-            <a:fillRect/>
-          </a:stretch>
-        </p:blipFill>
-        <p:spPr bwMode="auto">
-          <a:xfrm>
-            <a:off x="5092700" y="2628900"/>
-            <a:ext cx="2006600" cy="2590800"/>
-          </a:xfrm>
-          <a:prstGeom prst="rect">
-            <a:avLst/>
-          </a:prstGeom>
-          <a:noFill/>
-          <a:ln w="9525">
-            <a:noFill/>
-            <a:headEnd/>
-            <a:tailEnd/>
-          </a:ln>
-        </p:spPr>
-      </p:pic>
-      <p:sp>
-        <p:nvSpPr>
-          <p:cNvPr id="1" name="TextBox 3"/>
-          <p:cNvSpPr txBox="1"/>
-          <p:nvPr>
-            <p:ph idx="1"/>
-          </p:nvPr>
-        </p:nvSpPr>
-        <p:spPr>
-          <a:xfrm>
-            <a:off x="1092200" y="5219700"/>
-            <a:ext cx="9994900" cy="508000"/>
-          </a:xfrm>
-          <a:prstGeom prst="rect">
-            <a:avLst/>
-          </a:prstGeom>
-          <a:noFill/>
-        </p:spPr>
-        <p:txBody>
-          <a:bodyPr/>
-          <a:lstStyle/>
-          <a:p>
-            <a:pPr lvl="0" indent="0" marL="0" algn="ctr">
-              <a:buNone/>
-            </a:pPr>
-            <a:r>
-              <a:rPr/>
-              <a:t>The general format is:</a:t>
-            </a:r>
-          </a:p>
-        </p:txBody>
-      </p:sp>
-    </p:spTree>
-  </p:cSld>
-</p:sld>
-</file>
-
-<file path=ppt/slides/slide23.xml><?xml version="1.0" encoding="utf-8"?>
-<p:sld xmlns:a="http://schemas.openxmlformats.org/drawingml/2006/main" xmlns:r="http://schemas.openxmlformats.org/officeDocument/2006/relationships" xmlns:p="http://schemas.openxmlformats.org/presentationml/2006/main">
-  <p:cSld>
-    <p:spTree>
-      <p:nvGrpSpPr>
-        <p:cNvPr id="1" name=""/>
-        <p:cNvGrpSpPr/>
-        <p:nvPr/>
-      </p:nvGrpSpPr>
-      <p:grpSpPr>
-        <a:xfrm>
-          <a:off x="0" y="0"/>
-          <a:ext cx="0" cy="0"/>
-          <a:chOff x="0" y="0"/>
-          <a:chExt cx="0" cy="0"/>
-        </a:xfrm>
-      </p:grpSpPr>
-      <p:sp>
-        <p:nvSpPr>
-          <p:cNvPr id="2" name="Title 1"/>
-          <p:cNvSpPr>
-            <a:spLocks noGrp="1"/>
-          </p:cNvSpPr>
-          <p:nvPr>
-            <p:ph type="title"/>
-          </p:nvPr>
-        </p:nvSpPr>
-        <p:spPr>
-          <a:xfrm>
-            <a:off x="1097280" y="964692"/>
-            <a:ext cx="9997440" cy="1188720"/>
-          </a:xfrm>
-        </p:spPr>
-        <p:txBody>
-          <a:bodyPr/>
-          <a:lstStyle/>
-          <a:p>
-            <a:pPr lvl="0" indent="0" marL="0">
-              <a:buNone/>
-            </a:pPr>
-            <a:r>
-              <a:rPr/>
-              <a:t>APA 7: Journal Articles (continued)</a:t>
-            </a:r>
-          </a:p>
-        </p:txBody>
-      </p:sp>
-      <p:sp>
-        <p:nvSpPr>
-          <p:cNvPr id="1026" name="prose" descr=""/>
-          <p:cNvSpPr/>
-          <p:nvPr/>
-        </p:nvSpPr>
-        <p:spPr>
-          <a:xfrm>
-            <a:off x="1097280" y="2633472"/>
-            <a:ext cx="9994392" cy="365760"/>
-          </a:xfrm>
-          <a:prstGeom prst="roundRect">
-            <a:avLst>
-              <a:gd name="adj" fmla="val 6000"/>
-            </a:avLst>
-          </a:prstGeom>
-          <a:noFill/>
-          <a:ln>
-            <a:noFill/>
-          </a:ln>
-        </p:spPr>
-        <p:txBody>
-          <a:bodyPr lIns="91440" tIns="68580" rIns="91440" bIns="68580" anchor="t" wrap="square">
-            <a:normAutofit/>
-          </a:bodyPr>
-          <a:lstStyle/>
-          <a:p>
-            <a:pPr algn="l"/>
-            <a:r>
-              <a:rPr lang="en-US" sz="1200" b="0" dirty="0">
-                <a:solidFill>
-                  <a:srgbClr val="010B13"/>
-                </a:solidFill>
-              </a:rPr>
-              <a:t>Author, A. A., Author, B. B., &amp; Author, C. C. (Year of publication). Title of article. Title of Journal, volume number (issue number), pages. https://doi-org.libproxy.unl.edu/10.1111/j.1740-1461.2011.01230.x</a:t>
-            </a:r>
-          </a:p>
-        </p:txBody>
-      </p:sp>
-      <p:sp>
-        <p:nvSpPr>
-          <p:cNvPr id="1027" name="callout-tip" descr="tip callout: EXAMPLE. Rachlinski, J. J., Guthrie, C., &amp; Wistrich, A. J. (2011). Probable Cause, Probability, and Hindsight. Journal of Empirical Legal Studies, 72(51), 157–180. https://doi-org.libproxy.unl.edu/10.1111/j.1740-1461.2011.01230.x"/>
-          <p:cNvSpPr/>
-          <p:nvPr/>
-        </p:nvSpPr>
-        <p:spPr>
-          <a:xfrm>
-            <a:off x="1097280" y="3090672"/>
-            <a:ext cx="9994392" cy="1082040"/>
+            <a:ext cx="3233928" cy="1615440"/>
           </a:xfrm>
           <a:prstGeom prst="roundRect">
             <a:avLst>
@@ -5118,69 +6270,80 @@
           </a:solidFill>
           <a:ln w="19050">
             <a:solidFill>
-              <a:srgbClr val="009955"/>
+              <a:srgbClr val="CCCCCC"/>
             </a:solidFill>
           </a:ln>
         </p:spPr>
         <p:txBody>
-          <a:bodyPr lIns="91440" tIns="68580" rIns="91440" bIns="68580" anchor="t" wrap="square">
+          <a:bodyPr lIns="182880" tIns="182880" rIns="182880" bIns="182880" anchor="t" wrap="square">
             <a:normAutofit/>
           </a:bodyPr>
           <a:lstStyle/>
-          <a:p/>
-        </p:txBody>
-      </p:sp>
-      <p:sp>
-        <p:nvSpPr>
-          <p:cNvPr id="1028" name="callout-title" descr=""/>
+          <a:p>
+            <a:pPr algn="l"/>
+            <a:r>
+              <a:rPr lang="en-US" sz="2200" b="1" dirty="0">
+                <a:solidFill>
+                  <a:srgbClr val="D00000"/>
+                </a:solidFill>
+              </a:rPr>
+              <a:t>Organize</a:t>
+            </a:r>
+          </a:p>
+          <a:p>
+            <a:pPr algn="l"/>
+            <a:r>
+              <a:rPr lang="en-US" sz="2000" b="0" dirty="0">
+                <a:solidFill>
+                  <a:srgbClr val="010B13"/>
+                </a:solidFill>
+              </a:rPr>
+              <a:t>Build separate walk-through and take-home collections.</a:t>
+            </a:r>
+          </a:p>
+        </p:txBody>
+      </p:sp>
+      <p:sp>
+        <p:nvSpPr>
+          <p:cNvPr id="1002" name="card-rail" descr=""/>
           <p:cNvSpPr/>
           <p:nvPr/>
         </p:nvSpPr>
         <p:spPr>
           <a:xfrm>
-            <a:off x="1097280" y="3090672"/>
-            <a:ext cx="9994392" cy="320040"/>
+            <a:off x="1097280" y="2633472"/>
+            <a:ext cx="54864" cy="1615440"/>
           </a:xfrm>
           <a:prstGeom prst="roundRect">
             <a:avLst>
-              <a:gd name="adj" fmla="val 6000"/>
+              <a:gd name="adj" fmla="val 20000"/>
             </a:avLst>
           </a:prstGeom>
           <a:solidFill>
-            <a:srgbClr val="009955"/>
+            <a:srgbClr val="D00000"/>
           </a:solidFill>
           <a:ln>
             <a:noFill/>
           </a:ln>
         </p:spPr>
         <p:txBody>
-          <a:bodyPr lIns="91440" tIns="68580" rIns="91440" bIns="68580" anchor="t" wrap="square">
+          <a:bodyPr lIns="182880" tIns="182880" rIns="182880" bIns="182880" anchor="t" wrap="square">
             <a:normAutofit/>
           </a:bodyPr>
           <a:lstStyle/>
-          <a:p>
-            <a:pPr algn="l"/>
-            <a:r>
-              <a:rPr lang="en-US" sz="1400" b="1" dirty="0">
-                <a:solidFill>
-                  <a:srgbClr val="FEFDFA"/>
-                </a:solidFill>
-              </a:rPr>
-              <a:t>EXAMPLE</a:t>
-            </a:r>
-          </a:p>
-        </p:txBody>
-      </p:sp>
-      <p:sp>
-        <p:nvSpPr>
-          <p:cNvPr id="1029" name="callout-body" descr=""/>
+          <a:p/>
+        </p:txBody>
+      </p:sp>
+      <p:sp>
+        <p:nvSpPr>
+          <p:cNvPr id="1003" name="card-steel" descr="card: Verify. Check the item type and each metadata field."/>
           <p:cNvSpPr/>
           <p:nvPr/>
         </p:nvSpPr>
         <p:spPr>
           <a:xfrm>
-            <a:off x="1097280" y="3410712"/>
-            <a:ext cx="9994392" cy="762000"/>
+            <a:off x="4477512" y="2633472"/>
+            <a:ext cx="3233928" cy="1615440"/>
           </a:xfrm>
           <a:prstGeom prst="roundRect">
             <a:avLst>
@@ -5190,171 +6353,155 @@
           <a:solidFill>
             <a:srgbClr val="FEFDFA"/>
           </a:solidFill>
-          <a:ln>
-            <a:noFill/>
+          <a:ln w="19050">
+            <a:solidFill>
+              <a:srgbClr val="CCCCCC"/>
+            </a:solidFill>
           </a:ln>
         </p:spPr>
         <p:txBody>
-          <a:bodyPr lIns="91440" tIns="68580" rIns="91440" bIns="68580" anchor="t" wrap="square">
+          <a:bodyPr lIns="182880" tIns="182880" rIns="182880" bIns="182880" anchor="t" wrap="square">
             <a:normAutofit/>
           </a:bodyPr>
           <a:lstStyle/>
           <a:p>
             <a:pPr algn="l"/>
             <a:r>
-              <a:rPr lang="en-US" sz="1200" b="0" dirty="0">
+              <a:rPr lang="en-US" sz="2200" b="1" dirty="0">
                 <a:solidFill>
                   <a:srgbClr val="010B13"/>
                 </a:solidFill>
               </a:rPr>
-              <a:t>Rachlinski, J. J., Guthrie, C., &amp; Wistrich, A. J. (2011). Probable Cause, Probability, and Hindsight. Journal of Empirical Legal Studies, 72(51), 157–180. https://doi-org.libproxy.unl.edu/10.1111/j.1740-1461.2011.01230.x</a:t>
-            </a:r>
-          </a:p>
-        </p:txBody>
-      </p:sp>
-    </p:spTree>
-  </p:cSld>
-</p:sld>
-</file>
-
-<file path=ppt/slides/slide24.xml><?xml version="1.0" encoding="utf-8"?>
-<p:sld xmlns:a="http://schemas.openxmlformats.org/drawingml/2006/main" xmlns:r="http://schemas.openxmlformats.org/officeDocument/2006/relationships" xmlns:p="http://schemas.openxmlformats.org/presentationml/2006/main">
-  <p:cSld>
-    <p:spTree>
-      <p:nvGrpSpPr>
-        <p:cNvPr id="1" name=""/>
-        <p:cNvGrpSpPr/>
-        <p:nvPr/>
-      </p:nvGrpSpPr>
-      <p:grpSpPr>
-        <a:xfrm>
-          <a:off x="0" y="0"/>
-          <a:ext cx="0" cy="0"/>
-          <a:chOff x="0" y="0"/>
-          <a:chExt cx="0" cy="0"/>
-        </a:xfrm>
-      </p:grpSpPr>
-      <p:sp>
-        <p:nvSpPr>
-          <p:cNvPr id="2" name="Title 1"/>
-          <p:cNvSpPr>
-            <a:spLocks noGrp="1"/>
-          </p:cNvSpPr>
-          <p:nvPr>
-            <p:ph type="title"/>
-          </p:nvPr>
+              <a:t>Verify</a:t>
+            </a:r>
+          </a:p>
+          <a:p>
+            <a:pPr algn="l"/>
+            <a:r>
+              <a:rPr lang="en-US" sz="2000" b="0" dirty="0">
+                <a:solidFill>
+                  <a:srgbClr val="010B13"/>
+                </a:solidFill>
+              </a:rPr>
+              <a:t>Check the item type and each metadata field.</a:t>
+            </a:r>
+          </a:p>
+        </p:txBody>
+      </p:sp>
+      <p:sp>
+        <p:nvSpPr>
+          <p:cNvPr id="1004" name="card-rail" descr=""/>
+          <p:cNvSpPr/>
+          <p:nvPr/>
         </p:nvSpPr>
         <p:spPr>
           <a:xfrm>
-            <a:off x="1097280" y="964692"/>
-            <a:ext cx="9997440" cy="1188720"/>
-          </a:xfrm>
-        </p:spPr>
-        <p:txBody>
-          <a:bodyPr/>
-          <a:lstStyle/>
-          <a:p>
-            <a:pPr lvl="0" indent="0" marL="0">
-              <a:buNone/>
-            </a:pPr>
-            <a:r>
-              <a:rPr/>
-              <a:t>Search &amp; Use Key Terms</a:t>
-            </a:r>
-          </a:p>
-        </p:txBody>
-      </p:sp>
-    </p:spTree>
-  </p:cSld>
-</p:sld>
-</file>
-
-<file path=ppt/slides/slide25.xml><?xml version="1.0" encoding="utf-8"?>
-<p:sld xmlns:a="http://schemas.openxmlformats.org/drawingml/2006/main" xmlns:r="http://schemas.openxmlformats.org/officeDocument/2006/relationships" xmlns:p="http://schemas.openxmlformats.org/presentationml/2006/main">
-  <p:cSld>
-    <p:spTree>
-      <p:nvGrpSpPr>
-        <p:cNvPr id="1" name=""/>
-        <p:cNvGrpSpPr/>
-        <p:nvPr/>
-      </p:nvGrpSpPr>
-      <p:grpSpPr>
-        <a:xfrm>
-          <a:off x="0" y="0"/>
-          <a:ext cx="0" cy="0"/>
-          <a:chOff x="0" y="0"/>
-          <a:chExt cx="0" cy="0"/>
-        </a:xfrm>
-      </p:grpSpPr>
-      <p:sp>
-        <p:nvSpPr>
-          <p:cNvPr id="2" name="Title 1"/>
-          <p:cNvSpPr>
-            <a:spLocks noGrp="1"/>
-          </p:cNvSpPr>
-          <p:nvPr>
-            <p:ph type="title"/>
-          </p:nvPr>
+            <a:off x="4477512" y="2633472"/>
+            <a:ext cx="54864" cy="1615440"/>
+          </a:xfrm>
+          <a:prstGeom prst="roundRect">
+            <a:avLst>
+              <a:gd name="adj" fmla="val 20000"/>
+            </a:avLst>
+          </a:prstGeom>
+          <a:solidFill>
+            <a:srgbClr val="010B13"/>
+          </a:solidFill>
+          <a:ln>
+            <a:noFill/>
+          </a:ln>
+        </p:spPr>
+        <p:txBody>
+          <a:bodyPr lIns="182880" tIns="182880" rIns="182880" bIns="182880" anchor="t" wrap="square">
+            <a:normAutofit/>
+          </a:bodyPr>
+          <a:lstStyle/>
+          <a:p/>
+        </p:txBody>
+      </p:sp>
+      <p:sp>
+        <p:nvSpPr>
+          <p:cNvPr id="1005" name="card-steel" descr="card: Export. Create an APA 7 reference list and a collection report."/>
+          <p:cNvSpPr/>
+          <p:nvPr/>
         </p:nvSpPr>
         <p:spPr>
           <a:xfrm>
-            <a:off x="1097280" y="964692"/>
-            <a:ext cx="9997440" cy="1188720"/>
-          </a:xfrm>
-        </p:spPr>
-        <p:txBody>
-          <a:bodyPr/>
-          <a:lstStyle/>
-          <a:p>
-            <a:pPr lvl="0" indent="0" marL="0">
-              <a:buNone/>
-            </a:pPr>
-            <a:r>
-              <a:rPr/>
-              <a:t>Assignments &amp; Reminders</a:t>
-            </a:r>
-          </a:p>
-        </p:txBody>
-      </p:sp>
-      <p:sp>
-        <p:nvSpPr>
-          <p:cNvPr id="3" name="Content Placeholder 2"/>
-          <p:cNvSpPr>
-            <a:spLocks noGrp="1"/>
-          </p:cNvSpPr>
-          <p:nvPr>
-            <p:ph idx="1"/>
-          </p:nvPr>
-        </p:nvSpPr>
-        <p:spPr/>
-        <p:txBody>
-          <a:bodyPr/>
-          <a:lstStyle/>
-          <a:p>
-            <a:pPr lvl="0" indent="0" marL="0">
-              <a:buNone/>
-            </a:pPr>
-            <a:r>
-              <a:rPr b="1"/>
-              <a:t>Given this week:</a:t>
-            </a:r>
-          </a:p>
-          <a:p>
-            <a:pPr lvl="0"/>
-            <a:r>
-              <a:rPr/>
-              <a:t>Finish and submit your Lab 01 to your lab section’s Canvas link before week 2</a:t>
-            </a:r>
-          </a:p>
-          <a:p>
-            <a:pPr lvl="0" indent="0" marL="0">
-              <a:buNone/>
-            </a:pPr>
-            <a:r>
-              <a:rPr/>
-              <a:t>Submit to your lab section in Canvas by 11:59pm the day before your lab meets.</a:t>
-            </a:r>
-          </a:p>
+            <a:off x="7857744" y="2633472"/>
+            <a:ext cx="3233928" cy="1615440"/>
+          </a:xfrm>
+          <a:prstGeom prst="roundRect">
+            <a:avLst>
+              <a:gd name="adj" fmla="val 6000"/>
+            </a:avLst>
+          </a:prstGeom>
+          <a:solidFill>
+            <a:srgbClr val="FEFDFA"/>
+          </a:solidFill>
+          <a:ln w="19050">
+            <a:solidFill>
+              <a:srgbClr val="CCCCCC"/>
+            </a:solidFill>
+          </a:ln>
+        </p:spPr>
+        <p:txBody>
+          <a:bodyPr lIns="182880" tIns="182880" rIns="182880" bIns="182880" anchor="t" wrap="square">
+            <a:normAutofit/>
+          </a:bodyPr>
+          <a:lstStyle/>
+          <a:p>
+            <a:pPr algn="l"/>
+            <a:r>
+              <a:rPr lang="en-US" sz="2200" b="1" dirty="0">
+                <a:solidFill>
+                  <a:srgbClr val="010B13"/>
+                </a:solidFill>
+              </a:rPr>
+              <a:t>Export</a:t>
+            </a:r>
+          </a:p>
+          <a:p>
+            <a:pPr algn="l"/>
+            <a:r>
+              <a:rPr lang="en-US" sz="2000" b="0" dirty="0">
+                <a:solidFill>
+                  <a:srgbClr val="010B13"/>
+                </a:solidFill>
+              </a:rPr>
+              <a:t>Create an APA 7 reference list and a collection report.</a:t>
+            </a:r>
+          </a:p>
+        </p:txBody>
+      </p:sp>
+      <p:sp>
+        <p:nvSpPr>
+          <p:cNvPr id="1006" name="card-rail" descr=""/>
+          <p:cNvSpPr/>
+          <p:nvPr/>
+        </p:nvSpPr>
+        <p:spPr>
+          <a:xfrm>
+            <a:off x="7857744" y="2633472"/>
+            <a:ext cx="54864" cy="1615440"/>
+          </a:xfrm>
+          <a:prstGeom prst="roundRect">
+            <a:avLst>
+              <a:gd name="adj" fmla="val 20000"/>
+            </a:avLst>
+          </a:prstGeom>
+          <a:solidFill>
+            <a:srgbClr val="010B13"/>
+          </a:solidFill>
+          <a:ln>
+            <a:noFill/>
+          </a:ln>
+        </p:spPr>
+        <p:txBody>
+          <a:bodyPr lIns="182880" tIns="182880" rIns="182880" bIns="182880" anchor="t" wrap="square">
+            <a:normAutofit/>
+          </a:bodyPr>
+          <a:lstStyle/>
+          <a:p/>
         </p:txBody>
       </p:sp>
     </p:spTree>
@@ -5404,57 +6551,378 @@
             </a:pPr>
             <a:r>
               <a:rPr/>
-              <a:t>What You Need Today</a:t>
-            </a:r>
-          </a:p>
-        </p:txBody>
-      </p:sp>
-      <p:sp>
-        <p:nvSpPr>
-          <p:cNvPr id="3" name="Content Placeholder 2"/>
-          <p:cNvSpPr>
-            <a:spLocks noGrp="1"/>
-          </p:cNvSpPr>
-          <p:nvPr>
-            <p:ph idx="1"/>
-          </p:nvPr>
-        </p:nvSpPr>
-        <p:spPr/>
-        <p:txBody>
-          <a:bodyPr/>
-          <a:lstStyle/>
-          <a:p>
-            <a:pPr lvl="0" indent="0" marL="0">
-              <a:buNone/>
-            </a:pPr>
-            <a:r>
-              <a:rPr/>
-              <a:t>Everything for this week is linked on the next slides – and always on the lab page under </a:t>
-            </a:r>
-            <a:r>
-              <a:rPr b="1"/>
-              <a:t>Handouts &amp; References</a:t>
-            </a:r>
-            <a:r>
-              <a:rPr/>
-              <a:t>.</a:t>
-            </a:r>
-          </a:p>
-          <a:p>
-            <a:pPr lvl="0" indent="0" marL="0">
-              <a:buNone/>
-            </a:pPr>
-            <a:r>
-              <a:rPr/>
-              <a:t>Open these </a:t>
-            </a:r>
-            <a:r>
-              <a:rPr b="1"/>
-              <a:t>before we start</a:t>
-            </a:r>
-            <a:r>
-              <a:rPr/>
-              <a:t> so you can follow along.</a:t>
+              <a:t>2 Open Zotero and the Lab 1 worksheet before you begin</a:t>
+            </a:r>
+          </a:p>
+        </p:txBody>
+      </p:sp>
+      <p:sp>
+        <p:nvSpPr>
+          <p:cNvPr id="1007" name="card-red" descr="card: Zotero app. Open the desktop app. Official download."/>
+          <p:cNvSpPr/>
+          <p:nvPr/>
+        </p:nvSpPr>
+        <p:spPr>
+          <a:xfrm>
+            <a:off x="1097280" y="2633472"/>
+            <a:ext cx="3233928" cy="1210131"/>
+          </a:xfrm>
+          <a:prstGeom prst="roundRect">
+            <a:avLst>
+              <a:gd name="adj" fmla="val 6000"/>
+            </a:avLst>
+          </a:prstGeom>
+          <a:solidFill>
+            <a:srgbClr val="FEFDFA"/>
+          </a:solidFill>
+          <a:ln w="19050">
+            <a:solidFill>
+              <a:srgbClr val="CCCCCC"/>
+            </a:solidFill>
+          </a:ln>
+        </p:spPr>
+        <p:txBody>
+          <a:bodyPr lIns="182880" tIns="182880" rIns="182880" bIns="182880" anchor="t" wrap="square">
+            <a:normAutofit/>
+          </a:bodyPr>
+          <a:lstStyle/>
+          <a:p>
+            <a:pPr algn="l"/>
+            <a:r>
+              <a:rPr lang="en-US" sz="1965" b="1" dirty="0">
+                <a:solidFill>
+                  <a:srgbClr val="D00000"/>
+                </a:solidFill>
+              </a:rPr>
+              <a:t>Zotero app</a:t>
+            </a:r>
+          </a:p>
+          <a:p>
+            <a:pPr algn="l"/>
+            <a:r>
+              <a:rPr lang="en-US" sz="1787" b="0" dirty="0">
+                <a:solidFill>
+                  <a:srgbClr val="010B13"/>
+                </a:solidFill>
+                <a:hlinkClick r:id="rId3"/>
+              </a:rPr>
+              <a:t>Open the desktop app. Official download.</a:t>
+            </a:r>
+          </a:p>
+        </p:txBody>
+      </p:sp>
+      <p:sp>
+        <p:nvSpPr>
+          <p:cNvPr id="1008" name="card-rail" descr=""/>
+          <p:cNvSpPr/>
+          <p:nvPr/>
+        </p:nvSpPr>
+        <p:spPr>
+          <a:xfrm>
+            <a:off x="1097280" y="2633472"/>
+            <a:ext cx="54864" cy="1210131"/>
+          </a:xfrm>
+          <a:prstGeom prst="roundRect">
+            <a:avLst>
+              <a:gd name="adj" fmla="val 20000"/>
+            </a:avLst>
+          </a:prstGeom>
+          <a:solidFill>
+            <a:srgbClr val="D00000"/>
+          </a:solidFill>
+          <a:ln>
+            <a:noFill/>
+          </a:ln>
+        </p:spPr>
+        <p:txBody>
+          <a:bodyPr lIns="182880" tIns="182880" rIns="182880" bIns="182880" anchor="t" wrap="square">
+            <a:normAutofit/>
+          </a:bodyPr>
+          <a:lstStyle/>
+          <a:p/>
+        </p:txBody>
+      </p:sp>
+      <p:sp>
+        <p:nvSpPr>
+          <p:cNvPr id="1009" name="card-steel" descr="card: Lab 1 worksheet. Open the document you will submit."/>
+          <p:cNvSpPr/>
+          <p:nvPr/>
+        </p:nvSpPr>
+        <p:spPr>
+          <a:xfrm>
+            <a:off x="4477512" y="2633472"/>
+            <a:ext cx="3233928" cy="1210131"/>
+          </a:xfrm>
+          <a:prstGeom prst="roundRect">
+            <a:avLst>
+              <a:gd name="adj" fmla="val 6000"/>
+            </a:avLst>
+          </a:prstGeom>
+          <a:solidFill>
+            <a:srgbClr val="FEFDFA"/>
+          </a:solidFill>
+          <a:ln w="19050">
+            <a:solidFill>
+              <a:srgbClr val="CCCCCC"/>
+            </a:solidFill>
+          </a:ln>
+        </p:spPr>
+        <p:txBody>
+          <a:bodyPr lIns="182880" tIns="182880" rIns="182880" bIns="182880" anchor="t" wrap="square">
+            <a:normAutofit/>
+          </a:bodyPr>
+          <a:lstStyle/>
+          <a:p>
+            <a:pPr algn="l"/>
+            <a:r>
+              <a:rPr lang="en-US" sz="1965" b="1" dirty="0">
+                <a:solidFill>
+                  <a:srgbClr val="010B13"/>
+                </a:solidFill>
+              </a:rPr>
+              <a:t>Lab 1 worksheet</a:t>
+            </a:r>
+          </a:p>
+          <a:p>
+            <a:pPr algn="l"/>
+            <a:r>
+              <a:rPr lang="en-US" sz="1787" b="0" dirty="0">
+                <a:solidFill>
+                  <a:srgbClr val="010B13"/>
+                </a:solidFill>
+              </a:rPr>
+              <a:t>Open the document you will submit.</a:t>
+            </a:r>
+          </a:p>
+        </p:txBody>
+      </p:sp>
+      <p:sp>
+        <p:nvSpPr>
+          <p:cNvPr id="1010" name="card-rail" descr=""/>
+          <p:cNvSpPr/>
+          <p:nvPr/>
+        </p:nvSpPr>
+        <p:spPr>
+          <a:xfrm>
+            <a:off x="4477512" y="2633472"/>
+            <a:ext cx="54864" cy="1210131"/>
+          </a:xfrm>
+          <a:prstGeom prst="roundRect">
+            <a:avLst>
+              <a:gd name="adj" fmla="val 20000"/>
+            </a:avLst>
+          </a:prstGeom>
+          <a:solidFill>
+            <a:srgbClr val="010B13"/>
+          </a:solidFill>
+          <a:ln>
+            <a:noFill/>
+          </a:ln>
+        </p:spPr>
+        <p:txBody>
+          <a:bodyPr lIns="182880" tIns="182880" rIns="182880" bIns="182880" anchor="t" wrap="square">
+            <a:normAutofit/>
+          </a:bodyPr>
+          <a:lstStyle/>
+          <a:p/>
+        </p:txBody>
+      </p:sp>
+      <p:sp>
+        <p:nvSpPr>
+          <p:cNvPr id="1011" name="card-steel" descr="card: Online workbook. Keep the online workbook open."/>
+          <p:cNvSpPr/>
+          <p:nvPr/>
+        </p:nvSpPr>
+        <p:spPr>
+          <a:xfrm>
+            <a:off x="7857744" y="2633472"/>
+            <a:ext cx="3233928" cy="1210131"/>
+          </a:xfrm>
+          <a:prstGeom prst="roundRect">
+            <a:avLst>
+              <a:gd name="adj" fmla="val 6000"/>
+            </a:avLst>
+          </a:prstGeom>
+          <a:solidFill>
+            <a:srgbClr val="FEFDFA"/>
+          </a:solidFill>
+          <a:ln w="19050">
+            <a:solidFill>
+              <a:srgbClr val="CCCCCC"/>
+            </a:solidFill>
+          </a:ln>
+        </p:spPr>
+        <p:txBody>
+          <a:bodyPr lIns="182880" tIns="182880" rIns="182880" bIns="182880" anchor="t" wrap="square">
+            <a:normAutofit/>
+          </a:bodyPr>
+          <a:lstStyle/>
+          <a:p>
+            <a:pPr algn="l"/>
+            <a:r>
+              <a:rPr lang="en-US" sz="1965" b="1" dirty="0">
+                <a:solidFill>
+                  <a:srgbClr val="010B13"/>
+                </a:solidFill>
+              </a:rPr>
+              <a:t>Online workbook</a:t>
+            </a:r>
+          </a:p>
+          <a:p>
+            <a:pPr algn="l"/>
+            <a:r>
+              <a:rPr lang="en-US" sz="1787" b="0" dirty="0">
+                <a:solidFill>
+                  <a:srgbClr val="010B13"/>
+                </a:solidFill>
+              </a:rPr>
+              <a:t>Keep the online workbook open.</a:t>
+            </a:r>
+          </a:p>
+        </p:txBody>
+      </p:sp>
+      <p:sp>
+        <p:nvSpPr>
+          <p:cNvPr id="1012" name="card-rail" descr=""/>
+          <p:cNvSpPr/>
+          <p:nvPr/>
+        </p:nvSpPr>
+        <p:spPr>
+          <a:xfrm>
+            <a:off x="7857744" y="2633472"/>
+            <a:ext cx="54864" cy="1210131"/>
+          </a:xfrm>
+          <a:prstGeom prst="roundRect">
+            <a:avLst>
+              <a:gd name="adj" fmla="val 20000"/>
+            </a:avLst>
+          </a:prstGeom>
+          <a:solidFill>
+            <a:srgbClr val="010B13"/>
+          </a:solidFill>
+          <a:ln>
+            <a:noFill/>
+          </a:ln>
+        </p:spPr>
+        <p:txBody>
+          <a:bodyPr lIns="182880" tIns="182880" rIns="182880" bIns="182880" anchor="t" wrap="square">
+            <a:normAutofit/>
+          </a:bodyPr>
+          <a:lstStyle/>
+          <a:p/>
+        </p:txBody>
+      </p:sp>
+      <p:sp>
+        <p:nvSpPr>
+          <p:cNvPr id="1013" name="callout-note" descr="note callout: Note. The screenshots are illustrative; controls may appear in a different location in Zotero 9 or the Zotero 10 beta."/>
+          <p:cNvSpPr/>
+          <p:nvPr/>
+        </p:nvSpPr>
+        <p:spPr>
+          <a:xfrm>
+            <a:off x="1097280" y="3989907"/>
+            <a:ext cx="9994392" cy="1591459"/>
+          </a:xfrm>
+          <a:prstGeom prst="roundRect">
+            <a:avLst>
+              <a:gd name="adj" fmla="val 6000"/>
+            </a:avLst>
+          </a:prstGeom>
+          <a:solidFill>
+            <a:srgbClr val="FEFDFA"/>
+          </a:solidFill>
+          <a:ln w="19050">
+            <a:solidFill>
+              <a:srgbClr val="0066CC"/>
+            </a:solidFill>
+          </a:ln>
+        </p:spPr>
+        <p:txBody>
+          <a:bodyPr lIns="182880" tIns="182880" rIns="182880" bIns="182880" anchor="t" wrap="square">
+            <a:normAutofit/>
+          </a:bodyPr>
+          <a:lstStyle/>
+          <a:p/>
+        </p:txBody>
+      </p:sp>
+      <p:sp>
+        <p:nvSpPr>
+          <p:cNvPr id="1014" name="callout-title" descr=""/>
+          <p:cNvSpPr/>
+          <p:nvPr/>
+        </p:nvSpPr>
+        <p:spPr>
+          <a:xfrm>
+            <a:off x="1097280" y="3989907"/>
+            <a:ext cx="9994392" cy="381328"/>
+          </a:xfrm>
+          <a:prstGeom prst="roundRect">
+            <a:avLst>
+              <a:gd name="adj" fmla="val 6000"/>
+            </a:avLst>
+          </a:prstGeom>
+          <a:solidFill>
+            <a:srgbClr val="0066CC"/>
+          </a:solidFill>
+          <a:ln>
+            <a:noFill/>
+          </a:ln>
+        </p:spPr>
+        <p:txBody>
+          <a:bodyPr lIns="182880" tIns="0" rIns="182880" bIns="0" anchor="ctr" wrap="square">
+            <a:normAutofit/>
+          </a:bodyPr>
+          <a:lstStyle/>
+          <a:p>
+            <a:pPr algn="l"/>
+            <a:r>
+              <a:rPr lang="en-US" sz="1965" b="1" dirty="0">
+                <a:solidFill>
+                  <a:srgbClr val="FEFDFA"/>
+                </a:solidFill>
+              </a:rPr>
+              <a:t>Note</a:t>
+            </a:r>
+          </a:p>
+        </p:txBody>
+      </p:sp>
+      <p:sp>
+        <p:nvSpPr>
+          <p:cNvPr id="1015" name="callout-body" descr=""/>
+          <p:cNvSpPr/>
+          <p:nvPr/>
+        </p:nvSpPr>
+        <p:spPr>
+          <a:xfrm>
+            <a:off x="1097280" y="4371235"/>
+            <a:ext cx="9994392" cy="1210131"/>
+          </a:xfrm>
+          <a:prstGeom prst="roundRect">
+            <a:avLst>
+              <a:gd name="adj" fmla="val 6000"/>
+            </a:avLst>
+          </a:prstGeom>
+          <a:solidFill>
+            <a:srgbClr val="FEFDFA"/>
+          </a:solidFill>
+          <a:ln>
+            <a:noFill/>
+          </a:ln>
+        </p:spPr>
+        <p:txBody>
+          <a:bodyPr lIns="182880" tIns="182880" rIns="182880" bIns="182880" anchor="t" wrap="square">
+            <a:normAutofit/>
+          </a:bodyPr>
+          <a:lstStyle/>
+          <a:p>
+            <a:pPr algn="l"/>
+            <a:r>
+              <a:rPr lang="en-US" sz="1787" b="0" dirty="0">
+                <a:solidFill>
+                  <a:srgbClr val="010B13"/>
+                </a:solidFill>
+              </a:rPr>
+              <a:t>The screenshots are illustrative; controls may appear in a different location in Zotero 9 or the Zotero 10 beta.</a:t>
             </a:r>
           </a:p>
         </p:txBody>
@@ -5506,105 +6974,109 @@
             </a:pPr>
             <a:r>
               <a:rPr/>
-              <a:t>Introduction to Psyc350 &amp; why we do it this way!!</a:t>
-            </a:r>
-          </a:p>
-        </p:txBody>
-      </p:sp>
-      <p:sp>
-        <p:nvSpPr>
-          <p:cNvPr id="1002" name="card-blue" descr="card: [arrow icon]. Introduction to Psyc 350 Lab [Web page]"/>
-          <p:cNvSpPr/>
+              <a:t>3 Zotero keeps collections, items, and metadata in three connected panels</a:t>
+            </a:r>
+          </a:p>
+        </p:txBody>
+      </p:sp>
+      <p:pic>
+        <p:nvPicPr>
+          <p:cNvPr descr="Annotated Zotero window showing collections in the left panel, items in the middle panel, and metadata in the right panel" id="0" name="Picture 1"/>
+          <p:cNvPicPr>
+            <a:picLocks noGrp="1" noChangeAspect="1"/>
+          </p:cNvPicPr>
           <p:nvPr/>
-        </p:nvSpPr>
-        <p:spPr>
-          <a:xfrm>
-            <a:off x="1097280" y="2633472"/>
-            <a:ext cx="3270504" cy="762000"/>
-          </a:xfrm>
-          <a:prstGeom prst="roundRect">
-            <a:avLst>
-              <a:gd name="adj" fmla="val 6000"/>
-            </a:avLst>
+        </p:nvPicPr>
+        <p:blipFill>
+          <a:blip r:embed="rId3"/>
+          <a:stretch>
+            <a:fillRect/>
+          </a:stretch>
+        </p:blipFill>
+        <p:spPr bwMode="auto">
+          <a:xfrm>
+            <a:off x="1092200" y="2844800"/>
+            <a:ext cx="4902200" cy="2654300"/>
+          </a:xfrm>
+          <a:prstGeom prst="rect">
+            <a:avLst/>
           </a:prstGeom>
-          <a:solidFill>
-            <a:srgbClr val="FEFDFA"/>
-          </a:solidFill>
-          <a:ln w="19050">
-            <a:solidFill>
-              <a:srgbClr val="CCCCCC"/>
-            </a:solidFill>
+          <a:noFill/>
+          <a:ln w="9525">
+            <a:noFill/>
+            <a:headEnd/>
+            <a:tailEnd/>
           </a:ln>
         </p:spPr>
-        <p:txBody>
-          <a:bodyPr lIns="91440" tIns="68580" rIns="91440" bIns="68580" anchor="t" wrap="square">
-            <a:normAutofit/>
-          </a:bodyPr>
-          <a:lstStyle/>
-          <a:p>
-            <a:pPr algn="l"/>
-            <a:r>
-              <a:rPr lang="en-US" sz="1400" b="1" dirty="0">
-                <a:solidFill>
-                  <a:srgbClr val="005D84"/>
-                </a:solidFill>
-              </a:rPr>
-              <a:t>[arrow icon]</a:t>
-            </a:r>
-          </a:p>
-          <a:p>
-            <a:pPr algn="l"/>
-            <a:r>
-              <a:rPr lang="en-US" sz="1200" b="0" dirty="0">
-                <a:solidFill>
-                  <a:srgbClr val="010B13"/>
-                </a:solidFill>
-              </a:rPr>
-              <a:t>Introduction to Psyc 350 Lab</a:t>
-            </a:r>
-          </a:p>
-          <a:p>
-            <a:pPr algn="l"/>
-            <a:r>
-              <a:rPr lang="en-US" sz="1200" b="0" dirty="0">
-                <a:solidFill>
-                  <a:srgbClr val="010B13"/>
-                </a:solidFill>
-              </a:rPr>
-              <a:t>[Web page]</a:t>
-            </a:r>
-          </a:p>
-        </p:txBody>
-      </p:sp>
-      <p:sp>
-        <p:nvSpPr>
-          <p:cNvPr id="1003" name="card-rail" descr=""/>
-          <p:cNvSpPr/>
-          <p:nvPr/>
-        </p:nvSpPr>
-        <p:spPr>
-          <a:xfrm>
-            <a:off x="1097280" y="2633472"/>
-            <a:ext cx="54864" cy="762000"/>
-          </a:xfrm>
-          <a:prstGeom prst="roundRect">
-            <a:avLst>
-              <a:gd name="adj" fmla="val 20000"/>
-            </a:avLst>
-          </a:prstGeom>
-          <a:solidFill>
-            <a:srgbClr val="005D84"/>
-          </a:solidFill>
-          <a:ln>
-            <a:noFill/>
-          </a:ln>
-        </p:spPr>
-        <p:txBody>
-          <a:bodyPr lIns="91440" tIns="68580" rIns="91440" bIns="68580" anchor="t" wrap="square">
-            <a:normAutofit/>
-          </a:bodyPr>
-          <a:lstStyle/>
-          <a:p/>
+      </p:pic>
+      <p:sp>
+        <p:nvSpPr>
+          <p:cNvPr id="4" name="Content Placeholder 3"/>
+          <p:cNvSpPr>
+            <a:spLocks noGrp="1"/>
+          </p:cNvSpPr>
+          <p:nvPr>
+            <p:ph idx="2" sz="half"/>
+          </p:nvPr>
+        </p:nvSpPr>
+        <p:spPr/>
+        <p:txBody>
+          <a:bodyPr/>
+          <a:lstStyle/>
+          <a:p>
+            <a:pPr lvl="0" indent="0" marL="0">
+              <a:buNone/>
+            </a:pPr>
+            <a:r>
+              <a:rPr b="1"/>
+              <a:t>Collections</a:t>
+            </a:r>
+          </a:p>
+          <a:p>
+            <a:pPr lvl="0" indent="0" marL="0">
+              <a:buNone/>
+            </a:pPr>
+            <a:r>
+              <a:rPr/>
+              <a:t>Organize sources for this lab.</a:t>
+            </a:r>
+          </a:p>
+          <a:p>
+            <a:pPr lvl="0" indent="0" marL="0">
+              <a:buNone/>
+            </a:pPr>
+            <a:r>
+              <a:rPr b="1"/>
+              <a:t>Items</a:t>
+            </a:r>
+          </a:p>
+          <a:p>
+            <a:pPr lvl="0" indent="0" marL="0">
+              <a:buNone/>
+            </a:pPr>
+            <a:r>
+              <a:rPr/>
+              <a:t>Link a parent item to its PDF.</a:t>
+            </a:r>
+          </a:p>
+          <a:p>
+            <a:pPr lvl="0" indent="0" marL="0">
+              <a:buNone/>
+            </a:pPr>
+            <a:r>
+              <a:rPr b="1"/>
+              <a:t>Metadata</a:t>
+            </a:r>
+          </a:p>
+          <a:p>
+            <a:pPr lvl="0" indent="0" marL="0">
+              <a:buNone/>
+            </a:pPr>
+            <a:r>
+              <a:rPr/>
+              <a:t>Provide the fields used in an APA reference.</a:t>
+            </a:r>
+          </a:p>
         </p:txBody>
       </p:sp>
     </p:spTree>
@@ -5654,563 +7126,129 @@
             </a:pPr>
             <a:r>
               <a:rPr/>
-              <a:t>Bibliographic Research &amp; Zotero (1/2)</a:t>
-            </a:r>
-          </a:p>
-        </p:txBody>
-      </p:sp>
-      <p:sp>
-        <p:nvSpPr>
-          <p:cNvPr id="1004" name="card-blue" descr="card: [arrow icon]. Library Resources Link (start here) [External link]"/>
-          <p:cNvSpPr/>
+              <a:t>4 Create </a:t>
+            </a:r>
+            <a:r>
+              <a:rPr>
+                <a:latin typeface="Courier"/>
+              </a:rPr>
+              <a:t>[Your Name] APA Walk-Through</a:t>
+            </a:r>
+            <a:r>
+              <a:rPr/>
+              <a:t> before adding sources</a:t>
+            </a:r>
+          </a:p>
+        </p:txBody>
+      </p:sp>
+      <p:pic>
+        <p:nvPicPr>
+          <p:cNvPr descr="Zotero New Collection dialog with an arrow showing where to create and name a collection" id="0" name="Picture 1"/>
+          <p:cNvPicPr>
+            <a:picLocks noGrp="1" noChangeAspect="1"/>
+          </p:cNvPicPr>
           <p:nvPr/>
-        </p:nvSpPr>
-        <p:spPr>
-          <a:xfrm>
-            <a:off x="1097280" y="2633472"/>
-            <a:ext cx="3270504" cy="762000"/>
-          </a:xfrm>
-          <a:prstGeom prst="roundRect">
-            <a:avLst>
-              <a:gd name="adj" fmla="val 6000"/>
-            </a:avLst>
+        </p:nvPicPr>
+        <p:blipFill>
+          <a:blip r:embed="rId3"/>
+          <a:stretch>
+            <a:fillRect/>
+          </a:stretch>
+        </p:blipFill>
+        <p:spPr bwMode="auto">
+          <a:xfrm>
+            <a:off x="1879600" y="2628900"/>
+            <a:ext cx="3314700" cy="3098800"/>
+          </a:xfrm>
+          <a:prstGeom prst="rect">
+            <a:avLst/>
           </a:prstGeom>
-          <a:solidFill>
-            <a:srgbClr val="FEFDFA"/>
-          </a:solidFill>
-          <a:ln w="19050">
-            <a:solidFill>
-              <a:srgbClr val="CCCCCC"/>
-            </a:solidFill>
+          <a:noFill/>
+          <a:ln w="9525">
+            <a:noFill/>
+            <a:headEnd/>
+            <a:tailEnd/>
           </a:ln>
         </p:spPr>
-        <p:txBody>
-          <a:bodyPr lIns="91440" tIns="68580" rIns="91440" bIns="68580" anchor="t" wrap="square">
-            <a:normAutofit/>
-          </a:bodyPr>
-          <a:lstStyle/>
-          <a:p>
-            <a:pPr algn="l"/>
-            <a:r>
-              <a:rPr lang="en-US" sz="1400" b="1" dirty="0">
-                <a:solidFill>
-                  <a:srgbClr val="005D84"/>
-                </a:solidFill>
-              </a:rPr>
-              <a:t>[arrow icon]</a:t>
-            </a:r>
-          </a:p>
-          <a:p>
-            <a:pPr algn="l"/>
-            <a:r>
-              <a:rPr lang="en-US" sz="1200" b="0" dirty="0">
-                <a:solidFill>
-                  <a:srgbClr val="010B13"/>
-                </a:solidFill>
-              </a:rPr>
-              <a:t>Library Resources Link (start here)</a:t>
-            </a:r>
-          </a:p>
-          <a:p>
-            <a:pPr algn="l"/>
-            <a:r>
-              <a:rPr lang="en-US" sz="1200" b="0" dirty="0">
-                <a:solidFill>
-                  <a:srgbClr val="010B13"/>
-                </a:solidFill>
-              </a:rPr>
-              <a:t>[External link]</a:t>
-            </a:r>
-          </a:p>
-        </p:txBody>
-      </p:sp>
-      <p:sp>
-        <p:nvSpPr>
-          <p:cNvPr id="1005" name="card-rail" descr=""/>
-          <p:cNvSpPr/>
-          <p:nvPr/>
-        </p:nvSpPr>
-        <p:spPr>
-          <a:xfrm>
-            <a:off x="1097280" y="2633472"/>
-            <a:ext cx="54864" cy="762000"/>
-          </a:xfrm>
-          <a:prstGeom prst="roundRect">
-            <a:avLst>
-              <a:gd name="adj" fmla="val 20000"/>
-            </a:avLst>
-          </a:prstGeom>
-          <a:solidFill>
-            <a:srgbClr val="005D84"/>
-          </a:solidFill>
-          <a:ln>
-            <a:noFill/>
-          </a:ln>
-        </p:spPr>
-        <p:txBody>
-          <a:bodyPr lIns="91440" tIns="68580" rIns="91440" bIns="68580" anchor="t" wrap="square">
-            <a:normAutofit/>
-          </a:bodyPr>
-          <a:lstStyle/>
-          <a:p/>
-        </p:txBody>
-      </p:sp>
-      <p:sp>
-        <p:nvSpPr>
-          <p:cNvPr id="1006" name="card-blue" descr="card: [book icon]. Powerpoint to guide you through library resources"/>
-          <p:cNvSpPr/>
-          <p:nvPr/>
-        </p:nvSpPr>
-        <p:spPr>
-          <a:xfrm>
-            <a:off x="4459224" y="2633472"/>
-            <a:ext cx="3270504" cy="762000"/>
-          </a:xfrm>
-          <a:prstGeom prst="roundRect">
-            <a:avLst>
-              <a:gd name="adj" fmla="val 6000"/>
-            </a:avLst>
-          </a:prstGeom>
-          <a:solidFill>
-            <a:srgbClr val="FEFDFA"/>
-          </a:solidFill>
-          <a:ln w="19050">
-            <a:solidFill>
-              <a:srgbClr val="CCCCCC"/>
-            </a:solidFill>
-          </a:ln>
-        </p:spPr>
-        <p:txBody>
-          <a:bodyPr lIns="91440" tIns="68580" rIns="91440" bIns="68580" anchor="t" wrap="square">
-            <a:normAutofit/>
-          </a:bodyPr>
-          <a:lstStyle/>
-          <a:p>
-            <a:pPr algn="l"/>
-            <a:r>
-              <a:rPr lang="en-US" sz="1400" b="1" dirty="0">
-                <a:solidFill>
-                  <a:srgbClr val="005D84"/>
-                </a:solidFill>
-              </a:rPr>
-              <a:t>[book icon]</a:t>
-            </a:r>
-          </a:p>
-          <a:p>
-            <a:pPr algn="l"/>
-            <a:r>
-              <a:rPr lang="en-US" sz="1200" b="0" dirty="0">
-                <a:solidFill>
-                  <a:srgbClr val="010B13"/>
-                </a:solidFill>
-              </a:rPr>
-              <a:t>Powerpoint to guide you through library resources</a:t>
-            </a:r>
-          </a:p>
-        </p:txBody>
-      </p:sp>
-      <p:sp>
-        <p:nvSpPr>
-          <p:cNvPr id="1007" name="card-rail" descr=""/>
-          <p:cNvSpPr/>
-          <p:nvPr/>
-        </p:nvSpPr>
-        <p:spPr>
-          <a:xfrm>
-            <a:off x="4459224" y="2633472"/>
-            <a:ext cx="54864" cy="762000"/>
-          </a:xfrm>
-          <a:prstGeom prst="roundRect">
-            <a:avLst>
-              <a:gd name="adj" fmla="val 20000"/>
-            </a:avLst>
-          </a:prstGeom>
-          <a:solidFill>
-            <a:srgbClr val="005D84"/>
-          </a:solidFill>
-          <a:ln>
-            <a:noFill/>
-          </a:ln>
-        </p:spPr>
-        <p:txBody>
-          <a:bodyPr lIns="91440" tIns="68580" rIns="91440" bIns="68580" anchor="t" wrap="square">
-            <a:normAutofit/>
-          </a:bodyPr>
-          <a:lstStyle/>
-          <a:p/>
-        </p:txBody>
-      </p:sp>
-      <p:sp>
-        <p:nvSpPr>
-          <p:cNvPr id="1008" name="card-blue" descr="card: [arrow icon]. Boolean Searching (link to how-to guide online) [External link]"/>
-          <p:cNvSpPr/>
-          <p:nvPr/>
-        </p:nvSpPr>
-        <p:spPr>
-          <a:xfrm>
-            <a:off x="7821168" y="2633472"/>
-            <a:ext cx="3270504" cy="944880"/>
-          </a:xfrm>
-          <a:prstGeom prst="roundRect">
-            <a:avLst>
-              <a:gd name="adj" fmla="val 6000"/>
-            </a:avLst>
-          </a:prstGeom>
-          <a:solidFill>
-            <a:srgbClr val="FEFDFA"/>
-          </a:solidFill>
-          <a:ln w="19050">
-            <a:solidFill>
-              <a:srgbClr val="CCCCCC"/>
-            </a:solidFill>
-          </a:ln>
-        </p:spPr>
-        <p:txBody>
-          <a:bodyPr lIns="91440" tIns="68580" rIns="91440" bIns="68580" anchor="t" wrap="square">
-            <a:normAutofit/>
-          </a:bodyPr>
-          <a:lstStyle/>
-          <a:p>
-            <a:pPr algn="l"/>
-            <a:r>
-              <a:rPr lang="en-US" sz="1400" b="1" dirty="0">
-                <a:solidFill>
-                  <a:srgbClr val="005D84"/>
-                </a:solidFill>
-              </a:rPr>
-              <a:t>[arrow icon]</a:t>
-            </a:r>
-          </a:p>
-          <a:p>
-            <a:pPr algn="l"/>
-            <a:r>
-              <a:rPr lang="en-US" sz="1200" b="0" dirty="0">
-                <a:solidFill>
-                  <a:srgbClr val="010B13"/>
-                </a:solidFill>
-              </a:rPr>
-              <a:t>Boolean Searching (link to how-to guide online)</a:t>
-            </a:r>
-          </a:p>
-          <a:p>
-            <a:pPr algn="l"/>
-            <a:r>
-              <a:rPr lang="en-US" sz="1200" b="0" dirty="0">
-                <a:solidFill>
-                  <a:srgbClr val="010B13"/>
-                </a:solidFill>
-              </a:rPr>
-              <a:t>[External link]</a:t>
-            </a:r>
-          </a:p>
-        </p:txBody>
-      </p:sp>
-      <p:sp>
-        <p:nvSpPr>
-          <p:cNvPr id="1009" name="card-rail" descr=""/>
-          <p:cNvSpPr/>
-          <p:nvPr/>
-        </p:nvSpPr>
-        <p:spPr>
-          <a:xfrm>
-            <a:off x="7821168" y="2633472"/>
-            <a:ext cx="54864" cy="944880"/>
-          </a:xfrm>
-          <a:prstGeom prst="roundRect">
-            <a:avLst>
-              <a:gd name="adj" fmla="val 20000"/>
-            </a:avLst>
-          </a:prstGeom>
-          <a:solidFill>
-            <a:srgbClr val="005D84"/>
-          </a:solidFill>
-          <a:ln>
-            <a:noFill/>
-          </a:ln>
-        </p:spPr>
-        <p:txBody>
-          <a:bodyPr lIns="91440" tIns="68580" rIns="91440" bIns="68580" anchor="t" wrap="square">
-            <a:normAutofit/>
-          </a:bodyPr>
-          <a:lstStyle/>
-          <a:p/>
-        </p:txBody>
-      </p:sp>
-      <p:sp>
-        <p:nvSpPr>
-          <p:cNvPr id="1010" name="card-blue" descr="card: [book icon]. APA Format and Style + Using Zotero"/>
-          <p:cNvSpPr/>
-          <p:nvPr/>
-        </p:nvSpPr>
-        <p:spPr>
-          <a:xfrm>
-            <a:off x="1097280" y="3669792"/>
-            <a:ext cx="3270504" cy="579120"/>
-          </a:xfrm>
-          <a:prstGeom prst="roundRect">
-            <a:avLst>
-              <a:gd name="adj" fmla="val 6000"/>
-            </a:avLst>
-          </a:prstGeom>
-          <a:solidFill>
-            <a:srgbClr val="FEFDFA"/>
-          </a:solidFill>
-          <a:ln w="19050">
-            <a:solidFill>
-              <a:srgbClr val="CCCCCC"/>
-            </a:solidFill>
-          </a:ln>
-        </p:spPr>
-        <p:txBody>
-          <a:bodyPr lIns="91440" tIns="68580" rIns="91440" bIns="68580" anchor="t" wrap="square">
-            <a:normAutofit/>
-          </a:bodyPr>
-          <a:lstStyle/>
-          <a:p>
-            <a:pPr algn="l"/>
-            <a:r>
-              <a:rPr lang="en-US" sz="1400" b="1" dirty="0">
-                <a:solidFill>
-                  <a:srgbClr val="005D84"/>
-                </a:solidFill>
-              </a:rPr>
-              <a:t>[book icon]</a:t>
-            </a:r>
-          </a:p>
-          <a:p>
-            <a:pPr algn="l"/>
-            <a:r>
-              <a:rPr lang="en-US" sz="1200" b="0" dirty="0">
-                <a:solidFill>
-                  <a:srgbClr val="010B13"/>
-                </a:solidFill>
-              </a:rPr>
-              <a:t>APA Format and Style + Using Zotero</a:t>
-            </a:r>
-          </a:p>
-        </p:txBody>
-      </p:sp>
-      <p:sp>
-        <p:nvSpPr>
-          <p:cNvPr id="1011" name="card-rail" descr=""/>
-          <p:cNvSpPr/>
-          <p:nvPr/>
-        </p:nvSpPr>
-        <p:spPr>
-          <a:xfrm>
-            <a:off x="1097280" y="3669792"/>
-            <a:ext cx="54864" cy="579120"/>
-          </a:xfrm>
-          <a:prstGeom prst="roundRect">
-            <a:avLst>
-              <a:gd name="adj" fmla="val 20000"/>
-            </a:avLst>
-          </a:prstGeom>
-          <a:solidFill>
-            <a:srgbClr val="005D84"/>
-          </a:solidFill>
-          <a:ln>
-            <a:noFill/>
-          </a:ln>
-        </p:spPr>
-        <p:txBody>
-          <a:bodyPr lIns="91440" tIns="68580" rIns="91440" bIns="68580" anchor="t" wrap="square">
-            <a:normAutofit/>
-          </a:bodyPr>
-          <a:lstStyle/>
-          <a:p/>
-        </p:txBody>
-      </p:sp>
-      <p:sp>
-        <p:nvSpPr>
-          <p:cNvPr id="1012" name="card-red" descr="card: [note icon]. Using Zotero [PDF]"/>
-          <p:cNvSpPr/>
-          <p:nvPr/>
-        </p:nvSpPr>
-        <p:spPr>
-          <a:xfrm>
-            <a:off x="4459224" y="3669792"/>
-            <a:ext cx="3270504" cy="762000"/>
-          </a:xfrm>
-          <a:prstGeom prst="roundRect">
-            <a:avLst>
-              <a:gd name="adj" fmla="val 6000"/>
-            </a:avLst>
-          </a:prstGeom>
-          <a:solidFill>
-            <a:srgbClr val="FEFDFA"/>
-          </a:solidFill>
-          <a:ln w="19050">
-            <a:solidFill>
-              <a:srgbClr val="CCCCCC"/>
-            </a:solidFill>
-          </a:ln>
-        </p:spPr>
-        <p:txBody>
-          <a:bodyPr lIns="91440" tIns="68580" rIns="91440" bIns="68580" anchor="t" wrap="square">
-            <a:normAutofit/>
-          </a:bodyPr>
-          <a:lstStyle/>
-          <a:p>
-            <a:pPr algn="l"/>
-            <a:r>
-              <a:rPr lang="en-US" sz="1400" b="1" dirty="0">
-                <a:solidFill>
-                  <a:srgbClr val="D00000"/>
-                </a:solidFill>
-              </a:rPr>
-              <a:t>[note icon]</a:t>
-            </a:r>
-          </a:p>
-          <a:p>
-            <a:pPr algn="l"/>
-            <a:r>
-              <a:rPr lang="en-US" sz="1200" b="0" dirty="0">
-                <a:solidFill>
-                  <a:srgbClr val="010B13"/>
-                </a:solidFill>
-              </a:rPr>
-              <a:t>Using Zotero</a:t>
-            </a:r>
-          </a:p>
-          <a:p>
-            <a:pPr algn="l"/>
-            <a:r>
-              <a:rPr lang="en-US" sz="1200" b="0" dirty="0">
-                <a:solidFill>
-                  <a:srgbClr val="010B13"/>
-                </a:solidFill>
-              </a:rPr>
-              <a:t>[PDF]</a:t>
-            </a:r>
-          </a:p>
-        </p:txBody>
-      </p:sp>
-      <p:sp>
-        <p:nvSpPr>
-          <p:cNvPr id="1013" name="card-rail" descr=""/>
-          <p:cNvSpPr/>
-          <p:nvPr/>
-        </p:nvSpPr>
-        <p:spPr>
-          <a:xfrm>
-            <a:off x="4459224" y="3669792"/>
-            <a:ext cx="54864" cy="762000"/>
-          </a:xfrm>
-          <a:prstGeom prst="roundRect">
-            <a:avLst>
-              <a:gd name="adj" fmla="val 20000"/>
-            </a:avLst>
-          </a:prstGeom>
-          <a:solidFill>
-            <a:srgbClr val="D00000"/>
-          </a:solidFill>
-          <a:ln>
-            <a:noFill/>
-          </a:ln>
-        </p:spPr>
-        <p:txBody>
-          <a:bodyPr lIns="91440" tIns="68580" rIns="91440" bIns="68580" anchor="t" wrap="square">
-            <a:normAutofit/>
-          </a:bodyPr>
-          <a:lstStyle/>
-          <a:p/>
-        </p:txBody>
-      </p:sp>
-      <p:sp>
-        <p:nvSpPr>
-          <p:cNvPr id="1014" name="card-red" descr="card: [note icon]. Journal Reference Checklist [PDF]"/>
-          <p:cNvSpPr/>
-          <p:nvPr/>
-        </p:nvSpPr>
-        <p:spPr>
-          <a:xfrm>
-            <a:off x="7821168" y="3669792"/>
-            <a:ext cx="3270504" cy="762000"/>
-          </a:xfrm>
-          <a:prstGeom prst="roundRect">
-            <a:avLst>
-              <a:gd name="adj" fmla="val 6000"/>
-            </a:avLst>
-          </a:prstGeom>
-          <a:solidFill>
-            <a:srgbClr val="FEFDFA"/>
-          </a:solidFill>
-          <a:ln w="19050">
-            <a:solidFill>
-              <a:srgbClr val="CCCCCC"/>
-            </a:solidFill>
-          </a:ln>
-        </p:spPr>
-        <p:txBody>
-          <a:bodyPr lIns="91440" tIns="68580" rIns="91440" bIns="68580" anchor="t" wrap="square">
-            <a:normAutofit/>
-          </a:bodyPr>
-          <a:lstStyle/>
-          <a:p>
-            <a:pPr algn="l"/>
-            <a:r>
-              <a:rPr lang="en-US" sz="1400" b="1" dirty="0">
-                <a:solidFill>
-                  <a:srgbClr val="D00000"/>
-                </a:solidFill>
-              </a:rPr>
-              <a:t>[note icon]</a:t>
-            </a:r>
-          </a:p>
-          <a:p>
-            <a:pPr algn="l"/>
-            <a:r>
-              <a:rPr lang="en-US" sz="1200" b="0" dirty="0">
-                <a:solidFill>
-                  <a:srgbClr val="010B13"/>
-                </a:solidFill>
-              </a:rPr>
-              <a:t>Journal Reference Checklist</a:t>
-            </a:r>
-          </a:p>
-          <a:p>
-            <a:pPr algn="l"/>
-            <a:r>
-              <a:rPr lang="en-US" sz="1200" b="0" dirty="0">
-                <a:solidFill>
-                  <a:srgbClr val="010B13"/>
-                </a:solidFill>
-              </a:rPr>
-              <a:t>[PDF]</a:t>
-            </a:r>
-          </a:p>
-        </p:txBody>
-      </p:sp>
-      <p:sp>
-        <p:nvSpPr>
-          <p:cNvPr id="1015" name="card-rail" descr=""/>
-          <p:cNvSpPr/>
-          <p:nvPr/>
-        </p:nvSpPr>
-        <p:spPr>
-          <a:xfrm>
-            <a:off x="7821168" y="3669792"/>
-            <a:ext cx="54864" cy="762000"/>
-          </a:xfrm>
-          <a:prstGeom prst="roundRect">
-            <a:avLst>
-              <a:gd name="adj" fmla="val 20000"/>
-            </a:avLst>
-          </a:prstGeom>
-          <a:solidFill>
-            <a:srgbClr val="D00000"/>
-          </a:solidFill>
-          <a:ln>
-            <a:noFill/>
-          </a:ln>
-        </p:spPr>
-        <p:txBody>
-          <a:bodyPr lIns="91440" tIns="68580" rIns="91440" bIns="68580" anchor="t" wrap="square">
-            <a:normAutofit/>
-          </a:bodyPr>
-          <a:lstStyle/>
-          <a:p/>
+      </p:pic>
+      <p:sp>
+        <p:nvSpPr>
+          <p:cNvPr id="4" name="Content Placeholder 3"/>
+          <p:cNvSpPr>
+            <a:spLocks noGrp="1"/>
+          </p:cNvSpPr>
+          <p:nvPr>
+            <p:ph idx="2" sz="half"/>
+          </p:nvPr>
+        </p:nvSpPr>
+        <p:spPr/>
+        <p:txBody>
+          <a:bodyPr/>
+          <a:lstStyle/>
+          <a:p>
+            <a:pPr lvl="0" indent="0" marL="0">
+              <a:buNone/>
+            </a:pPr>
+            <a:r>
+              <a:rPr/>
+              <a:t>[Workbook step 1]</a:t>
+            </a:r>
+          </a:p>
+          <a:p>
+            <a:pPr lvl="0" indent="0" marL="0">
+              <a:buNone/>
+            </a:pPr>
+            <a:r>
+              <a:rPr b="1"/>
+              <a:t>1.</a:t>
+            </a:r>
+            <a:r>
+              <a:rPr/>
+              <a:t> Choose </a:t>
+            </a:r>
+            <a:r>
+              <a:rPr b="1"/>
+              <a:t>New Collection</a:t>
+            </a:r>
+            <a:r>
+              <a:rPr/>
+              <a:t>.</a:t>
+            </a:r>
+          </a:p>
+          <a:p>
+            <a:pPr lvl="0" indent="0" marL="0">
+              <a:buNone/>
+            </a:pPr>
+            <a:r>
+              <a:rPr b="1"/>
+              <a:t>2.</a:t>
+            </a:r>
+            <a:r>
+              <a:rPr/>
+              <a:t> Enter the exact collection name.</a:t>
+            </a:r>
+          </a:p>
+          <a:p>
+            <a:pPr lvl="0" indent="0" marL="0">
+              <a:buNone/>
+            </a:pPr>
+            <a:r>
+              <a:rPr b="1"/>
+              <a:t>3.</a:t>
+            </a:r>
+            <a:r>
+              <a:rPr/>
+              <a:t> Confirm it appears under </a:t>
+            </a:r>
+            <a:r>
+              <a:rPr b="1"/>
+              <a:t>My Library</a:t>
+            </a:r>
+            <a:r>
+              <a:rPr/>
+              <a:t>.</a:t>
+            </a:r>
+          </a:p>
         </p:txBody>
       </p:sp>
     </p:spTree>
@@ -6260,286 +7298,107 @@
             </a:pPr>
             <a:r>
               <a:rPr/>
-              <a:t>Bibliographic Research &amp; Zotero (2/2)</a:t>
-            </a:r>
-          </a:p>
-        </p:txBody>
-      </p:sp>
-      <p:sp>
-        <p:nvSpPr>
-          <p:cNvPr id="1016" name="card-red" descr="card: [note icon]. Student Paper Format [PDF]"/>
-          <p:cNvSpPr/>
+              <a:t>5 Add the first article PDF to your collection</a:t>
+            </a:r>
+          </a:p>
+        </p:txBody>
+      </p:sp>
+      <p:pic>
+        <p:nvPicPr>
+          <p:cNvPr descr="Diagram showing a PDF file being dragged into a Zotero collection" id="0" name="Picture 1"/>
+          <p:cNvPicPr>
+            <a:picLocks noGrp="1" noChangeAspect="1"/>
+          </p:cNvPicPr>
           <p:nvPr/>
-        </p:nvSpPr>
-        <p:spPr>
-          <a:xfrm>
-            <a:off x="1097280" y="2633472"/>
-            <a:ext cx="3270504" cy="762000"/>
-          </a:xfrm>
-          <a:prstGeom prst="roundRect">
-            <a:avLst>
-              <a:gd name="adj" fmla="val 6000"/>
-            </a:avLst>
+        </p:nvPicPr>
+        <p:blipFill>
+          <a:blip r:embed="rId3"/>
+          <a:stretch>
+            <a:fillRect/>
+          </a:stretch>
+        </p:blipFill>
+        <p:spPr bwMode="auto">
+          <a:xfrm>
+            <a:off x="1993900" y="2628900"/>
+            <a:ext cx="3098800" cy="3098800"/>
+          </a:xfrm>
+          <a:prstGeom prst="rect">
+            <a:avLst/>
           </a:prstGeom>
-          <a:solidFill>
-            <a:srgbClr val="FEFDFA"/>
-          </a:solidFill>
-          <a:ln w="19050">
-            <a:solidFill>
-              <a:srgbClr val="CCCCCC"/>
-            </a:solidFill>
+          <a:noFill/>
+          <a:ln w="9525">
+            <a:noFill/>
+            <a:headEnd/>
+            <a:tailEnd/>
           </a:ln>
         </p:spPr>
-        <p:txBody>
-          <a:bodyPr lIns="91440" tIns="68580" rIns="91440" bIns="68580" anchor="t" wrap="square">
-            <a:normAutofit/>
-          </a:bodyPr>
-          <a:lstStyle/>
-          <a:p>
-            <a:pPr algn="l"/>
-            <a:r>
-              <a:rPr lang="en-US" sz="1400" b="1" dirty="0">
-                <a:solidFill>
-                  <a:srgbClr val="D00000"/>
-                </a:solidFill>
-              </a:rPr>
-              <a:t>[note icon]</a:t>
-            </a:r>
-          </a:p>
-          <a:p>
-            <a:pPr algn="l"/>
-            <a:r>
-              <a:rPr lang="en-US" sz="1200" b="0" dirty="0">
-                <a:solidFill>
-                  <a:srgbClr val="010B13"/>
-                </a:solidFill>
-              </a:rPr>
-              <a:t>Student Paper Format</a:t>
-            </a:r>
-          </a:p>
-          <a:p>
-            <a:pPr algn="l"/>
-            <a:r>
-              <a:rPr lang="en-US" sz="1200" b="0" dirty="0">
-                <a:solidFill>
-                  <a:srgbClr val="010B13"/>
-                </a:solidFill>
-              </a:rPr>
-              <a:t>[PDF]</a:t>
-            </a:r>
-          </a:p>
-        </p:txBody>
-      </p:sp>
-      <p:sp>
-        <p:nvSpPr>
-          <p:cNvPr id="1017" name="card-rail" descr=""/>
-          <p:cNvSpPr/>
-          <p:nvPr/>
-        </p:nvSpPr>
-        <p:spPr>
-          <a:xfrm>
-            <a:off x="1097280" y="2633472"/>
-            <a:ext cx="54864" cy="762000"/>
-          </a:xfrm>
-          <a:prstGeom prst="roundRect">
-            <a:avLst>
-              <a:gd name="adj" fmla="val 20000"/>
-            </a:avLst>
-          </a:prstGeom>
-          <a:solidFill>
-            <a:srgbClr val="D00000"/>
-          </a:solidFill>
-          <a:ln>
-            <a:noFill/>
-          </a:ln>
-        </p:spPr>
-        <p:txBody>
-          <a:bodyPr lIns="91440" tIns="68580" rIns="91440" bIns="68580" anchor="t" wrap="square">
-            <a:normAutofit/>
-          </a:bodyPr>
-          <a:lstStyle/>
-          <a:p/>
-        </p:txBody>
-      </p:sp>
-      <p:sp>
-        <p:nvSpPr>
-          <p:cNvPr id="1018" name="card-red" descr="card: [note icon]. Research Report Format [PDF]"/>
-          <p:cNvSpPr/>
-          <p:nvPr/>
-        </p:nvSpPr>
-        <p:spPr>
-          <a:xfrm>
-            <a:off x="4459224" y="2633472"/>
-            <a:ext cx="3270504" cy="762000"/>
-          </a:xfrm>
-          <a:prstGeom prst="roundRect">
-            <a:avLst>
-              <a:gd name="adj" fmla="val 6000"/>
-            </a:avLst>
-          </a:prstGeom>
-          <a:solidFill>
-            <a:srgbClr val="FEFDFA"/>
-          </a:solidFill>
-          <a:ln w="19050">
-            <a:solidFill>
-              <a:srgbClr val="CCCCCC"/>
-            </a:solidFill>
-          </a:ln>
-        </p:spPr>
-        <p:txBody>
-          <a:bodyPr lIns="91440" tIns="68580" rIns="91440" bIns="68580" anchor="t" wrap="square">
-            <a:normAutofit/>
-          </a:bodyPr>
-          <a:lstStyle/>
-          <a:p>
-            <a:pPr algn="l"/>
-            <a:r>
-              <a:rPr lang="en-US" sz="1400" b="1" dirty="0">
-                <a:solidFill>
-                  <a:srgbClr val="D00000"/>
-                </a:solidFill>
-              </a:rPr>
-              <a:t>[note icon]</a:t>
-            </a:r>
-          </a:p>
-          <a:p>
-            <a:pPr algn="l"/>
-            <a:r>
-              <a:rPr lang="en-US" sz="1200" b="0" dirty="0">
-                <a:solidFill>
-                  <a:srgbClr val="010B13"/>
-                </a:solidFill>
-              </a:rPr>
-              <a:t>Research Report Format</a:t>
-            </a:r>
-          </a:p>
-          <a:p>
-            <a:pPr algn="l"/>
-            <a:r>
-              <a:rPr lang="en-US" sz="1200" b="0" dirty="0">
-                <a:solidFill>
-                  <a:srgbClr val="010B13"/>
-                </a:solidFill>
-              </a:rPr>
-              <a:t>[PDF]</a:t>
-            </a:r>
-          </a:p>
-        </p:txBody>
-      </p:sp>
-      <p:sp>
-        <p:nvSpPr>
-          <p:cNvPr id="1019" name="card-rail" descr=""/>
-          <p:cNvSpPr/>
-          <p:nvPr/>
-        </p:nvSpPr>
-        <p:spPr>
-          <a:xfrm>
-            <a:off x="4459224" y="2633472"/>
-            <a:ext cx="54864" cy="762000"/>
-          </a:xfrm>
-          <a:prstGeom prst="roundRect">
-            <a:avLst>
-              <a:gd name="adj" fmla="val 20000"/>
-            </a:avLst>
-          </a:prstGeom>
-          <a:solidFill>
-            <a:srgbClr val="D00000"/>
-          </a:solidFill>
-          <a:ln>
-            <a:noFill/>
-          </a:ln>
-        </p:spPr>
-        <p:txBody>
-          <a:bodyPr lIns="91440" tIns="68580" rIns="91440" bIns="68580" anchor="t" wrap="square">
-            <a:normAutofit/>
-          </a:bodyPr>
-          <a:lstStyle/>
-          <a:p/>
-        </p:txBody>
-      </p:sp>
-      <p:sp>
-        <p:nvSpPr>
-          <p:cNvPr id="1020" name="card-red" descr="card: [note icon]. Other Sources Reference Format"/>
-          <p:cNvSpPr/>
-          <p:nvPr/>
-        </p:nvSpPr>
-        <p:spPr>
-          <a:xfrm>
-            <a:off x="7821168" y="2633472"/>
-            <a:ext cx="3270504" cy="579120"/>
-          </a:xfrm>
-          <a:prstGeom prst="roundRect">
-            <a:avLst>
-              <a:gd name="adj" fmla="val 6000"/>
-            </a:avLst>
-          </a:prstGeom>
-          <a:solidFill>
-            <a:srgbClr val="FEFDFA"/>
-          </a:solidFill>
-          <a:ln w="19050">
-            <a:solidFill>
-              <a:srgbClr val="CCCCCC"/>
-            </a:solidFill>
-          </a:ln>
-        </p:spPr>
-        <p:txBody>
-          <a:bodyPr lIns="91440" tIns="68580" rIns="91440" bIns="68580" anchor="t" wrap="square">
-            <a:normAutofit/>
-          </a:bodyPr>
-          <a:lstStyle/>
-          <a:p>
-            <a:pPr algn="l"/>
-            <a:r>
-              <a:rPr lang="en-US" sz="1400" b="1" dirty="0">
-                <a:solidFill>
-                  <a:srgbClr val="D00000"/>
-                </a:solidFill>
-              </a:rPr>
-              <a:t>[note icon]</a:t>
-            </a:r>
-          </a:p>
-          <a:p>
-            <a:pPr algn="l"/>
-            <a:r>
-              <a:rPr lang="en-US" sz="1200" b="0" dirty="0">
-                <a:solidFill>
-                  <a:srgbClr val="010B13"/>
-                </a:solidFill>
-              </a:rPr>
-              <a:t>Other Sources Reference Format</a:t>
-            </a:r>
-          </a:p>
-        </p:txBody>
-      </p:sp>
-      <p:sp>
-        <p:nvSpPr>
-          <p:cNvPr id="1021" name="card-rail" descr=""/>
-          <p:cNvSpPr/>
-          <p:nvPr/>
-        </p:nvSpPr>
-        <p:spPr>
-          <a:xfrm>
-            <a:off x="7821168" y="2633472"/>
-            <a:ext cx="54864" cy="579120"/>
-          </a:xfrm>
-          <a:prstGeom prst="roundRect">
-            <a:avLst>
-              <a:gd name="adj" fmla="val 20000"/>
-            </a:avLst>
-          </a:prstGeom>
-          <a:solidFill>
-            <a:srgbClr val="D00000"/>
-          </a:solidFill>
-          <a:ln>
-            <a:noFill/>
-          </a:ln>
-        </p:spPr>
-        <p:txBody>
-          <a:bodyPr lIns="91440" tIns="68580" rIns="91440" bIns="68580" anchor="t" wrap="square">
-            <a:normAutofit/>
-          </a:bodyPr>
-          <a:lstStyle/>
-          <a:p/>
+      </p:pic>
+      <p:sp>
+        <p:nvSpPr>
+          <p:cNvPr id="4" name="Content Placeholder 3"/>
+          <p:cNvSpPr>
+            <a:spLocks noGrp="1"/>
+          </p:cNvSpPr>
+          <p:nvPr>
+            <p:ph idx="2" sz="half"/>
+          </p:nvPr>
+        </p:nvSpPr>
+        <p:spPr/>
+        <p:txBody>
+          <a:bodyPr/>
+          <a:lstStyle/>
+          <a:p>
+            <a:pPr lvl="0" indent="0" marL="0">
+              <a:buNone/>
+            </a:pPr>
+            <a:r>
+              <a:rPr/>
+              <a:t>[Workbook step 2]</a:t>
+            </a:r>
+          </a:p>
+          <a:p>
+            <a:pPr lvl="0" indent="-457200" marL="457200">
+              <a:buAutoNum type="arabicPeriod"/>
+            </a:pPr>
+            <a:r>
+              <a:rPr/>
+              <a:t>Find </a:t>
+            </a:r>
+            <a:r>
+              <a:rPr b="1"/>
+              <a:t>ChatGPT is bullshit</a:t>
+            </a:r>
+            <a:r>
+              <a:rPr/>
+              <a:t>.</a:t>
+            </a:r>
+          </a:p>
+          <a:p>
+            <a:pPr lvl="0" indent="-457200" marL="457200">
+              <a:buAutoNum type="arabicPeriod"/>
+            </a:pPr>
+            <a:r>
+              <a:rPr/>
+              <a:t>Download its PDF.</a:t>
+            </a:r>
+          </a:p>
+          <a:p>
+            <a:pPr lvl="0" indent="-457200" marL="457200">
+              <a:buAutoNum type="arabicPeriod"/>
+            </a:pPr>
+            <a:r>
+              <a:rPr/>
+              <a:t>Drag it into the named collection—not only </a:t>
+            </a:r>
+            <a:r>
+              <a:rPr b="1"/>
+              <a:t>My Library</a:t>
+            </a:r>
+            <a:r>
+              <a:rPr/>
+              <a:t>.</a:t>
+            </a:r>
+          </a:p>
         </p:txBody>
       </p:sp>
     </p:spTree>
@@ -6589,201 +7448,91 @@
             </a:pPr>
             <a:r>
               <a:rPr/>
-              <a:t>Weekly Lab Assignment</a:t>
-            </a:r>
-          </a:p>
-        </p:txBody>
-      </p:sp>
-      <p:sp>
-        <p:nvSpPr>
-          <p:cNvPr id="1022" name="card-blue" descr="card: [book icon]. Lab 01: APA References Zotero Worksheet [Word document]"/>
-          <p:cNvSpPr/>
+              <a:t>6 The parent item—not the PDF—stores citation metadata</a:t>
+            </a:r>
+          </a:p>
+        </p:txBody>
+      </p:sp>
+      <p:pic>
+        <p:nvPicPr>
+          <p:cNvPr descr="Annotated Zotero item list distinguishing a parent item from its child PDF and pointing to the parent metadata" id="0" name="Picture 1"/>
+          <p:cNvPicPr>
+            <a:picLocks noGrp="1" noChangeAspect="1"/>
+          </p:cNvPicPr>
           <p:nvPr/>
-        </p:nvSpPr>
-        <p:spPr>
-          <a:xfrm>
-            <a:off x="1097280" y="2633472"/>
-            <a:ext cx="3270504" cy="944880"/>
-          </a:xfrm>
-          <a:prstGeom prst="roundRect">
-            <a:avLst>
-              <a:gd name="adj" fmla="val 6000"/>
-            </a:avLst>
+        </p:nvPicPr>
+        <p:blipFill>
+          <a:blip r:embed="rId3"/>
+          <a:stretch>
+            <a:fillRect/>
+          </a:stretch>
+        </p:blipFill>
+        <p:spPr bwMode="auto">
+          <a:xfrm>
+            <a:off x="1511300" y="2628900"/>
+            <a:ext cx="4076700" cy="3098800"/>
+          </a:xfrm>
+          <a:prstGeom prst="rect">
+            <a:avLst/>
           </a:prstGeom>
-          <a:solidFill>
-            <a:srgbClr val="FEFDFA"/>
-          </a:solidFill>
-          <a:ln w="19050">
-            <a:solidFill>
-              <a:srgbClr val="CCCCCC"/>
-            </a:solidFill>
+          <a:noFill/>
+          <a:ln w="9525">
+            <a:noFill/>
+            <a:headEnd/>
+            <a:tailEnd/>
           </a:ln>
         </p:spPr>
-        <p:txBody>
-          <a:bodyPr lIns="91440" tIns="68580" rIns="91440" bIns="68580" anchor="t" wrap="square">
-            <a:normAutofit/>
-          </a:bodyPr>
-          <a:lstStyle/>
-          <a:p>
-            <a:pPr algn="l"/>
-            <a:r>
-              <a:rPr lang="en-US" sz="1400" b="1" dirty="0">
-                <a:solidFill>
-                  <a:srgbClr val="005D84"/>
-                </a:solidFill>
-              </a:rPr>
-              <a:t>[book icon]</a:t>
-            </a:r>
-          </a:p>
-          <a:p>
-            <a:pPr algn="l"/>
-            <a:r>
-              <a:rPr lang="en-US" sz="1200" b="0" dirty="0">
-                <a:solidFill>
-                  <a:srgbClr val="010B13"/>
-                </a:solidFill>
-              </a:rPr>
-              <a:t>Lab 01: APA References Zotero Worksheet</a:t>
-            </a:r>
-          </a:p>
-          <a:p>
-            <a:pPr algn="l"/>
-            <a:r>
-              <a:rPr lang="en-US" sz="1200" b="0" dirty="0">
-                <a:solidFill>
-                  <a:srgbClr val="010B13"/>
-                </a:solidFill>
-              </a:rPr>
-              <a:t>[Word document]</a:t>
-            </a:r>
-          </a:p>
-        </p:txBody>
-      </p:sp>
-      <p:sp>
-        <p:nvSpPr>
-          <p:cNvPr id="1023" name="card-rail" descr=""/>
-          <p:cNvSpPr/>
-          <p:nvPr/>
-        </p:nvSpPr>
-        <p:spPr>
-          <a:xfrm>
-            <a:off x="1097280" y="2633472"/>
-            <a:ext cx="54864" cy="944880"/>
-          </a:xfrm>
-          <a:prstGeom prst="roundRect">
-            <a:avLst>
-              <a:gd name="adj" fmla="val 20000"/>
-            </a:avLst>
-          </a:prstGeom>
-          <a:solidFill>
-            <a:srgbClr val="005D84"/>
-          </a:solidFill>
-          <a:ln>
-            <a:noFill/>
-          </a:ln>
-        </p:spPr>
-        <p:txBody>
-          <a:bodyPr lIns="91440" tIns="68580" rIns="91440" bIns="68580" anchor="t" wrap="square">
-            <a:normAutofit/>
-          </a:bodyPr>
-          <a:lstStyle/>
-          <a:p/>
-        </p:txBody>
-      </p:sp>
-      <p:sp>
-        <p:nvSpPr>
-          <p:cNvPr id="1024" name="card-blue" descr="card: [arrow icon]. Click for Zotero &amp; APA Workbook [Web page]"/>
-          <p:cNvSpPr/>
-          <p:nvPr/>
-        </p:nvSpPr>
-        <p:spPr>
-          <a:xfrm>
-            <a:off x="4459224" y="2633472"/>
-            <a:ext cx="3270504" cy="762000"/>
-          </a:xfrm>
-          <a:prstGeom prst="roundRect">
-            <a:avLst>
-              <a:gd name="adj" fmla="val 6000"/>
-            </a:avLst>
-          </a:prstGeom>
-          <a:solidFill>
-            <a:srgbClr val="FEFDFA"/>
-          </a:solidFill>
-          <a:ln w="19050">
-            <a:solidFill>
-              <a:srgbClr val="CCCCCC"/>
-            </a:solidFill>
-          </a:ln>
-        </p:spPr>
-        <p:txBody>
-          <a:bodyPr lIns="91440" tIns="68580" rIns="91440" bIns="68580" anchor="t" wrap="square">
-            <a:normAutofit/>
-          </a:bodyPr>
-          <a:lstStyle/>
-          <a:p>
-            <a:pPr algn="l"/>
-            <a:r>
-              <a:rPr lang="en-US" sz="1400" b="1" dirty="0">
-                <a:solidFill>
-                  <a:srgbClr val="005D84"/>
-                </a:solidFill>
-              </a:rPr>
-              <a:t>[arrow icon]</a:t>
-            </a:r>
-          </a:p>
-          <a:p>
-            <a:pPr algn="l"/>
-            <a:r>
-              <a:rPr lang="en-US" sz="1200" b="0" dirty="0">
-                <a:solidFill>
-                  <a:srgbClr val="010B13"/>
-                </a:solidFill>
-              </a:rPr>
-              <a:t>Click for Zotero &amp; APA Workbook</a:t>
-            </a:r>
-          </a:p>
-          <a:p>
-            <a:pPr algn="l"/>
-            <a:r>
-              <a:rPr lang="en-US" sz="1200" b="0" dirty="0">
-                <a:solidFill>
-                  <a:srgbClr val="010B13"/>
-                </a:solidFill>
-              </a:rPr>
-              <a:t>[Web page]</a:t>
-            </a:r>
-          </a:p>
-        </p:txBody>
-      </p:sp>
-      <p:sp>
-        <p:nvSpPr>
-          <p:cNvPr id="1025" name="card-rail" descr=""/>
-          <p:cNvSpPr/>
-          <p:nvPr/>
-        </p:nvSpPr>
-        <p:spPr>
-          <a:xfrm>
-            <a:off x="4459224" y="2633472"/>
-            <a:ext cx="54864" cy="762000"/>
-          </a:xfrm>
-          <a:prstGeom prst="roundRect">
-            <a:avLst>
-              <a:gd name="adj" fmla="val 20000"/>
-            </a:avLst>
-          </a:prstGeom>
-          <a:solidFill>
-            <a:srgbClr val="005D84"/>
-          </a:solidFill>
-          <a:ln>
-            <a:noFill/>
-          </a:ln>
-        </p:spPr>
-        <p:txBody>
-          <a:bodyPr lIns="91440" tIns="68580" rIns="91440" bIns="68580" anchor="t" wrap="square">
-            <a:normAutofit/>
-          </a:bodyPr>
-          <a:lstStyle/>
-          <a:p/>
+      </p:pic>
+      <p:sp>
+        <p:nvSpPr>
+          <p:cNvPr id="4" name="Content Placeholder 3"/>
+          <p:cNvSpPr>
+            <a:spLocks noGrp="1"/>
+          </p:cNvSpPr>
+          <p:nvPr>
+            <p:ph idx="2" sz="half"/>
+          </p:nvPr>
+        </p:nvSpPr>
+        <p:spPr/>
+        <p:txBody>
+          <a:bodyPr/>
+          <a:lstStyle/>
+          <a:p>
+            <a:pPr lvl="0" indent="0" marL="0">
+              <a:buNone/>
+            </a:pPr>
+            <a:r>
+              <a:rPr b="1"/>
+              <a:t>Parent item</a:t>
+            </a:r>
+          </a:p>
+          <a:p>
+            <a:pPr lvl="0" indent="0" marL="0">
+              <a:buNone/>
+            </a:pPr>
+            <a:r>
+              <a:rPr/>
+              <a:t>Stores item type, authors, title, journal, date, pages, and DOI.</a:t>
+            </a:r>
+          </a:p>
+          <a:p>
+            <a:pPr lvl="0" indent="0" marL="0">
+              <a:buNone/>
+            </a:pPr>
+            <a:r>
+              <a:rPr b="1"/>
+              <a:t>Child PDF</a:t>
+            </a:r>
+          </a:p>
+          <a:p>
+            <a:pPr lvl="0" indent="0" marL="0">
+              <a:buNone/>
+            </a:pPr>
+            <a:r>
+              <a:rPr/>
+              <a:t>Stores the article file and annotations.</a:t>
+            </a:r>
+          </a:p>
         </p:txBody>
       </p:sp>
     </p:spTree>
@@ -6818,20 +7567,67 @@
             <p:ph type="title"/>
           </p:nvPr>
         </p:nvSpPr>
-        <p:spPr bwMode="blackWhite">
-          <a:xfrm>
-            <a:off x="1097280" y="2386744"/>
-            <a:ext cx="9997440" cy="1645920"/>
-          </a:xfrm>
-          <a:solidFill>
-            <a:srgbClr val="FFFFFF"/>
-          </a:solidFill>
-          <a:ln w="38100">
-            <a:solidFill>
-              <a:srgbClr val="404040"/>
-            </a:solidFill>
+        <p:spPr>
+          <a:xfrm>
+            <a:off x="1097280" y="964692"/>
+            <a:ext cx="9997440" cy="1188720"/>
+          </a:xfrm>
+        </p:spPr>
+        <p:txBody>
+          <a:bodyPr/>
+          <a:lstStyle/>
+          <a:p>
+            <a:pPr lvl="0" indent="0" marL="0">
+              <a:buNone/>
+            </a:pPr>
+            <a:r>
+              <a:rPr/>
+              <a:t>7 Check every Zotero metadata field</a:t>
+            </a:r>
+          </a:p>
+        </p:txBody>
+      </p:sp>
+      <p:pic>
+        <p:nvPicPr>
+          <p:cNvPr descr="Annotated Zotero journal article record identifying the APA 7 metadata fields to verify" id="0" name="Picture 1"/>
+          <p:cNvPicPr>
+            <a:picLocks noGrp="1" noChangeAspect="1"/>
+          </p:cNvPicPr>
+          <p:nvPr/>
+        </p:nvPicPr>
+        <p:blipFill>
+          <a:blip r:embed="rId3"/>
+          <a:stretch>
+            <a:fillRect/>
+          </a:stretch>
+        </p:blipFill>
+        <p:spPr bwMode="auto">
+          <a:xfrm>
+            <a:off x="1308100" y="2628900"/>
+            <a:ext cx="4470400" cy="3098800"/>
+          </a:xfrm>
+          <a:prstGeom prst="rect">
+            <a:avLst/>
+          </a:prstGeom>
+          <a:noFill/>
+          <a:ln w="9525">
+            <a:noFill/>
+            <a:headEnd/>
+            <a:tailEnd/>
           </a:ln>
         </p:spPr>
+      </p:pic>
+      <p:sp>
+        <p:nvSpPr>
+          <p:cNvPr id="4" name="Content Placeholder 3"/>
+          <p:cNvSpPr>
+            <a:spLocks noGrp="1"/>
+          </p:cNvSpPr>
+          <p:nvPr>
+            <p:ph idx="2" sz="half"/>
+          </p:nvPr>
+        </p:nvSpPr>
+        <p:spPr/>
         <p:txBody>
           <a:bodyPr/>
           <a:lstStyle/>
@@ -6841,7 +7637,43 @@
             </a:pPr>
             <a:r>
               <a:rPr/>
-              <a:t>APA References</a:t>
+              <a:t>[Workbook step 4]</a:t>
+            </a:r>
+          </a:p>
+          <a:p>
+            <a:pPr lvl="0" indent="-457200" marL="457200">
+              <a:buAutoNum type="arabicPeriod"/>
+            </a:pPr>
+            <a:r>
+              <a:rPr/>
+              <a:t>Select the parent item.</a:t>
+            </a:r>
+          </a:p>
+          <a:p>
+            <a:pPr lvl="0" indent="-457200" marL="457200">
+              <a:buAutoNum type="arabicPeriod"/>
+            </a:pPr>
+            <a:r>
+              <a:rPr/>
+              <a:t>Confirm the item type.</a:t>
+            </a:r>
+          </a:p>
+          <a:p>
+            <a:pPr lvl="0" indent="-457200" marL="457200">
+              <a:buAutoNum type="arabicPeriod"/>
+            </a:pPr>
+            <a:r>
+              <a:rPr/>
+              <a:t>Check each APA field.</a:t>
+            </a:r>
+          </a:p>
+          <a:p>
+            <a:pPr lvl="0" indent="-457200" marL="457200">
+              <a:buAutoNum type="arabicPeriod"/>
+            </a:pPr>
+            <a:r>
+              <a:rPr/>
+              <a:t>Repair incorrect values.</a:t>
             </a:r>
           </a:p>
         </p:txBody>
@@ -6893,69 +7725,292 @@
             </a:pPr>
             <a:r>
               <a:rPr/>
-              <a:t>APA Style &amp; References</a:t>
-            </a:r>
-          </a:p>
-        </p:txBody>
-      </p:sp>
-      <p:pic>
-        <p:nvPicPr>
-          <p:cNvPr descr="Example of an APA-style References page" id="0" name="Picture 1"/>
-          <p:cNvPicPr>
-            <a:picLocks noGrp="1" noChangeAspect="1"/>
-          </p:cNvPicPr>
+              <a:t>8 Check sentence case and article numbers</a:t>
+            </a:r>
+          </a:p>
+        </p:txBody>
+      </p:sp>
+      <p:sp>
+        <p:nvSpPr>
+          <p:cNvPr id="1016" name="card-steel" descr="card: Sentence case. Capitalize the first word, proper nouns, and the first word after a colon."/>
+          <p:cNvSpPr/>
           <p:nvPr/>
-        </p:nvPicPr>
-        <p:blipFill>
-          <a:blip r:embed="rId2"/>
-          <a:stretch>
-            <a:fillRect/>
-          </a:stretch>
-        </p:blipFill>
-        <p:spPr bwMode="auto">
-          <a:xfrm>
-            <a:off x="5092700" y="2628900"/>
-            <a:ext cx="2006600" cy="2590800"/>
-          </a:xfrm>
-          <a:prstGeom prst="rect">
-            <a:avLst/>
+        </p:nvSpPr>
+        <p:spPr>
+          <a:xfrm>
+            <a:off x="1097280" y="2633472"/>
+            <a:ext cx="4924044" cy="1615440"/>
+          </a:xfrm>
+          <a:prstGeom prst="roundRect">
+            <a:avLst>
+              <a:gd name="adj" fmla="val 6000"/>
+            </a:avLst>
           </a:prstGeom>
-          <a:noFill/>
-          <a:ln w="9525">
+          <a:solidFill>
+            <a:srgbClr val="FEFDFA"/>
+          </a:solidFill>
+          <a:ln w="19050">
+            <a:solidFill>
+              <a:srgbClr val="CCCCCC"/>
+            </a:solidFill>
+          </a:ln>
+        </p:spPr>
+        <p:txBody>
+          <a:bodyPr lIns="182880" tIns="182880" rIns="182880" bIns="182880" anchor="t" wrap="square">
+            <a:normAutofit/>
+          </a:bodyPr>
+          <a:lstStyle/>
+          <a:p>
+            <a:pPr algn="l"/>
+            <a:r>
+              <a:rPr lang="en-US" sz="2200" b="1" dirty="0">
+                <a:solidFill>
+                  <a:srgbClr val="010B13"/>
+                </a:solidFill>
+              </a:rPr>
+              <a:t>Sentence case</a:t>
+            </a:r>
+          </a:p>
+          <a:p>
+            <a:pPr algn="l"/>
+            <a:r>
+              <a:rPr lang="en-US" sz="2000" b="0" dirty="0">
+                <a:solidFill>
+                  <a:srgbClr val="010B13"/>
+                </a:solidFill>
+              </a:rPr>
+              <a:t>Capitalize the first word, proper nouns, and the first word after a colon.</a:t>
+            </a:r>
+          </a:p>
+        </p:txBody>
+      </p:sp>
+      <p:sp>
+        <p:nvSpPr>
+          <p:cNvPr id="1017" name="card-rail" descr=""/>
+          <p:cNvSpPr/>
+          <p:nvPr/>
+        </p:nvSpPr>
+        <p:spPr>
+          <a:xfrm>
+            <a:off x="1097280" y="2633472"/>
+            <a:ext cx="54864" cy="1615440"/>
+          </a:xfrm>
+          <a:prstGeom prst="roundRect">
+            <a:avLst>
+              <a:gd name="adj" fmla="val 20000"/>
+            </a:avLst>
+          </a:prstGeom>
+          <a:solidFill>
+            <a:srgbClr val="010B13"/>
+          </a:solidFill>
+          <a:ln>
             <a:noFill/>
-            <a:headEnd/>
-            <a:tailEnd/>
           </a:ln>
         </p:spPr>
-      </p:pic>
-      <p:sp>
-        <p:nvSpPr>
-          <p:cNvPr id="1" name="TextBox 3"/>
-          <p:cNvSpPr txBox="1"/>
-          <p:nvPr>
-            <p:ph idx="1"/>
-          </p:nvPr>
+        <p:txBody>
+          <a:bodyPr lIns="182880" tIns="182880" rIns="182880" bIns="182880" anchor="t" wrap="square">
+            <a:normAutofit/>
+          </a:bodyPr>
+          <a:lstStyle/>
+          <a:p/>
+        </p:txBody>
+      </p:sp>
+      <p:sp>
+        <p:nvSpPr>
+          <p:cNvPr id="1018" name="card-red" descr="card: Article number. Enter Article 38 in the Pages field—not 38 alone."/>
+          <p:cNvSpPr/>
+          <p:nvPr/>
         </p:nvSpPr>
         <p:spPr>
           <a:xfrm>
-            <a:off x="1092200" y="5219700"/>
-            <a:ext cx="9994900" cy="508000"/>
-          </a:xfrm>
-          <a:prstGeom prst="rect">
-            <a:avLst/>
+            <a:off x="6167628" y="2633472"/>
+            <a:ext cx="4924044" cy="1310640"/>
+          </a:xfrm>
+          <a:prstGeom prst="roundRect">
+            <a:avLst>
+              <a:gd name="adj" fmla="val 6000"/>
+            </a:avLst>
           </a:prstGeom>
-          <a:noFill/>
-        </p:spPr>
-        <p:txBody>
-          <a:bodyPr/>
-          <a:lstStyle/>
-          <a:p>
-            <a:pPr lvl="0" indent="0" marL="0" algn="ctr">
-              <a:buNone/>
-            </a:pPr>
-            <a:r>
-              <a:rPr/>
-              <a:t>Example of an APA-style References page</a:t>
+          <a:solidFill>
+            <a:srgbClr val="FEFDFA"/>
+          </a:solidFill>
+          <a:ln w="19050">
+            <a:solidFill>
+              <a:srgbClr val="CCCCCC"/>
+            </a:solidFill>
+          </a:ln>
+        </p:spPr>
+        <p:txBody>
+          <a:bodyPr lIns="182880" tIns="182880" rIns="182880" bIns="182880" anchor="t" wrap="square">
+            <a:normAutofit/>
+          </a:bodyPr>
+          <a:lstStyle/>
+          <a:p>
+            <a:pPr algn="l"/>
+            <a:r>
+              <a:rPr lang="en-US" sz="2200" b="1" dirty="0">
+                <a:solidFill>
+                  <a:srgbClr val="D00000"/>
+                </a:solidFill>
+              </a:rPr>
+              <a:t>Article number</a:t>
+            </a:r>
+          </a:p>
+          <a:p>
+            <a:pPr algn="l"/>
+            <a:r>
+              <a:rPr lang="en-US" sz="2000" b="0" dirty="0">
+                <a:solidFill>
+                  <a:srgbClr val="010B13"/>
+                </a:solidFill>
+              </a:rPr>
+              <a:t>Enter Article 38 in the Pages field—not 38 alone.</a:t>
+            </a:r>
+          </a:p>
+        </p:txBody>
+      </p:sp>
+      <p:sp>
+        <p:nvSpPr>
+          <p:cNvPr id="1019" name="card-rail" descr=""/>
+          <p:cNvSpPr/>
+          <p:nvPr/>
+        </p:nvSpPr>
+        <p:spPr>
+          <a:xfrm>
+            <a:off x="6167628" y="2633472"/>
+            <a:ext cx="54864" cy="1310640"/>
+          </a:xfrm>
+          <a:prstGeom prst="roundRect">
+            <a:avLst>
+              <a:gd name="adj" fmla="val 20000"/>
+            </a:avLst>
+          </a:prstGeom>
+          <a:solidFill>
+            <a:srgbClr val="D00000"/>
+          </a:solidFill>
+          <a:ln>
+            <a:noFill/>
+          </a:ln>
+        </p:spPr>
+        <p:txBody>
+          <a:bodyPr lIns="182880" tIns="182880" rIns="182880" bIns="182880" anchor="t" wrap="square">
+            <a:normAutofit/>
+          </a:bodyPr>
+          <a:lstStyle/>
+          <a:p/>
+        </p:txBody>
+      </p:sp>
+      <p:sp>
+        <p:nvSpPr>
+          <p:cNvPr id="1020" name="callout-important" descr="important callout: Important. Zotero formats the metadata you enter; it does not correct it."/>
+          <p:cNvSpPr/>
+          <p:nvPr/>
+        </p:nvSpPr>
+        <p:spPr>
+          <a:xfrm>
+            <a:off x="1097280" y="4395216"/>
+            <a:ext cx="9994392" cy="1432560"/>
+          </a:xfrm>
+          <a:prstGeom prst="roundRect">
+            <a:avLst>
+              <a:gd name="adj" fmla="val 6000"/>
+            </a:avLst>
+          </a:prstGeom>
+          <a:solidFill>
+            <a:srgbClr val="FEFDFA"/>
+          </a:solidFill>
+          <a:ln w="19050">
+            <a:solidFill>
+              <a:srgbClr val="CC0000"/>
+            </a:solidFill>
+          </a:ln>
+        </p:spPr>
+        <p:txBody>
+          <a:bodyPr lIns="182880" tIns="182880" rIns="182880" bIns="182880" anchor="t" wrap="square">
+            <a:normAutofit/>
+          </a:bodyPr>
+          <a:lstStyle/>
+          <a:p/>
+        </p:txBody>
+      </p:sp>
+      <p:sp>
+        <p:nvSpPr>
+          <p:cNvPr id="1021" name="callout-title" descr=""/>
+          <p:cNvSpPr/>
+          <p:nvPr/>
+        </p:nvSpPr>
+        <p:spPr>
+          <a:xfrm>
+            <a:off x="1097280" y="4395216"/>
+            <a:ext cx="9994392" cy="426720"/>
+          </a:xfrm>
+          <a:prstGeom prst="roundRect">
+            <a:avLst>
+              <a:gd name="adj" fmla="val 6000"/>
+            </a:avLst>
+          </a:prstGeom>
+          <a:solidFill>
+            <a:srgbClr val="CC0000"/>
+          </a:solidFill>
+          <a:ln>
+            <a:noFill/>
+          </a:ln>
+        </p:spPr>
+        <p:txBody>
+          <a:bodyPr lIns="182880" tIns="0" rIns="182880" bIns="0" anchor="ctr" wrap="square">
+            <a:normAutofit/>
+          </a:bodyPr>
+          <a:lstStyle/>
+          <a:p>
+            <a:pPr algn="l"/>
+            <a:r>
+              <a:rPr lang="en-US" sz="2200" b="1" dirty="0">
+                <a:solidFill>
+                  <a:srgbClr val="FEFDFA"/>
+                </a:solidFill>
+              </a:rPr>
+              <a:t>Important</a:t>
+            </a:r>
+          </a:p>
+        </p:txBody>
+      </p:sp>
+      <p:sp>
+        <p:nvSpPr>
+          <p:cNvPr id="1022" name="callout-body" descr=""/>
+          <p:cNvSpPr/>
+          <p:nvPr/>
+        </p:nvSpPr>
+        <p:spPr>
+          <a:xfrm>
+            <a:off x="1097280" y="4821936"/>
+            <a:ext cx="9994392" cy="1005840"/>
+          </a:xfrm>
+          <a:prstGeom prst="roundRect">
+            <a:avLst>
+              <a:gd name="adj" fmla="val 6000"/>
+            </a:avLst>
+          </a:prstGeom>
+          <a:solidFill>
+            <a:srgbClr val="FEFDFA"/>
+          </a:solidFill>
+          <a:ln>
+            <a:noFill/>
+          </a:ln>
+        </p:spPr>
+        <p:txBody>
+          <a:bodyPr lIns="182880" tIns="182880" rIns="182880" bIns="182880" anchor="t" wrap="square">
+            <a:normAutofit/>
+          </a:bodyPr>
+          <a:lstStyle/>
+          <a:p>
+            <a:pPr algn="l"/>
+            <a:r>
+              <a:rPr lang="en-US" sz="2000" b="0" dirty="0">
+                <a:solidFill>
+                  <a:srgbClr val="010B13"/>
+                </a:solidFill>
+              </a:rPr>
+              <a:t>Zotero formats the metadata you enter; it does not correct it.</a:t>
             </a:r>
           </a:p>
         </p:txBody>
@@ -6982,7 +8037,7 @@
         <a:srgbClr val="E8E3CE"/>
       </a:lt2>
       <a:accent1>
-        <a:srgbClr val="F6A21D"/>
+        <a:srgbClr val="B65B00"/>
       </a:accent1>
       <a:accent2>
         <a:srgbClr val="5E5E5E"/>

--- a/labs/lab01/slides/slides.pptx
+++ b/labs/lab01/slides/slides.pptx
@@ -2894,8 +2894,8 @@
         </p:nvSpPr>
         <p:spPr>
           <a:xfrm>
-            <a:off x="1583436" y="2313433"/>
-            <a:ext cx="4270248" cy="704087"/>
+            <a:off x="1097280" y="2313433"/>
+            <a:ext cx="4907280" cy="548640"/>
           </a:xfrm>
         </p:spPr>
         <p:txBody>
@@ -2967,8 +2967,8 @@
         </p:nvSpPr>
         <p:spPr>
           <a:xfrm>
-            <a:off x="1583436" y="3143250"/>
-            <a:ext cx="4270248" cy="2596776"/>
+            <a:off x="1097280" y="2926080"/>
+            <a:ext cx="4907280" cy="3177540"/>
           </a:xfrm>
         </p:spPr>
         <p:txBody>
@@ -3024,8 +3024,8 @@
         </p:nvSpPr>
         <p:spPr>
           <a:xfrm>
-            <a:off x="6338316" y="3143250"/>
-            <a:ext cx="4253484" cy="2596776"/>
+            <a:off x="6187440" y="2926080"/>
+            <a:ext cx="4907280" cy="3177540"/>
           </a:xfrm>
         </p:spPr>
         <p:txBody>
@@ -3085,8 +3085,8 @@
         </p:nvSpPr>
         <p:spPr>
           <a:xfrm>
-            <a:off x="6338316" y="2313433"/>
-            <a:ext cx="4270248" cy="704087"/>
+            <a:off x="6187440" y="2313433"/>
+            <a:ext cx="4907280" cy="548640"/>
           </a:xfrm>
         </p:spPr>
         <p:txBody>
@@ -3221,7 +3221,12 @@
             <p:ph type="title"/>
           </p:nvPr>
         </p:nvSpPr>
-        <p:spPr/>
+        <p:spPr>
+          <a:xfrm>
+            <a:off x="1097280" y="964692"/>
+            <a:ext cx="9997440" cy="1188720"/>
+          </a:xfrm>
+        </p:spPr>
         <p:txBody>
           <a:bodyPr/>
           <a:lstStyle/>
@@ -4970,7 +4975,7 @@
             </a:pPr>
             <a:r>
               <a:rPr/>
-              <a:t>Select the parent item.</a:t>
+              <a:t>Select the parent item</a:t>
             </a:r>
           </a:p>
           <a:p>
@@ -4985,10 +4990,6 @@
               <a:rPr b="1"/>
               <a:t>Create Bibliography from Item</a:t>
             </a:r>
-            <a:r>
-              <a:rPr/>
-              <a:t>.</a:t>
-            </a:r>
           </a:p>
           <a:p>
             <a:pPr lvl="0" indent="-457200" marL="457200">
@@ -5010,10 +5011,6 @@
               <a:rPr b="1"/>
               <a:t>Copy to Clipboard</a:t>
             </a:r>
-            <a:r>
-              <a:rPr/>
-              <a:t>.</a:t>
-            </a:r>
           </a:p>
           <a:p>
             <a:pPr lvl="0" indent="-457200" marL="457200">
@@ -5021,7 +5018,7 @@
             </a:pPr>
             <a:r>
               <a:rPr/>
-              <a:t>Paste it into the workbook.</a:t>
+              <a:t>Paste it into the workbook</a:t>
             </a:r>
           </a:p>
         </p:txBody>
@@ -5145,7 +5142,13 @@
       </p:sp>
       <p:sp>
         <p:nvSpPr>
-          <p:cNvPr id="1024" name="card-rail" descr=""/>
+          <p:cNvPr id="1024" name="card-rail" descr="">
+            <a:extLst>
+              <a:ext uri="{C183D7F6-B498-43B3-948B-1728B52AA6E4}">
+                <adec:decorative xmlns:adec="http://schemas.microsoft.com/office/drawing/2017/decorative" val="1"/>
+              </a:ext>
+            </a:extLst>
+          </p:cNvPr>
           <p:cNvSpPr/>
           <p:nvPr/>
         </p:nvSpPr>
@@ -5230,7 +5233,13 @@
       </p:sp>
       <p:sp>
         <p:nvSpPr>
-          <p:cNvPr id="1026" name="card-rail" descr=""/>
+          <p:cNvPr id="1026" name="card-rail" descr="">
+            <a:extLst>
+              <a:ext uri="{C183D7F6-B498-43B3-948B-1728B52AA6E4}">
+                <adec:decorative xmlns:adec="http://schemas.microsoft.com/office/drawing/2017/decorative" val="1"/>
+              </a:ext>
+            </a:extLst>
+          </p:cNvPr>
           <p:cNvSpPr/>
           <p:nvPr/>
         </p:nvSpPr>
@@ -5485,7 +5494,7 @@
             </a:pPr>
             <a:r>
               <a:rPr/>
-              <a:t>Right-click the standalone PDF.</a:t>
+              <a:t>Right-click the standalone PDF</a:t>
             </a:r>
           </a:p>
           <a:p>
@@ -5500,10 +5509,6 @@
               <a:rPr b="1"/>
               <a:t>Create Parent Item</a:t>
             </a:r>
-            <a:r>
-              <a:rPr/>
-              <a:t>.</a:t>
-            </a:r>
           </a:p>
           <a:p>
             <a:pPr lvl="0" indent="-457200" marL="457200">
@@ -5519,7 +5524,7 @@
             </a:r>
             <a:r>
               <a:rPr/>
-              <a:t>; complete the fields.</a:t>
+              <a:t>; complete the fields</a:t>
             </a:r>
           </a:p>
         </p:txBody>
@@ -5571,7 +5576,7 @@
             </a:pPr>
             <a:r>
               <a:rPr/>
-              <a:t>12 The DOI tool creates an item record but may not attach the PDF</a:t>
+              <a:t>12 Add an item by DOI</a:t>
             </a:r>
           </a:p>
         </p:txBody>
@@ -5641,10 +5646,6 @@
               <a:rPr b="1"/>
               <a:t>Add Item by Identifier</a:t>
             </a:r>
-            <a:r>
-              <a:rPr/>
-              <a:t>.</a:t>
-            </a:r>
           </a:p>
           <a:p>
             <a:pPr lvl="0" indent="-457200" marL="457200">
@@ -5667,7 +5668,7 @@
             </a:pPr>
             <a:r>
               <a:rPr/>
-              <a:t>Review the new item’s metadata.</a:t>
+              <a:t>Review the new item’s metadata</a:t>
             </a:r>
           </a:p>
         </p:txBody>
@@ -5719,7 +5720,7 @@
             </a:pPr>
             <a:r>
               <a:rPr/>
-              <a:t>13 Choose the item type before entering books, chapters, and news</a:t>
+              <a:t>13 Choose the item type</a:t>
             </a:r>
           </a:p>
         </p:txBody>
@@ -5780,7 +5781,13 @@
       </p:sp>
       <p:sp>
         <p:nvSpPr>
-          <p:cNvPr id="1031" name="card-rail" descr=""/>
+          <p:cNvPr id="1031" name="card-rail" descr="">
+            <a:extLst>
+              <a:ext uri="{C183D7F6-B498-43B3-948B-1728B52AA6E4}">
+                <adec:decorative xmlns:adec="http://schemas.microsoft.com/office/drawing/2017/decorative" val="1"/>
+              </a:ext>
+            </a:extLst>
+          </p:cNvPr>
           <p:cNvSpPr/>
           <p:nvPr/>
         </p:nvSpPr>
@@ -5865,7 +5872,13 @@
       </p:sp>
       <p:sp>
         <p:nvSpPr>
-          <p:cNvPr id="1033" name="card-rail" descr=""/>
+          <p:cNvPr id="1033" name="card-rail" descr="">
+            <a:extLst>
+              <a:ext uri="{C183D7F6-B498-43B3-948B-1728B52AA6E4}">
+                <adec:decorative xmlns:adec="http://schemas.microsoft.com/office/drawing/2017/decorative" val="1"/>
+              </a:ext>
+            </a:extLst>
+          </p:cNvPr>
           <p:cNvSpPr/>
           <p:nvPr/>
         </p:nvSpPr>
@@ -5950,7 +5963,13 @@
       </p:sp>
       <p:sp>
         <p:nvSpPr>
-          <p:cNvPr id="1035" name="card-rail" descr=""/>
+          <p:cNvPr id="1035" name="card-rail" descr="">
+            <a:extLst>
+              <a:ext uri="{C183D7F6-B498-43B3-948B-1728B52AA6E4}">
+                <adec:decorative xmlns:adec="http://schemas.microsoft.com/office/drawing/2017/decorative" val="1"/>
+              </a:ext>
+            </a:extLst>
+          </p:cNvPr>
           <p:cNvSpPr/>
           <p:nvPr/>
         </p:nvSpPr>
@@ -6244,7 +6263,7 @@
             </a:pPr>
             <a:r>
               <a:rPr/>
-              <a:t>1 Today you will organize, verify, and export two Zotero collections</a:t>
+              <a:t>1 Organize, verify, and export</a:t>
             </a:r>
           </a:p>
         </p:txBody>
@@ -6305,7 +6324,13 @@
       </p:sp>
       <p:sp>
         <p:nvSpPr>
-          <p:cNvPr id="1002" name="card-rail" descr=""/>
+          <p:cNvPr id="1002" name="card-rail" descr="">
+            <a:extLst>
+              <a:ext uri="{C183D7F6-B498-43B3-948B-1728B52AA6E4}">
+                <adec:decorative xmlns:adec="http://schemas.microsoft.com/office/drawing/2017/decorative" val="1"/>
+              </a:ext>
+            </a:extLst>
+          </p:cNvPr>
           <p:cNvSpPr/>
           <p:nvPr/>
         </p:nvSpPr>
@@ -6390,7 +6415,13 @@
       </p:sp>
       <p:sp>
         <p:nvSpPr>
-          <p:cNvPr id="1004" name="card-rail" descr=""/>
+          <p:cNvPr id="1004" name="card-rail" descr="">
+            <a:extLst>
+              <a:ext uri="{C183D7F6-B498-43B3-948B-1728B52AA6E4}">
+                <adec:decorative xmlns:adec="http://schemas.microsoft.com/office/drawing/2017/decorative" val="1"/>
+              </a:ext>
+            </a:extLst>
+          </p:cNvPr>
           <p:cNvSpPr/>
           <p:nvPr/>
         </p:nvSpPr>
@@ -6475,7 +6506,13 @@
       </p:sp>
       <p:sp>
         <p:nvSpPr>
-          <p:cNvPr id="1006" name="card-rail" descr=""/>
+          <p:cNvPr id="1006" name="card-rail" descr="">
+            <a:extLst>
+              <a:ext uri="{C183D7F6-B498-43B3-948B-1728B52AA6E4}">
+                <adec:decorative xmlns:adec="http://schemas.microsoft.com/office/drawing/2017/decorative" val="1"/>
+              </a:ext>
+            </a:extLst>
+          </p:cNvPr>
           <p:cNvSpPr/>
           <p:nvPr/>
         </p:nvSpPr>
@@ -6551,7 +6588,7 @@
             </a:pPr>
             <a:r>
               <a:rPr/>
-              <a:t>2 Open Zotero and the Lab 1 worksheet before you begin</a:t>
+              <a:t>2 Open the Lab 01 tools</a:t>
             </a:r>
           </a:p>
         </p:txBody>
@@ -6565,7 +6602,7 @@
         <p:spPr>
           <a:xfrm>
             <a:off x="1097280" y="2633472"/>
-            <a:ext cx="3233928" cy="1210131"/>
+            <a:ext cx="3233928" cy="1615440"/>
           </a:xfrm>
           <a:prstGeom prst="roundRect">
             <a:avLst>
@@ -6589,7 +6626,7 @@
           <a:p>
             <a:pPr algn="l"/>
             <a:r>
-              <a:rPr lang="en-US" sz="1965" b="1" dirty="0">
+              <a:rPr lang="en-US" sz="2200" b="1" dirty="0">
                 <a:solidFill>
                   <a:srgbClr val="D00000"/>
                 </a:solidFill>
@@ -6600,7 +6637,7 @@
           <a:p>
             <a:pPr algn="l"/>
             <a:r>
-              <a:rPr lang="en-US" sz="1787" b="0" dirty="0">
+              <a:rPr lang="en-US" sz="2000" b="0" dirty="0">
                 <a:solidFill>
                   <a:srgbClr val="010B13"/>
                 </a:solidFill>
@@ -6613,14 +6650,20 @@
       </p:sp>
       <p:sp>
         <p:nvSpPr>
-          <p:cNvPr id="1008" name="card-rail" descr=""/>
+          <p:cNvPr id="1008" name="card-rail" descr="">
+            <a:extLst>
+              <a:ext uri="{C183D7F6-B498-43B3-948B-1728B52AA6E4}">
+                <adec:decorative xmlns:adec="http://schemas.microsoft.com/office/drawing/2017/decorative" val="1"/>
+              </a:ext>
+            </a:extLst>
+          </p:cNvPr>
           <p:cNvSpPr/>
           <p:nvPr/>
         </p:nvSpPr>
         <p:spPr>
           <a:xfrm>
             <a:off x="1097280" y="2633472"/>
-            <a:ext cx="54864" cy="1210131"/>
+            <a:ext cx="54864" cy="1615440"/>
           </a:xfrm>
           <a:prstGeom prst="roundRect">
             <a:avLst>
@@ -6644,14 +6687,14 @@
       </p:sp>
       <p:sp>
         <p:nvSpPr>
-          <p:cNvPr id="1009" name="card-steel" descr="card: Lab 1 worksheet. Open the document you will submit."/>
+          <p:cNvPr id="1009" name="card-steel" descr="card: Lab 1 worksheet. Worksheet: lab schedule"/>
           <p:cNvSpPr/>
           <p:nvPr/>
         </p:nvSpPr>
         <p:spPr>
           <a:xfrm>
             <a:off x="4477512" y="2633472"/>
-            <a:ext cx="3233928" cy="1210131"/>
+            <a:ext cx="3233928" cy="1310640"/>
           </a:xfrm>
           <a:prstGeom prst="roundRect">
             <a:avLst>
@@ -6675,7 +6718,7 @@
           <a:p>
             <a:pPr algn="l"/>
             <a:r>
-              <a:rPr lang="en-US" sz="1965" b="1" dirty="0">
+              <a:rPr lang="en-US" sz="2200" b="1" dirty="0">
                 <a:solidFill>
                   <a:srgbClr val="010B13"/>
                 </a:solidFill>
@@ -6686,26 +6729,33 @@
           <a:p>
             <a:pPr algn="l"/>
             <a:r>
-              <a:rPr lang="en-US" sz="1787" b="0" dirty="0">
+              <a:rPr lang="en-US" sz="2000" b="0" dirty="0">
                 <a:solidFill>
                   <a:srgbClr val="010B13"/>
                 </a:solidFill>
+                <a:hlinkClick r:id="rId4"/>
               </a:rPr>
-              <a:t>Open the document you will submit.</a:t>
-            </a:r>
-          </a:p>
-        </p:txBody>
-      </p:sp>
-      <p:sp>
-        <p:nvSpPr>
-          <p:cNvPr id="1010" name="card-rail" descr=""/>
+              <a:t>Worksheet: lab schedule</a:t>
+            </a:r>
+          </a:p>
+        </p:txBody>
+      </p:sp>
+      <p:sp>
+        <p:nvSpPr>
+          <p:cNvPr id="1010" name="card-rail" descr="">
+            <a:extLst>
+              <a:ext uri="{C183D7F6-B498-43B3-948B-1728B52AA6E4}">
+                <adec:decorative xmlns:adec="http://schemas.microsoft.com/office/drawing/2017/decorative" val="1"/>
+              </a:ext>
+            </a:extLst>
+          </p:cNvPr>
           <p:cNvSpPr/>
           <p:nvPr/>
         </p:nvSpPr>
         <p:spPr>
           <a:xfrm>
             <a:off x="4477512" y="2633472"/>
-            <a:ext cx="54864" cy="1210131"/>
+            <a:ext cx="54864" cy="1310640"/>
           </a:xfrm>
           <a:prstGeom prst="roundRect">
             <a:avLst>
@@ -6729,14 +6779,14 @@
       </p:sp>
       <p:sp>
         <p:nvSpPr>
-          <p:cNvPr id="1011" name="card-steel" descr="card: Online workbook. Keep the online workbook open."/>
+          <p:cNvPr id="1011" name="card-steel" descr="card: Online workbook. Zotero workbook"/>
           <p:cNvSpPr/>
           <p:nvPr/>
         </p:nvSpPr>
         <p:spPr>
           <a:xfrm>
             <a:off x="7857744" y="2633472"/>
-            <a:ext cx="3233928" cy="1210131"/>
+            <a:ext cx="3233928" cy="1005840"/>
           </a:xfrm>
           <a:prstGeom prst="roundRect">
             <a:avLst>
@@ -6760,7 +6810,7 @@
           <a:p>
             <a:pPr algn="l"/>
             <a:r>
-              <a:rPr lang="en-US" sz="1965" b="1" dirty="0">
+              <a:rPr lang="en-US" sz="2200" b="1" dirty="0">
                 <a:solidFill>
                   <a:srgbClr val="010B13"/>
                 </a:solidFill>
@@ -6771,26 +6821,33 @@
           <a:p>
             <a:pPr algn="l"/>
             <a:r>
-              <a:rPr lang="en-US" sz="1787" b="0" dirty="0">
+              <a:rPr lang="en-US" sz="2000" b="0" dirty="0">
                 <a:solidFill>
                   <a:srgbClr val="010B13"/>
                 </a:solidFill>
+                <a:hlinkClick r:id="rId5"/>
               </a:rPr>
-              <a:t>Keep the online workbook open.</a:t>
-            </a:r>
-          </a:p>
-        </p:txBody>
-      </p:sp>
-      <p:sp>
-        <p:nvSpPr>
-          <p:cNvPr id="1012" name="card-rail" descr=""/>
+              <a:t>Zotero workbook</a:t>
+            </a:r>
+          </a:p>
+        </p:txBody>
+      </p:sp>
+      <p:sp>
+        <p:nvSpPr>
+          <p:cNvPr id="1012" name="card-rail" descr="">
+            <a:extLst>
+              <a:ext uri="{C183D7F6-B498-43B3-948B-1728B52AA6E4}">
+                <adec:decorative xmlns:adec="http://schemas.microsoft.com/office/drawing/2017/decorative" val="1"/>
+              </a:ext>
+            </a:extLst>
+          </p:cNvPr>
           <p:cNvSpPr/>
           <p:nvPr/>
         </p:nvSpPr>
         <p:spPr>
           <a:xfrm>
             <a:off x="7857744" y="2633472"/>
-            <a:ext cx="54864" cy="1210131"/>
+            <a:ext cx="54864" cy="1005840"/>
           </a:xfrm>
           <a:prstGeom prst="roundRect">
             <a:avLst>
@@ -6814,14 +6871,14 @@
       </p:sp>
       <p:sp>
         <p:nvSpPr>
-          <p:cNvPr id="1013" name="callout-note" descr="note callout: Note. The screenshots are illustrative; controls may appear in a different location in Zotero 9 or the Zotero 10 beta."/>
+          <p:cNvPr id="1013" name="callout-note" descr="note callout: Note. Controls may look different in your version of Zotero"/>
           <p:cNvSpPr/>
           <p:nvPr/>
         </p:nvSpPr>
         <p:spPr>
           <a:xfrm>
-            <a:off x="1097280" y="3989907"/>
-            <a:ext cx="9994392" cy="1591459"/>
+            <a:off x="1097280" y="4395216"/>
+            <a:ext cx="9994392" cy="1432560"/>
           </a:xfrm>
           <a:prstGeom prst="roundRect">
             <a:avLst>
@@ -6853,8 +6910,8 @@
         </p:nvSpPr>
         <p:spPr>
           <a:xfrm>
-            <a:off x="1097280" y="3989907"/>
-            <a:ext cx="9994392" cy="381328"/>
+            <a:off x="1097280" y="4395216"/>
+            <a:ext cx="9994392" cy="426720"/>
           </a:xfrm>
           <a:prstGeom prst="roundRect">
             <a:avLst>
@@ -6876,7 +6933,7 @@
           <a:p>
             <a:pPr algn="l"/>
             <a:r>
-              <a:rPr lang="en-US" sz="1965" b="1" dirty="0">
+              <a:rPr lang="en-US" sz="2200" b="1" dirty="0">
                 <a:solidFill>
                   <a:srgbClr val="FEFDFA"/>
                 </a:solidFill>
@@ -6894,8 +6951,8 @@
         </p:nvSpPr>
         <p:spPr>
           <a:xfrm>
-            <a:off x="1097280" y="4371235"/>
-            <a:ext cx="9994392" cy="1210131"/>
+            <a:off x="1097280" y="4821936"/>
+            <a:ext cx="9994392" cy="1005840"/>
           </a:xfrm>
           <a:prstGeom prst="roundRect">
             <a:avLst>
@@ -6917,12 +6974,12 @@
           <a:p>
             <a:pPr algn="l"/>
             <a:r>
-              <a:rPr lang="en-US" sz="1787" b="0" dirty="0">
+              <a:rPr lang="en-US" sz="2000" b="0" dirty="0">
                 <a:solidFill>
                   <a:srgbClr val="010B13"/>
                 </a:solidFill>
               </a:rPr>
-              <a:t>The screenshots are illustrative; controls may appear in a different location in Zotero 9 or the Zotero 10 beta.</a:t>
+              <a:t>Controls may look different in your version of Zotero</a:t>
             </a:r>
           </a:p>
         </p:txBody>
@@ -6974,7 +7031,7 @@
             </a:pPr>
             <a:r>
               <a:rPr/>
-              <a:t>3 Zotero keeps collections, items, and metadata in three connected panels</a:t>
+              <a:t>3 Find collections, items, and metadata</a:t>
             </a:r>
           </a:p>
         </p:txBody>
@@ -7134,10 +7191,6 @@
               </a:rPr>
               <a:t>[Your Name] APA Walk-Through</a:t>
             </a:r>
-            <a:r>
-              <a:rPr/>
-              <a:t> before adding sources</a:t>
-            </a:r>
           </a:p>
         </p:txBody>
       </p:sp>
@@ -7210,10 +7263,6 @@
               <a:rPr b="1"/>
               <a:t>New Collection</a:t>
             </a:r>
-            <a:r>
-              <a:rPr/>
-              <a:t>.</a:t>
-            </a:r>
           </a:p>
           <a:p>
             <a:pPr lvl="0" indent="0" marL="0">
@@ -7225,7 +7274,7 @@
             </a:r>
             <a:r>
               <a:rPr/>
-              <a:t> Enter the exact collection name.</a:t>
+              <a:t> Enter the exact collection name</a:t>
             </a:r>
           </a:p>
           <a:p>
@@ -7243,10 +7292,6 @@
             <a:r>
               <a:rPr b="1"/>
               <a:t>My Library</a:t>
-            </a:r>
-            <a:r>
-              <a:rPr/>
-              <a:t>.</a:t>
             </a:r>
           </a:p>
         </p:txBody>
@@ -7368,10 +7413,6 @@
               <a:rPr b="1"/>
               <a:t>ChatGPT is bullshit</a:t>
             </a:r>
-            <a:r>
-              <a:rPr/>
-              <a:t>.</a:t>
-            </a:r>
           </a:p>
           <a:p>
             <a:pPr lvl="0" indent="-457200" marL="457200">
@@ -7379,7 +7420,7 @@
             </a:pPr>
             <a:r>
               <a:rPr/>
-              <a:t>Download its PDF.</a:t>
+              <a:t>Download its PDF</a:t>
             </a:r>
           </a:p>
           <a:p>
@@ -7388,15 +7429,7 @@
             </a:pPr>
             <a:r>
               <a:rPr/>
-              <a:t>Drag it into the named collection—not only </a:t>
-            </a:r>
-            <a:r>
-              <a:rPr b="1"/>
-              <a:t>My Library</a:t>
-            </a:r>
-            <a:r>
-              <a:rPr/>
-              <a:t>.</a:t>
+              <a:t>Drag it into the named collection</a:t>
             </a:r>
           </a:p>
         </p:txBody>
@@ -7448,7 +7481,7 @@
             </a:pPr>
             <a:r>
               <a:rPr/>
-              <a:t>6 The parent item—not the PDF—stores citation metadata</a:t>
+              <a:t>6 Edit metadata in the parent item</a:t>
             </a:r>
           </a:p>
         </p:txBody>
@@ -7646,7 +7679,7 @@
             </a:pPr>
             <a:r>
               <a:rPr/>
-              <a:t>Select the parent item.</a:t>
+              <a:t>Select the parent item</a:t>
             </a:r>
           </a:p>
           <a:p>
@@ -7655,7 +7688,7 @@
             </a:pPr>
             <a:r>
               <a:rPr/>
-              <a:t>Confirm the item type.</a:t>
+              <a:t>Confirm the item type</a:t>
             </a:r>
           </a:p>
           <a:p>
@@ -7664,7 +7697,7 @@
             </a:pPr>
             <a:r>
               <a:rPr/>
-              <a:t>Check each APA field.</a:t>
+              <a:t>Check each APA field</a:t>
             </a:r>
           </a:p>
           <a:p>
@@ -7673,7 +7706,7 @@
             </a:pPr>
             <a:r>
               <a:rPr/>
-              <a:t>Repair incorrect values.</a:t>
+              <a:t>Repair incorrect values</a:t>
             </a:r>
           </a:p>
         </p:txBody>
@@ -7786,7 +7819,13 @@
       </p:sp>
       <p:sp>
         <p:nvSpPr>
-          <p:cNvPr id="1017" name="card-rail" descr=""/>
+          <p:cNvPr id="1017" name="card-rail" descr="">
+            <a:extLst>
+              <a:ext uri="{C183D7F6-B498-43B3-948B-1728B52AA6E4}">
+                <adec:decorative xmlns:adec="http://schemas.microsoft.com/office/drawing/2017/decorative" val="1"/>
+              </a:ext>
+            </a:extLst>
+          </p:cNvPr>
           <p:cNvSpPr/>
           <p:nvPr/>
         </p:nvSpPr>
@@ -7871,7 +7910,13 @@
       </p:sp>
       <p:sp>
         <p:nvSpPr>
-          <p:cNvPr id="1019" name="card-rail" descr=""/>
+          <p:cNvPr id="1019" name="card-rail" descr="">
+            <a:extLst>
+              <a:ext uri="{C183D7F6-B498-43B3-948B-1728B52AA6E4}">
+                <adec:decorative xmlns:adec="http://schemas.microsoft.com/office/drawing/2017/decorative" val="1"/>
+              </a:ext>
+            </a:extLst>
+          </p:cNvPr>
           <p:cNvSpPr/>
           <p:nvPr/>
         </p:nvSpPr>
